--- a/audit_ml_project/outputs/report/智慧审计_机器学习_10页汇报.pptx
+++ b/audit_ml_project/outputs/report/智慧审计_机器学习_10页汇报.pptx
@@ -141,7 +141,7 @@
           <p:cNvPr id="2" name="标题 1">
             <a:extLst>
               <a:ext uri="{FF2B5EF4-FFF2-40B4-BE49-F238E27FC236}">
-                <a16:creationId xmlns:a16="http://schemas.microsoft.com/office/drawing/2014/main" id="{728BB118-F7D0-1A12-774F-68E4B41F6652}"/>
+                <a16:creationId xmlns:a16="http://schemas.microsoft.com/office/drawing/2014/main" id="{E76F44D1-E633-F82D-C517-D74088F4C231}"/>
               </a:ext>
             </a:extLst>
           </p:cNvPr>
@@ -178,7 +178,7 @@
           <p:cNvPr id="3" name="副标题 2">
             <a:extLst>
               <a:ext uri="{FF2B5EF4-FFF2-40B4-BE49-F238E27FC236}">
-                <a16:creationId xmlns:a16="http://schemas.microsoft.com/office/drawing/2014/main" id="{DB3E8C4A-EB16-8A8E-A894-A9829A1D903E}"/>
+                <a16:creationId xmlns:a16="http://schemas.microsoft.com/office/drawing/2014/main" id="{45489516-535A-FF1C-F2BE-2BD8D1FAB48E}"/>
               </a:ext>
             </a:extLst>
           </p:cNvPr>
@@ -248,7 +248,7 @@
           <p:cNvPr id="4" name="日期占位符 3">
             <a:extLst>
               <a:ext uri="{FF2B5EF4-FFF2-40B4-BE49-F238E27FC236}">
-                <a16:creationId xmlns:a16="http://schemas.microsoft.com/office/drawing/2014/main" id="{FD1D4A17-13FC-93F2-32F0-3EEAED0E2F43}"/>
+                <a16:creationId xmlns:a16="http://schemas.microsoft.com/office/drawing/2014/main" id="{FCF9E8B2-BA0E-D5CA-FCC8-468CFD4C644F}"/>
               </a:ext>
             </a:extLst>
           </p:cNvPr>
@@ -264,7 +264,7 @@
           <a:bodyPr/>
           <a:lstStyle/>
           <a:p>
-            <a:fld id="{E0DD038B-8963-4682-9B6A-77DD6731484F}" type="datetimeFigureOut">
+            <a:fld id="{FD7079CB-071A-449F-AAB0-43D7BB178EB7}" type="datetimeFigureOut">
               <a:rPr lang="zh-CN" altLang="en-US" smtClean="0"/>
               <a:t>2026/10/19</a:t>
             </a:fld>
@@ -277,7 +277,7 @@
           <p:cNvPr id="5" name="页脚占位符 4">
             <a:extLst>
               <a:ext uri="{FF2B5EF4-FFF2-40B4-BE49-F238E27FC236}">
-                <a16:creationId xmlns:a16="http://schemas.microsoft.com/office/drawing/2014/main" id="{AC72B615-7554-B2EA-A7E9-C90357C9B9A7}"/>
+                <a16:creationId xmlns:a16="http://schemas.microsoft.com/office/drawing/2014/main" id="{4835CAF6-ABCC-E653-3B81-C6A1D3EB5215}"/>
               </a:ext>
             </a:extLst>
           </p:cNvPr>
@@ -302,7 +302,7 @@
           <p:cNvPr id="6" name="灯片编号占位符 5">
             <a:extLst>
               <a:ext uri="{FF2B5EF4-FFF2-40B4-BE49-F238E27FC236}">
-                <a16:creationId xmlns:a16="http://schemas.microsoft.com/office/drawing/2014/main" id="{C2E48092-04A2-58F8-2778-78CA2829A042}"/>
+                <a16:creationId xmlns:a16="http://schemas.microsoft.com/office/drawing/2014/main" id="{B18473E4-E998-63D5-A6AB-B9A49D0215CA}"/>
               </a:ext>
             </a:extLst>
           </p:cNvPr>
@@ -318,7 +318,7 @@
           <a:bodyPr/>
           <a:lstStyle/>
           <a:p>
-            <a:fld id="{A7784EAB-20A2-4BDB-8C23-CD8580ABFC8F}" type="slidenum">
+            <a:fld id="{0F1972F0-3F01-4D16-8DBE-E2786E6451C7}" type="slidenum">
               <a:rPr lang="zh-CN" altLang="en-US" smtClean="0"/>
               <a:t>‹#›</a:t>
             </a:fld>
@@ -329,7 +329,7 @@
     </p:spTree>
     <p:extLst>
       <p:ext uri="{BB962C8B-B14F-4D97-AF65-F5344CB8AC3E}">
-        <p14:creationId xmlns:p14="http://schemas.microsoft.com/office/powerpoint/2010/main" val="1788513568"/>
+        <p14:creationId xmlns:p14="http://schemas.microsoft.com/office/powerpoint/2010/main" val="1830554103"/>
       </p:ext>
     </p:extLst>
   </p:cSld>
@@ -361,7 +361,7 @@
           <p:cNvPr id="2" name="标题 1">
             <a:extLst>
               <a:ext uri="{FF2B5EF4-FFF2-40B4-BE49-F238E27FC236}">
-                <a16:creationId xmlns:a16="http://schemas.microsoft.com/office/drawing/2014/main" id="{74FC4F33-2B46-93F8-5FFF-DD7C60E8C2BB}"/>
+                <a16:creationId xmlns:a16="http://schemas.microsoft.com/office/drawing/2014/main" id="{25387EA9-ABAF-7C3B-0601-D31EFBD406AD}"/>
               </a:ext>
             </a:extLst>
           </p:cNvPr>
@@ -389,7 +389,7 @@
           <p:cNvPr id="3" name="竖排文字占位符 2">
             <a:extLst>
               <a:ext uri="{FF2B5EF4-FFF2-40B4-BE49-F238E27FC236}">
-                <a16:creationId xmlns:a16="http://schemas.microsoft.com/office/drawing/2014/main" id="{A910F173-9348-9493-B6DC-0D9F50F263B7}"/>
+                <a16:creationId xmlns:a16="http://schemas.microsoft.com/office/drawing/2014/main" id="{AFA6F932-5AAE-F1DC-F35D-D17471478EC6}"/>
               </a:ext>
             </a:extLst>
           </p:cNvPr>
@@ -446,7 +446,7 @@
           <p:cNvPr id="4" name="日期占位符 3">
             <a:extLst>
               <a:ext uri="{FF2B5EF4-FFF2-40B4-BE49-F238E27FC236}">
-                <a16:creationId xmlns:a16="http://schemas.microsoft.com/office/drawing/2014/main" id="{A13A3E0D-D58B-6CD2-8C7A-A8D560887E3E}"/>
+                <a16:creationId xmlns:a16="http://schemas.microsoft.com/office/drawing/2014/main" id="{533B271E-9F88-F57C-CE32-72C60DE20C20}"/>
               </a:ext>
             </a:extLst>
           </p:cNvPr>
@@ -462,7 +462,7 @@
           <a:bodyPr/>
           <a:lstStyle/>
           <a:p>
-            <a:fld id="{E0DD038B-8963-4682-9B6A-77DD6731484F}" type="datetimeFigureOut">
+            <a:fld id="{FD7079CB-071A-449F-AAB0-43D7BB178EB7}" type="datetimeFigureOut">
               <a:rPr lang="zh-CN" altLang="en-US" smtClean="0"/>
               <a:t>2026/10/19</a:t>
             </a:fld>
@@ -475,7 +475,7 @@
           <p:cNvPr id="5" name="页脚占位符 4">
             <a:extLst>
               <a:ext uri="{FF2B5EF4-FFF2-40B4-BE49-F238E27FC236}">
-                <a16:creationId xmlns:a16="http://schemas.microsoft.com/office/drawing/2014/main" id="{DA16F96A-96BF-CC3C-7A3B-B814EB4A5351}"/>
+                <a16:creationId xmlns:a16="http://schemas.microsoft.com/office/drawing/2014/main" id="{7A37D3C8-D0B3-F708-4D64-B4CEBD0F6341}"/>
               </a:ext>
             </a:extLst>
           </p:cNvPr>
@@ -500,7 +500,7 @@
           <p:cNvPr id="6" name="灯片编号占位符 5">
             <a:extLst>
               <a:ext uri="{FF2B5EF4-FFF2-40B4-BE49-F238E27FC236}">
-                <a16:creationId xmlns:a16="http://schemas.microsoft.com/office/drawing/2014/main" id="{AF804120-3916-C862-7E0F-D054C9F82E0B}"/>
+                <a16:creationId xmlns:a16="http://schemas.microsoft.com/office/drawing/2014/main" id="{4287BAD9-A68B-AC2B-B2DC-F1D530F3CD76}"/>
               </a:ext>
             </a:extLst>
           </p:cNvPr>
@@ -516,7 +516,7 @@
           <a:bodyPr/>
           <a:lstStyle/>
           <a:p>
-            <a:fld id="{A7784EAB-20A2-4BDB-8C23-CD8580ABFC8F}" type="slidenum">
+            <a:fld id="{0F1972F0-3F01-4D16-8DBE-E2786E6451C7}" type="slidenum">
               <a:rPr lang="zh-CN" altLang="en-US" smtClean="0"/>
               <a:t>‹#›</a:t>
             </a:fld>
@@ -527,7 +527,7 @@
     </p:spTree>
     <p:extLst>
       <p:ext uri="{BB962C8B-B14F-4D97-AF65-F5344CB8AC3E}">
-        <p14:creationId xmlns:p14="http://schemas.microsoft.com/office/powerpoint/2010/main" val="289462906"/>
+        <p14:creationId xmlns:p14="http://schemas.microsoft.com/office/powerpoint/2010/main" val="4091145702"/>
       </p:ext>
     </p:extLst>
   </p:cSld>
@@ -559,7 +559,7 @@
           <p:cNvPr id="2" name="竖排标题 1">
             <a:extLst>
               <a:ext uri="{FF2B5EF4-FFF2-40B4-BE49-F238E27FC236}">
-                <a16:creationId xmlns:a16="http://schemas.microsoft.com/office/drawing/2014/main" id="{2CDA2DF6-216F-8383-2F6B-5C32F4DB653E}"/>
+                <a16:creationId xmlns:a16="http://schemas.microsoft.com/office/drawing/2014/main" id="{DCF14093-87A1-B4BF-EAC9-281DF5BF2AC2}"/>
               </a:ext>
             </a:extLst>
           </p:cNvPr>
@@ -592,7 +592,7 @@
           <p:cNvPr id="3" name="竖排文字占位符 2">
             <a:extLst>
               <a:ext uri="{FF2B5EF4-FFF2-40B4-BE49-F238E27FC236}">
-                <a16:creationId xmlns:a16="http://schemas.microsoft.com/office/drawing/2014/main" id="{95CD1B05-ADCB-6068-617E-2118F922588E}"/>
+                <a16:creationId xmlns:a16="http://schemas.microsoft.com/office/drawing/2014/main" id="{8FAA5F14-C8F0-1EC0-1C5F-81C18B2B80B2}"/>
               </a:ext>
             </a:extLst>
           </p:cNvPr>
@@ -654,7 +654,7 @@
           <p:cNvPr id="4" name="日期占位符 3">
             <a:extLst>
               <a:ext uri="{FF2B5EF4-FFF2-40B4-BE49-F238E27FC236}">
-                <a16:creationId xmlns:a16="http://schemas.microsoft.com/office/drawing/2014/main" id="{21EA4DD0-B158-ABCC-9ECD-17C0055C3957}"/>
+                <a16:creationId xmlns:a16="http://schemas.microsoft.com/office/drawing/2014/main" id="{6FACBED7-04D2-75B6-146F-4BBC5CE8DBA3}"/>
               </a:ext>
             </a:extLst>
           </p:cNvPr>
@@ -670,7 +670,7 @@
           <a:bodyPr/>
           <a:lstStyle/>
           <a:p>
-            <a:fld id="{E0DD038B-8963-4682-9B6A-77DD6731484F}" type="datetimeFigureOut">
+            <a:fld id="{FD7079CB-071A-449F-AAB0-43D7BB178EB7}" type="datetimeFigureOut">
               <a:rPr lang="zh-CN" altLang="en-US" smtClean="0"/>
               <a:t>2026/10/19</a:t>
             </a:fld>
@@ -683,7 +683,7 @@
           <p:cNvPr id="5" name="页脚占位符 4">
             <a:extLst>
               <a:ext uri="{FF2B5EF4-FFF2-40B4-BE49-F238E27FC236}">
-                <a16:creationId xmlns:a16="http://schemas.microsoft.com/office/drawing/2014/main" id="{F9D90A31-2713-C5EB-41F3-BAC387C9DCE2}"/>
+                <a16:creationId xmlns:a16="http://schemas.microsoft.com/office/drawing/2014/main" id="{68F722FD-E955-7FE9-064B-7EE2D94A229E}"/>
               </a:ext>
             </a:extLst>
           </p:cNvPr>
@@ -708,7 +708,7 @@
           <p:cNvPr id="6" name="灯片编号占位符 5">
             <a:extLst>
               <a:ext uri="{FF2B5EF4-FFF2-40B4-BE49-F238E27FC236}">
-                <a16:creationId xmlns:a16="http://schemas.microsoft.com/office/drawing/2014/main" id="{FAAB6D45-2F1C-2394-127F-4A071C70FDB1}"/>
+                <a16:creationId xmlns:a16="http://schemas.microsoft.com/office/drawing/2014/main" id="{F7CFEE9A-CEA2-E387-23E3-0EF200FA897D}"/>
               </a:ext>
             </a:extLst>
           </p:cNvPr>
@@ -724,7 +724,7 @@
           <a:bodyPr/>
           <a:lstStyle/>
           <a:p>
-            <a:fld id="{A7784EAB-20A2-4BDB-8C23-CD8580ABFC8F}" type="slidenum">
+            <a:fld id="{0F1972F0-3F01-4D16-8DBE-E2786E6451C7}" type="slidenum">
               <a:rPr lang="zh-CN" altLang="en-US" smtClean="0"/>
               <a:t>‹#›</a:t>
             </a:fld>
@@ -735,7 +735,7 @@
     </p:spTree>
     <p:extLst>
       <p:ext uri="{BB962C8B-B14F-4D97-AF65-F5344CB8AC3E}">
-        <p14:creationId xmlns:p14="http://schemas.microsoft.com/office/powerpoint/2010/main" val="641059199"/>
+        <p14:creationId xmlns:p14="http://schemas.microsoft.com/office/powerpoint/2010/main" val="3560647182"/>
       </p:ext>
     </p:extLst>
   </p:cSld>
@@ -767,7 +767,7 @@
           <p:cNvPr id="2" name="标题 1">
             <a:extLst>
               <a:ext uri="{FF2B5EF4-FFF2-40B4-BE49-F238E27FC236}">
-                <a16:creationId xmlns:a16="http://schemas.microsoft.com/office/drawing/2014/main" id="{3B2D1361-7804-EBF2-3631-34084FA9A2F6}"/>
+                <a16:creationId xmlns:a16="http://schemas.microsoft.com/office/drawing/2014/main" id="{3955DB83-0D37-57EA-33F9-496BAFC5388F}"/>
               </a:ext>
             </a:extLst>
           </p:cNvPr>
@@ -795,7 +795,7 @@
           <p:cNvPr id="3" name="内容占位符 2">
             <a:extLst>
               <a:ext uri="{FF2B5EF4-FFF2-40B4-BE49-F238E27FC236}">
-                <a16:creationId xmlns:a16="http://schemas.microsoft.com/office/drawing/2014/main" id="{B83F240B-5ABB-6D3F-4FC0-A278571AC371}"/>
+                <a16:creationId xmlns:a16="http://schemas.microsoft.com/office/drawing/2014/main" id="{F9F15F79-6A83-F334-D238-645B2F603CCE}"/>
               </a:ext>
             </a:extLst>
           </p:cNvPr>
@@ -852,7 +852,7 @@
           <p:cNvPr id="4" name="日期占位符 3">
             <a:extLst>
               <a:ext uri="{FF2B5EF4-FFF2-40B4-BE49-F238E27FC236}">
-                <a16:creationId xmlns:a16="http://schemas.microsoft.com/office/drawing/2014/main" id="{211B4A6B-67CC-56EF-4013-D646EB5EDB18}"/>
+                <a16:creationId xmlns:a16="http://schemas.microsoft.com/office/drawing/2014/main" id="{0CB75125-B18E-A241-109A-FB697C39F997}"/>
               </a:ext>
             </a:extLst>
           </p:cNvPr>
@@ -868,7 +868,7 @@
           <a:bodyPr/>
           <a:lstStyle/>
           <a:p>
-            <a:fld id="{E0DD038B-8963-4682-9B6A-77DD6731484F}" type="datetimeFigureOut">
+            <a:fld id="{FD7079CB-071A-449F-AAB0-43D7BB178EB7}" type="datetimeFigureOut">
               <a:rPr lang="zh-CN" altLang="en-US" smtClean="0"/>
               <a:t>2026/10/19</a:t>
             </a:fld>
@@ -881,7 +881,7 @@
           <p:cNvPr id="5" name="页脚占位符 4">
             <a:extLst>
               <a:ext uri="{FF2B5EF4-FFF2-40B4-BE49-F238E27FC236}">
-                <a16:creationId xmlns:a16="http://schemas.microsoft.com/office/drawing/2014/main" id="{8741BCB1-CA6B-A455-19BD-DCFA2B19E874}"/>
+                <a16:creationId xmlns:a16="http://schemas.microsoft.com/office/drawing/2014/main" id="{1349A6A1-1F13-1EA4-7E29-BB8A7761D487}"/>
               </a:ext>
             </a:extLst>
           </p:cNvPr>
@@ -906,7 +906,7 @@
           <p:cNvPr id="6" name="灯片编号占位符 5">
             <a:extLst>
               <a:ext uri="{FF2B5EF4-FFF2-40B4-BE49-F238E27FC236}">
-                <a16:creationId xmlns:a16="http://schemas.microsoft.com/office/drawing/2014/main" id="{04F32EA6-9E9C-94E5-4C20-D9C342563D64}"/>
+                <a16:creationId xmlns:a16="http://schemas.microsoft.com/office/drawing/2014/main" id="{D6479C24-F434-6E58-2D80-EBE8578EE9AA}"/>
               </a:ext>
             </a:extLst>
           </p:cNvPr>
@@ -922,7 +922,7 @@
           <a:bodyPr/>
           <a:lstStyle/>
           <a:p>
-            <a:fld id="{A7784EAB-20A2-4BDB-8C23-CD8580ABFC8F}" type="slidenum">
+            <a:fld id="{0F1972F0-3F01-4D16-8DBE-E2786E6451C7}" type="slidenum">
               <a:rPr lang="zh-CN" altLang="en-US" smtClean="0"/>
               <a:t>‹#›</a:t>
             </a:fld>
@@ -933,7 +933,7 @@
     </p:spTree>
     <p:extLst>
       <p:ext uri="{BB962C8B-B14F-4D97-AF65-F5344CB8AC3E}">
-        <p14:creationId xmlns:p14="http://schemas.microsoft.com/office/powerpoint/2010/main" val="2872597503"/>
+        <p14:creationId xmlns:p14="http://schemas.microsoft.com/office/powerpoint/2010/main" val="532182706"/>
       </p:ext>
     </p:extLst>
   </p:cSld>
@@ -965,7 +965,7 @@
           <p:cNvPr id="2" name="标题 1">
             <a:extLst>
               <a:ext uri="{FF2B5EF4-FFF2-40B4-BE49-F238E27FC236}">
-                <a16:creationId xmlns:a16="http://schemas.microsoft.com/office/drawing/2014/main" id="{9B7C5B5A-4F9A-583A-A851-49311004BC78}"/>
+                <a16:creationId xmlns:a16="http://schemas.microsoft.com/office/drawing/2014/main" id="{68EE84ED-FF72-CF36-39B9-1B6F06636D63}"/>
               </a:ext>
             </a:extLst>
           </p:cNvPr>
@@ -1002,7 +1002,7 @@
           <p:cNvPr id="3" name="文本占位符 2">
             <a:extLst>
               <a:ext uri="{FF2B5EF4-FFF2-40B4-BE49-F238E27FC236}">
-                <a16:creationId xmlns:a16="http://schemas.microsoft.com/office/drawing/2014/main" id="{3347FC1F-CFDE-6BAC-5A37-23621C2866B2}"/>
+                <a16:creationId xmlns:a16="http://schemas.microsoft.com/office/drawing/2014/main" id="{87F7CFE8-401C-A5BA-54E7-637E66AE800F}"/>
               </a:ext>
             </a:extLst>
           </p:cNvPr>
@@ -1127,7 +1127,7 @@
           <p:cNvPr id="4" name="日期占位符 3">
             <a:extLst>
               <a:ext uri="{FF2B5EF4-FFF2-40B4-BE49-F238E27FC236}">
-                <a16:creationId xmlns:a16="http://schemas.microsoft.com/office/drawing/2014/main" id="{3738FD1F-1E3F-DEB1-0F71-56D874AC93D0}"/>
+                <a16:creationId xmlns:a16="http://schemas.microsoft.com/office/drawing/2014/main" id="{0D8A3136-57BD-D48E-4A6E-A9F9BB577A64}"/>
               </a:ext>
             </a:extLst>
           </p:cNvPr>
@@ -1143,7 +1143,7 @@
           <a:bodyPr/>
           <a:lstStyle/>
           <a:p>
-            <a:fld id="{E0DD038B-8963-4682-9B6A-77DD6731484F}" type="datetimeFigureOut">
+            <a:fld id="{FD7079CB-071A-449F-AAB0-43D7BB178EB7}" type="datetimeFigureOut">
               <a:rPr lang="zh-CN" altLang="en-US" smtClean="0"/>
               <a:t>2026/10/19</a:t>
             </a:fld>
@@ -1156,7 +1156,7 @@
           <p:cNvPr id="5" name="页脚占位符 4">
             <a:extLst>
               <a:ext uri="{FF2B5EF4-FFF2-40B4-BE49-F238E27FC236}">
-                <a16:creationId xmlns:a16="http://schemas.microsoft.com/office/drawing/2014/main" id="{196484BD-5AB9-64FF-E9ED-C1E41F1909E8}"/>
+                <a16:creationId xmlns:a16="http://schemas.microsoft.com/office/drawing/2014/main" id="{72F6E0FB-E80C-1428-1150-31249293881D}"/>
               </a:ext>
             </a:extLst>
           </p:cNvPr>
@@ -1181,7 +1181,7 @@
           <p:cNvPr id="6" name="灯片编号占位符 5">
             <a:extLst>
               <a:ext uri="{FF2B5EF4-FFF2-40B4-BE49-F238E27FC236}">
-                <a16:creationId xmlns:a16="http://schemas.microsoft.com/office/drawing/2014/main" id="{ED3E62F6-C9F1-163D-B7C7-4D0B01A588D4}"/>
+                <a16:creationId xmlns:a16="http://schemas.microsoft.com/office/drawing/2014/main" id="{AAC407A9-D9A6-8CE5-2E65-19191E502562}"/>
               </a:ext>
             </a:extLst>
           </p:cNvPr>
@@ -1197,7 +1197,7 @@
           <a:bodyPr/>
           <a:lstStyle/>
           <a:p>
-            <a:fld id="{A7784EAB-20A2-4BDB-8C23-CD8580ABFC8F}" type="slidenum">
+            <a:fld id="{0F1972F0-3F01-4D16-8DBE-E2786E6451C7}" type="slidenum">
               <a:rPr lang="zh-CN" altLang="en-US" smtClean="0"/>
               <a:t>‹#›</a:t>
             </a:fld>
@@ -1208,7 +1208,7 @@
     </p:spTree>
     <p:extLst>
       <p:ext uri="{BB962C8B-B14F-4D97-AF65-F5344CB8AC3E}">
-        <p14:creationId xmlns:p14="http://schemas.microsoft.com/office/powerpoint/2010/main" val="655825666"/>
+        <p14:creationId xmlns:p14="http://schemas.microsoft.com/office/powerpoint/2010/main" val="1618038733"/>
       </p:ext>
     </p:extLst>
   </p:cSld>
@@ -1240,7 +1240,7 @@
           <p:cNvPr id="2" name="标题 1">
             <a:extLst>
               <a:ext uri="{FF2B5EF4-FFF2-40B4-BE49-F238E27FC236}">
-                <a16:creationId xmlns:a16="http://schemas.microsoft.com/office/drawing/2014/main" id="{3CE8DAE1-1ADC-5ABA-1B47-562B442F6DAF}"/>
+                <a16:creationId xmlns:a16="http://schemas.microsoft.com/office/drawing/2014/main" id="{CAB01A43-AB1B-01B1-B791-C2C4E1E6C609}"/>
               </a:ext>
             </a:extLst>
           </p:cNvPr>
@@ -1268,7 +1268,7 @@
           <p:cNvPr id="3" name="内容占位符 2">
             <a:extLst>
               <a:ext uri="{FF2B5EF4-FFF2-40B4-BE49-F238E27FC236}">
-                <a16:creationId xmlns:a16="http://schemas.microsoft.com/office/drawing/2014/main" id="{C3590C82-A993-0467-9664-76FD6891C157}"/>
+                <a16:creationId xmlns:a16="http://schemas.microsoft.com/office/drawing/2014/main" id="{8F7236CB-F00A-D26A-33AC-3BC9E6A8D98E}"/>
               </a:ext>
             </a:extLst>
           </p:cNvPr>
@@ -1330,7 +1330,7 @@
           <p:cNvPr id="4" name="内容占位符 3">
             <a:extLst>
               <a:ext uri="{FF2B5EF4-FFF2-40B4-BE49-F238E27FC236}">
-                <a16:creationId xmlns:a16="http://schemas.microsoft.com/office/drawing/2014/main" id="{BD14B582-C74B-AF9A-13F3-9EDA41289E72}"/>
+                <a16:creationId xmlns:a16="http://schemas.microsoft.com/office/drawing/2014/main" id="{420B84FB-82F0-790B-0460-03E5518045DE}"/>
               </a:ext>
             </a:extLst>
           </p:cNvPr>
@@ -1392,7 +1392,7 @@
           <p:cNvPr id="5" name="日期占位符 4">
             <a:extLst>
               <a:ext uri="{FF2B5EF4-FFF2-40B4-BE49-F238E27FC236}">
-                <a16:creationId xmlns:a16="http://schemas.microsoft.com/office/drawing/2014/main" id="{6FC012A0-6A0C-0B78-11C7-2559B582910C}"/>
+                <a16:creationId xmlns:a16="http://schemas.microsoft.com/office/drawing/2014/main" id="{BC022AE2-EFEA-7635-A97A-1192C8A34A93}"/>
               </a:ext>
             </a:extLst>
           </p:cNvPr>
@@ -1408,7 +1408,7 @@
           <a:bodyPr/>
           <a:lstStyle/>
           <a:p>
-            <a:fld id="{E0DD038B-8963-4682-9B6A-77DD6731484F}" type="datetimeFigureOut">
+            <a:fld id="{FD7079CB-071A-449F-AAB0-43D7BB178EB7}" type="datetimeFigureOut">
               <a:rPr lang="zh-CN" altLang="en-US" smtClean="0"/>
               <a:t>2026/10/19</a:t>
             </a:fld>
@@ -1421,7 +1421,7 @@
           <p:cNvPr id="6" name="页脚占位符 5">
             <a:extLst>
               <a:ext uri="{FF2B5EF4-FFF2-40B4-BE49-F238E27FC236}">
-                <a16:creationId xmlns:a16="http://schemas.microsoft.com/office/drawing/2014/main" id="{9FFD140A-F48D-44E4-7511-B0C9BC985A6B}"/>
+                <a16:creationId xmlns:a16="http://schemas.microsoft.com/office/drawing/2014/main" id="{5A44F8E3-C3E1-C426-0D6F-2F1C8ACDE371}"/>
               </a:ext>
             </a:extLst>
           </p:cNvPr>
@@ -1446,7 +1446,7 @@
           <p:cNvPr id="7" name="灯片编号占位符 6">
             <a:extLst>
               <a:ext uri="{FF2B5EF4-FFF2-40B4-BE49-F238E27FC236}">
-                <a16:creationId xmlns:a16="http://schemas.microsoft.com/office/drawing/2014/main" id="{E79C1383-623D-E264-744B-22CAAA492F1D}"/>
+                <a16:creationId xmlns:a16="http://schemas.microsoft.com/office/drawing/2014/main" id="{458E2CFD-4A3E-5634-C671-9BB0FDFCAE60}"/>
               </a:ext>
             </a:extLst>
           </p:cNvPr>
@@ -1462,7 +1462,7 @@
           <a:bodyPr/>
           <a:lstStyle/>
           <a:p>
-            <a:fld id="{A7784EAB-20A2-4BDB-8C23-CD8580ABFC8F}" type="slidenum">
+            <a:fld id="{0F1972F0-3F01-4D16-8DBE-E2786E6451C7}" type="slidenum">
               <a:rPr lang="zh-CN" altLang="en-US" smtClean="0"/>
               <a:t>‹#›</a:t>
             </a:fld>
@@ -1473,7 +1473,7 @@
     </p:spTree>
     <p:extLst>
       <p:ext uri="{BB962C8B-B14F-4D97-AF65-F5344CB8AC3E}">
-        <p14:creationId xmlns:p14="http://schemas.microsoft.com/office/powerpoint/2010/main" val="941435870"/>
+        <p14:creationId xmlns:p14="http://schemas.microsoft.com/office/powerpoint/2010/main" val="682947930"/>
       </p:ext>
     </p:extLst>
   </p:cSld>
@@ -1505,7 +1505,7 @@
           <p:cNvPr id="2" name="标题 1">
             <a:extLst>
               <a:ext uri="{FF2B5EF4-FFF2-40B4-BE49-F238E27FC236}">
-                <a16:creationId xmlns:a16="http://schemas.microsoft.com/office/drawing/2014/main" id="{9249E67E-2874-0C77-7B05-A16BDADF4E69}"/>
+                <a16:creationId xmlns:a16="http://schemas.microsoft.com/office/drawing/2014/main" id="{7ECC6616-A277-EBBC-4900-CE86575A6135}"/>
               </a:ext>
             </a:extLst>
           </p:cNvPr>
@@ -1538,7 +1538,7 @@
           <p:cNvPr id="3" name="文本占位符 2">
             <a:extLst>
               <a:ext uri="{FF2B5EF4-FFF2-40B4-BE49-F238E27FC236}">
-                <a16:creationId xmlns:a16="http://schemas.microsoft.com/office/drawing/2014/main" id="{B4ECBDC9-60A6-4D7A-0BE6-96D2094252CC}"/>
+                <a16:creationId xmlns:a16="http://schemas.microsoft.com/office/drawing/2014/main" id="{7A70E5A0-3EE6-53E0-3E7D-D4C827911360}"/>
               </a:ext>
             </a:extLst>
           </p:cNvPr>
@@ -1609,7 +1609,7 @@
           <p:cNvPr id="4" name="内容占位符 3">
             <a:extLst>
               <a:ext uri="{FF2B5EF4-FFF2-40B4-BE49-F238E27FC236}">
-                <a16:creationId xmlns:a16="http://schemas.microsoft.com/office/drawing/2014/main" id="{2F82273A-8F35-20AF-85DC-641CBB73B4B0}"/>
+                <a16:creationId xmlns:a16="http://schemas.microsoft.com/office/drawing/2014/main" id="{B65606B4-14EF-35ED-E324-62FAFAA1BB14}"/>
               </a:ext>
             </a:extLst>
           </p:cNvPr>
@@ -1671,7 +1671,7 @@
           <p:cNvPr id="5" name="文本占位符 4">
             <a:extLst>
               <a:ext uri="{FF2B5EF4-FFF2-40B4-BE49-F238E27FC236}">
-                <a16:creationId xmlns:a16="http://schemas.microsoft.com/office/drawing/2014/main" id="{339BB94D-9332-C1DA-5ED3-55264881355D}"/>
+                <a16:creationId xmlns:a16="http://schemas.microsoft.com/office/drawing/2014/main" id="{53AC471F-8C79-BA88-977F-CE9C533318BB}"/>
               </a:ext>
             </a:extLst>
           </p:cNvPr>
@@ -1742,7 +1742,7 @@
           <p:cNvPr id="6" name="内容占位符 5">
             <a:extLst>
               <a:ext uri="{FF2B5EF4-FFF2-40B4-BE49-F238E27FC236}">
-                <a16:creationId xmlns:a16="http://schemas.microsoft.com/office/drawing/2014/main" id="{9979C15B-F88A-A392-19FA-AA57D0EAB4AD}"/>
+                <a16:creationId xmlns:a16="http://schemas.microsoft.com/office/drawing/2014/main" id="{6DEA4858-673D-802B-8960-A476EF8F8A3F}"/>
               </a:ext>
             </a:extLst>
           </p:cNvPr>
@@ -1804,7 +1804,7 @@
           <p:cNvPr id="7" name="日期占位符 6">
             <a:extLst>
               <a:ext uri="{FF2B5EF4-FFF2-40B4-BE49-F238E27FC236}">
-                <a16:creationId xmlns:a16="http://schemas.microsoft.com/office/drawing/2014/main" id="{D21D5D41-520B-FEA5-207B-44B3A7D6602C}"/>
+                <a16:creationId xmlns:a16="http://schemas.microsoft.com/office/drawing/2014/main" id="{27E3E3F2-FE00-5D70-2FAF-CFD985E07752}"/>
               </a:ext>
             </a:extLst>
           </p:cNvPr>
@@ -1820,7 +1820,7 @@
           <a:bodyPr/>
           <a:lstStyle/>
           <a:p>
-            <a:fld id="{E0DD038B-8963-4682-9B6A-77DD6731484F}" type="datetimeFigureOut">
+            <a:fld id="{FD7079CB-071A-449F-AAB0-43D7BB178EB7}" type="datetimeFigureOut">
               <a:rPr lang="zh-CN" altLang="en-US" smtClean="0"/>
               <a:t>2026/10/19</a:t>
             </a:fld>
@@ -1833,7 +1833,7 @@
           <p:cNvPr id="8" name="页脚占位符 7">
             <a:extLst>
               <a:ext uri="{FF2B5EF4-FFF2-40B4-BE49-F238E27FC236}">
-                <a16:creationId xmlns:a16="http://schemas.microsoft.com/office/drawing/2014/main" id="{D75824B8-DBB3-1C29-6DD8-A84934AC3327}"/>
+                <a16:creationId xmlns:a16="http://schemas.microsoft.com/office/drawing/2014/main" id="{834DCFA1-F5E8-ABDE-7212-CDA8C51D7672}"/>
               </a:ext>
             </a:extLst>
           </p:cNvPr>
@@ -1858,7 +1858,7 @@
           <p:cNvPr id="9" name="灯片编号占位符 8">
             <a:extLst>
               <a:ext uri="{FF2B5EF4-FFF2-40B4-BE49-F238E27FC236}">
-                <a16:creationId xmlns:a16="http://schemas.microsoft.com/office/drawing/2014/main" id="{F717348F-174A-5A2A-AFDF-DC5B6D191831}"/>
+                <a16:creationId xmlns:a16="http://schemas.microsoft.com/office/drawing/2014/main" id="{605AFEF8-DC4D-61BD-A860-F44E90A44498}"/>
               </a:ext>
             </a:extLst>
           </p:cNvPr>
@@ -1874,7 +1874,7 @@
           <a:bodyPr/>
           <a:lstStyle/>
           <a:p>
-            <a:fld id="{A7784EAB-20A2-4BDB-8C23-CD8580ABFC8F}" type="slidenum">
+            <a:fld id="{0F1972F0-3F01-4D16-8DBE-E2786E6451C7}" type="slidenum">
               <a:rPr lang="zh-CN" altLang="en-US" smtClean="0"/>
               <a:t>‹#›</a:t>
             </a:fld>
@@ -1885,7 +1885,7 @@
     </p:spTree>
     <p:extLst>
       <p:ext uri="{BB962C8B-B14F-4D97-AF65-F5344CB8AC3E}">
-        <p14:creationId xmlns:p14="http://schemas.microsoft.com/office/powerpoint/2010/main" val="3127790477"/>
+        <p14:creationId xmlns:p14="http://schemas.microsoft.com/office/powerpoint/2010/main" val="1907711740"/>
       </p:ext>
     </p:extLst>
   </p:cSld>
@@ -1917,7 +1917,7 @@
           <p:cNvPr id="2" name="标题 1">
             <a:extLst>
               <a:ext uri="{FF2B5EF4-FFF2-40B4-BE49-F238E27FC236}">
-                <a16:creationId xmlns:a16="http://schemas.microsoft.com/office/drawing/2014/main" id="{F0136741-01DB-10E1-3E89-2032C2D34EC9}"/>
+                <a16:creationId xmlns:a16="http://schemas.microsoft.com/office/drawing/2014/main" id="{ED8D0BAA-59CF-D655-19B8-0B2DB917590C}"/>
               </a:ext>
             </a:extLst>
           </p:cNvPr>
@@ -1945,7 +1945,7 @@
           <p:cNvPr id="3" name="日期占位符 2">
             <a:extLst>
               <a:ext uri="{FF2B5EF4-FFF2-40B4-BE49-F238E27FC236}">
-                <a16:creationId xmlns:a16="http://schemas.microsoft.com/office/drawing/2014/main" id="{87D368B0-ABD4-31B2-7959-50FCED6DE49C}"/>
+                <a16:creationId xmlns:a16="http://schemas.microsoft.com/office/drawing/2014/main" id="{6AB1E390-5705-E847-737E-B8CFF5359C9B}"/>
               </a:ext>
             </a:extLst>
           </p:cNvPr>
@@ -1961,7 +1961,7 @@
           <a:bodyPr/>
           <a:lstStyle/>
           <a:p>
-            <a:fld id="{E0DD038B-8963-4682-9B6A-77DD6731484F}" type="datetimeFigureOut">
+            <a:fld id="{FD7079CB-071A-449F-AAB0-43D7BB178EB7}" type="datetimeFigureOut">
               <a:rPr lang="zh-CN" altLang="en-US" smtClean="0"/>
               <a:t>2026/10/19</a:t>
             </a:fld>
@@ -1974,7 +1974,7 @@
           <p:cNvPr id="4" name="页脚占位符 3">
             <a:extLst>
               <a:ext uri="{FF2B5EF4-FFF2-40B4-BE49-F238E27FC236}">
-                <a16:creationId xmlns:a16="http://schemas.microsoft.com/office/drawing/2014/main" id="{999E17EA-21C5-BCF0-23E6-910697F98912}"/>
+                <a16:creationId xmlns:a16="http://schemas.microsoft.com/office/drawing/2014/main" id="{6F711902-35F7-5701-AF67-99C3C26E6DF6}"/>
               </a:ext>
             </a:extLst>
           </p:cNvPr>
@@ -1999,7 +1999,7 @@
           <p:cNvPr id="5" name="灯片编号占位符 4">
             <a:extLst>
               <a:ext uri="{FF2B5EF4-FFF2-40B4-BE49-F238E27FC236}">
-                <a16:creationId xmlns:a16="http://schemas.microsoft.com/office/drawing/2014/main" id="{460C74E6-B215-9772-A95E-6851A1318EE7}"/>
+                <a16:creationId xmlns:a16="http://schemas.microsoft.com/office/drawing/2014/main" id="{C38F296F-CF83-3C1E-C41C-C681C6E3C7A7}"/>
               </a:ext>
             </a:extLst>
           </p:cNvPr>
@@ -2015,7 +2015,7 @@
           <a:bodyPr/>
           <a:lstStyle/>
           <a:p>
-            <a:fld id="{A7784EAB-20A2-4BDB-8C23-CD8580ABFC8F}" type="slidenum">
+            <a:fld id="{0F1972F0-3F01-4D16-8DBE-E2786E6451C7}" type="slidenum">
               <a:rPr lang="zh-CN" altLang="en-US" smtClean="0"/>
               <a:t>‹#›</a:t>
             </a:fld>
@@ -2026,7 +2026,7 @@
     </p:spTree>
     <p:extLst>
       <p:ext uri="{BB962C8B-B14F-4D97-AF65-F5344CB8AC3E}">
-        <p14:creationId xmlns:p14="http://schemas.microsoft.com/office/powerpoint/2010/main" val="3860314231"/>
+        <p14:creationId xmlns:p14="http://schemas.microsoft.com/office/powerpoint/2010/main" val="2108093970"/>
       </p:ext>
     </p:extLst>
   </p:cSld>
@@ -2058,7 +2058,7 @@
           <p:cNvPr id="2" name="日期占位符 1">
             <a:extLst>
               <a:ext uri="{FF2B5EF4-FFF2-40B4-BE49-F238E27FC236}">
-                <a16:creationId xmlns:a16="http://schemas.microsoft.com/office/drawing/2014/main" id="{4CFFDD55-12D8-1204-7AA0-ED2C728CFBC9}"/>
+                <a16:creationId xmlns:a16="http://schemas.microsoft.com/office/drawing/2014/main" id="{92671569-AB20-DC62-A810-EC7895853664}"/>
               </a:ext>
             </a:extLst>
           </p:cNvPr>
@@ -2074,7 +2074,7 @@
           <a:bodyPr/>
           <a:lstStyle/>
           <a:p>
-            <a:fld id="{E0DD038B-8963-4682-9B6A-77DD6731484F}" type="datetimeFigureOut">
+            <a:fld id="{FD7079CB-071A-449F-AAB0-43D7BB178EB7}" type="datetimeFigureOut">
               <a:rPr lang="zh-CN" altLang="en-US" smtClean="0"/>
               <a:t>2026/10/19</a:t>
             </a:fld>
@@ -2087,7 +2087,7 @@
           <p:cNvPr id="3" name="页脚占位符 2">
             <a:extLst>
               <a:ext uri="{FF2B5EF4-FFF2-40B4-BE49-F238E27FC236}">
-                <a16:creationId xmlns:a16="http://schemas.microsoft.com/office/drawing/2014/main" id="{76312538-A1F1-9414-C94B-29A9DDB2E746}"/>
+                <a16:creationId xmlns:a16="http://schemas.microsoft.com/office/drawing/2014/main" id="{A8F225D6-9475-7F78-DEB0-6CD55E4C56DA}"/>
               </a:ext>
             </a:extLst>
           </p:cNvPr>
@@ -2112,7 +2112,7 @@
           <p:cNvPr id="4" name="灯片编号占位符 3">
             <a:extLst>
               <a:ext uri="{FF2B5EF4-FFF2-40B4-BE49-F238E27FC236}">
-                <a16:creationId xmlns:a16="http://schemas.microsoft.com/office/drawing/2014/main" id="{2FF5AFC8-F824-EEC2-BA8C-A646CB5D9451}"/>
+                <a16:creationId xmlns:a16="http://schemas.microsoft.com/office/drawing/2014/main" id="{877F85A7-E597-A75E-7105-AF51C354A95A}"/>
               </a:ext>
             </a:extLst>
           </p:cNvPr>
@@ -2128,7 +2128,7 @@
           <a:bodyPr/>
           <a:lstStyle/>
           <a:p>
-            <a:fld id="{A7784EAB-20A2-4BDB-8C23-CD8580ABFC8F}" type="slidenum">
+            <a:fld id="{0F1972F0-3F01-4D16-8DBE-E2786E6451C7}" type="slidenum">
               <a:rPr lang="zh-CN" altLang="en-US" smtClean="0"/>
               <a:t>‹#›</a:t>
             </a:fld>
@@ -2139,7 +2139,7 @@
     </p:spTree>
     <p:extLst>
       <p:ext uri="{BB962C8B-B14F-4D97-AF65-F5344CB8AC3E}">
-        <p14:creationId xmlns:p14="http://schemas.microsoft.com/office/powerpoint/2010/main" val="27994091"/>
+        <p14:creationId xmlns:p14="http://schemas.microsoft.com/office/powerpoint/2010/main" val="706440356"/>
       </p:ext>
     </p:extLst>
   </p:cSld>
@@ -2171,7 +2171,7 @@
           <p:cNvPr id="2" name="标题 1">
             <a:extLst>
               <a:ext uri="{FF2B5EF4-FFF2-40B4-BE49-F238E27FC236}">
-                <a16:creationId xmlns:a16="http://schemas.microsoft.com/office/drawing/2014/main" id="{ADD8EFEB-0EAF-1F30-809A-5828541EAF15}"/>
+                <a16:creationId xmlns:a16="http://schemas.microsoft.com/office/drawing/2014/main" id="{3C0D1AE1-C045-F0C2-041D-8BC797DB88FF}"/>
               </a:ext>
             </a:extLst>
           </p:cNvPr>
@@ -2208,7 +2208,7 @@
           <p:cNvPr id="3" name="内容占位符 2">
             <a:extLst>
               <a:ext uri="{FF2B5EF4-FFF2-40B4-BE49-F238E27FC236}">
-                <a16:creationId xmlns:a16="http://schemas.microsoft.com/office/drawing/2014/main" id="{113106DB-3F06-BC5B-B52B-33C6A87A201A}"/>
+                <a16:creationId xmlns:a16="http://schemas.microsoft.com/office/drawing/2014/main" id="{F6D300D3-E194-3168-F2C3-BDF9C45CBE2F}"/>
               </a:ext>
             </a:extLst>
           </p:cNvPr>
@@ -2298,7 +2298,7 @@
           <p:cNvPr id="4" name="文本占位符 3">
             <a:extLst>
               <a:ext uri="{FF2B5EF4-FFF2-40B4-BE49-F238E27FC236}">
-                <a16:creationId xmlns:a16="http://schemas.microsoft.com/office/drawing/2014/main" id="{0583877B-8191-47E4-59BA-12AAC6C64760}"/>
+                <a16:creationId xmlns:a16="http://schemas.microsoft.com/office/drawing/2014/main" id="{2AD6F212-D55F-C6ED-F03B-290463BA643D}"/>
               </a:ext>
             </a:extLst>
           </p:cNvPr>
@@ -2369,7 +2369,7 @@
           <p:cNvPr id="5" name="日期占位符 4">
             <a:extLst>
               <a:ext uri="{FF2B5EF4-FFF2-40B4-BE49-F238E27FC236}">
-                <a16:creationId xmlns:a16="http://schemas.microsoft.com/office/drawing/2014/main" id="{62600A4D-368A-E130-E7F1-6A95B0D8D13D}"/>
+                <a16:creationId xmlns:a16="http://schemas.microsoft.com/office/drawing/2014/main" id="{63A549CC-AC25-DB38-85DF-7DE3F925A193}"/>
               </a:ext>
             </a:extLst>
           </p:cNvPr>
@@ -2385,7 +2385,7 @@
           <a:bodyPr/>
           <a:lstStyle/>
           <a:p>
-            <a:fld id="{E0DD038B-8963-4682-9B6A-77DD6731484F}" type="datetimeFigureOut">
+            <a:fld id="{FD7079CB-071A-449F-AAB0-43D7BB178EB7}" type="datetimeFigureOut">
               <a:rPr lang="zh-CN" altLang="en-US" smtClean="0"/>
               <a:t>2026/10/19</a:t>
             </a:fld>
@@ -2398,7 +2398,7 @@
           <p:cNvPr id="6" name="页脚占位符 5">
             <a:extLst>
               <a:ext uri="{FF2B5EF4-FFF2-40B4-BE49-F238E27FC236}">
-                <a16:creationId xmlns:a16="http://schemas.microsoft.com/office/drawing/2014/main" id="{9CAB0DD6-93D4-B004-5A3D-055F4B9E8CBE}"/>
+                <a16:creationId xmlns:a16="http://schemas.microsoft.com/office/drawing/2014/main" id="{75C91A9D-DF6B-532A-072B-C171DA9946C2}"/>
               </a:ext>
             </a:extLst>
           </p:cNvPr>
@@ -2423,7 +2423,7 @@
           <p:cNvPr id="7" name="灯片编号占位符 6">
             <a:extLst>
               <a:ext uri="{FF2B5EF4-FFF2-40B4-BE49-F238E27FC236}">
-                <a16:creationId xmlns:a16="http://schemas.microsoft.com/office/drawing/2014/main" id="{77A56A42-E501-B000-3269-19C447DA4275}"/>
+                <a16:creationId xmlns:a16="http://schemas.microsoft.com/office/drawing/2014/main" id="{1E227127-A386-173F-5460-25EB9343589F}"/>
               </a:ext>
             </a:extLst>
           </p:cNvPr>
@@ -2439,7 +2439,7 @@
           <a:bodyPr/>
           <a:lstStyle/>
           <a:p>
-            <a:fld id="{A7784EAB-20A2-4BDB-8C23-CD8580ABFC8F}" type="slidenum">
+            <a:fld id="{0F1972F0-3F01-4D16-8DBE-E2786E6451C7}" type="slidenum">
               <a:rPr lang="zh-CN" altLang="en-US" smtClean="0"/>
               <a:t>‹#›</a:t>
             </a:fld>
@@ -2450,7 +2450,7 @@
     </p:spTree>
     <p:extLst>
       <p:ext uri="{BB962C8B-B14F-4D97-AF65-F5344CB8AC3E}">
-        <p14:creationId xmlns:p14="http://schemas.microsoft.com/office/powerpoint/2010/main" val="3232338854"/>
+        <p14:creationId xmlns:p14="http://schemas.microsoft.com/office/powerpoint/2010/main" val="3295626843"/>
       </p:ext>
     </p:extLst>
   </p:cSld>
@@ -2482,7 +2482,7 @@
           <p:cNvPr id="2" name="标题 1">
             <a:extLst>
               <a:ext uri="{FF2B5EF4-FFF2-40B4-BE49-F238E27FC236}">
-                <a16:creationId xmlns:a16="http://schemas.microsoft.com/office/drawing/2014/main" id="{FD50C4B1-7003-FD44-91BF-54EEB32F9CD1}"/>
+                <a16:creationId xmlns:a16="http://schemas.microsoft.com/office/drawing/2014/main" id="{9D463F0A-E0C9-1D4D-143F-6526C14702DB}"/>
               </a:ext>
             </a:extLst>
           </p:cNvPr>
@@ -2519,7 +2519,7 @@
           <p:cNvPr id="3" name="图片占位符 2">
             <a:extLst>
               <a:ext uri="{FF2B5EF4-FFF2-40B4-BE49-F238E27FC236}">
-                <a16:creationId xmlns:a16="http://schemas.microsoft.com/office/drawing/2014/main" id="{16E19767-F60D-232F-371A-5347CAA2EEEE}"/>
+                <a16:creationId xmlns:a16="http://schemas.microsoft.com/office/drawing/2014/main" id="{4E1526C2-2E67-647E-5C39-A82C0A01FF7F}"/>
               </a:ext>
             </a:extLst>
           </p:cNvPr>
@@ -2586,7 +2586,7 @@
           <p:cNvPr id="4" name="文本占位符 3">
             <a:extLst>
               <a:ext uri="{FF2B5EF4-FFF2-40B4-BE49-F238E27FC236}">
-                <a16:creationId xmlns:a16="http://schemas.microsoft.com/office/drawing/2014/main" id="{2738DACD-3E39-80C5-4D92-EC68C05437CC}"/>
+                <a16:creationId xmlns:a16="http://schemas.microsoft.com/office/drawing/2014/main" id="{3698CD69-68A4-47D4-23BD-44136B20F3E4}"/>
               </a:ext>
             </a:extLst>
           </p:cNvPr>
@@ -2657,7 +2657,7 @@
           <p:cNvPr id="5" name="日期占位符 4">
             <a:extLst>
               <a:ext uri="{FF2B5EF4-FFF2-40B4-BE49-F238E27FC236}">
-                <a16:creationId xmlns:a16="http://schemas.microsoft.com/office/drawing/2014/main" id="{02D1173F-A980-ABC3-4A93-24F404620B9C}"/>
+                <a16:creationId xmlns:a16="http://schemas.microsoft.com/office/drawing/2014/main" id="{6B5FFA1F-A723-AF74-9520-A14F684F517A}"/>
               </a:ext>
             </a:extLst>
           </p:cNvPr>
@@ -2673,7 +2673,7 @@
           <a:bodyPr/>
           <a:lstStyle/>
           <a:p>
-            <a:fld id="{E0DD038B-8963-4682-9B6A-77DD6731484F}" type="datetimeFigureOut">
+            <a:fld id="{FD7079CB-071A-449F-AAB0-43D7BB178EB7}" type="datetimeFigureOut">
               <a:rPr lang="zh-CN" altLang="en-US" smtClean="0"/>
               <a:t>2026/10/19</a:t>
             </a:fld>
@@ -2686,7 +2686,7 @@
           <p:cNvPr id="6" name="页脚占位符 5">
             <a:extLst>
               <a:ext uri="{FF2B5EF4-FFF2-40B4-BE49-F238E27FC236}">
-                <a16:creationId xmlns:a16="http://schemas.microsoft.com/office/drawing/2014/main" id="{28CFC87C-9013-AD82-4A82-E17ACA558C66}"/>
+                <a16:creationId xmlns:a16="http://schemas.microsoft.com/office/drawing/2014/main" id="{17042BAB-10FD-F203-4A28-759869E1F97D}"/>
               </a:ext>
             </a:extLst>
           </p:cNvPr>
@@ -2711,7 +2711,7 @@
           <p:cNvPr id="7" name="灯片编号占位符 6">
             <a:extLst>
               <a:ext uri="{FF2B5EF4-FFF2-40B4-BE49-F238E27FC236}">
-                <a16:creationId xmlns:a16="http://schemas.microsoft.com/office/drawing/2014/main" id="{6E30599E-C9EF-3759-9BD4-FC0A66BE42A1}"/>
+                <a16:creationId xmlns:a16="http://schemas.microsoft.com/office/drawing/2014/main" id="{0DC8D0D6-5B78-C921-3B3F-73076E6F6E46}"/>
               </a:ext>
             </a:extLst>
           </p:cNvPr>
@@ -2727,7 +2727,7 @@
           <a:bodyPr/>
           <a:lstStyle/>
           <a:p>
-            <a:fld id="{A7784EAB-20A2-4BDB-8C23-CD8580ABFC8F}" type="slidenum">
+            <a:fld id="{0F1972F0-3F01-4D16-8DBE-E2786E6451C7}" type="slidenum">
               <a:rPr lang="zh-CN" altLang="en-US" smtClean="0"/>
               <a:t>‹#›</a:t>
             </a:fld>
@@ -2738,7 +2738,7 @@
     </p:spTree>
     <p:extLst>
       <p:ext uri="{BB962C8B-B14F-4D97-AF65-F5344CB8AC3E}">
-        <p14:creationId xmlns:p14="http://schemas.microsoft.com/office/powerpoint/2010/main" val="1510800740"/>
+        <p14:creationId xmlns:p14="http://schemas.microsoft.com/office/powerpoint/2010/main" val="2342067816"/>
       </p:ext>
     </p:extLst>
   </p:cSld>
@@ -2775,7 +2775,7 @@
           <p:cNvPr id="2" name="标题占位符 1">
             <a:extLst>
               <a:ext uri="{FF2B5EF4-FFF2-40B4-BE49-F238E27FC236}">
-                <a16:creationId xmlns:a16="http://schemas.microsoft.com/office/drawing/2014/main" id="{DDC7A882-EE0A-901C-3D18-98BDDB7041F9}"/>
+                <a16:creationId xmlns:a16="http://schemas.microsoft.com/office/drawing/2014/main" id="{63349233-403A-C1E8-8FC0-EE08C983548C}"/>
               </a:ext>
             </a:extLst>
           </p:cNvPr>
@@ -2813,7 +2813,7 @@
           <p:cNvPr id="3" name="文本占位符 2">
             <a:extLst>
               <a:ext uri="{FF2B5EF4-FFF2-40B4-BE49-F238E27FC236}">
-                <a16:creationId xmlns:a16="http://schemas.microsoft.com/office/drawing/2014/main" id="{7F3512C0-7B37-1B34-88C1-99DB52E954B1}"/>
+                <a16:creationId xmlns:a16="http://schemas.microsoft.com/office/drawing/2014/main" id="{5244CB53-089D-9711-94AA-2904A77F651F}"/>
               </a:ext>
             </a:extLst>
           </p:cNvPr>
@@ -2880,7 +2880,7 @@
           <p:cNvPr id="4" name="日期占位符 3">
             <a:extLst>
               <a:ext uri="{FF2B5EF4-FFF2-40B4-BE49-F238E27FC236}">
-                <a16:creationId xmlns:a16="http://schemas.microsoft.com/office/drawing/2014/main" id="{3268F67E-B692-55E2-E401-3D5B82E2ED4D}"/>
+                <a16:creationId xmlns:a16="http://schemas.microsoft.com/office/drawing/2014/main" id="{E5507FA6-0805-A7B0-405F-DB0D7874B647}"/>
               </a:ext>
             </a:extLst>
           </p:cNvPr>
@@ -2914,7 +2914,7 @@
             </a:lvl1pPr>
           </a:lstStyle>
           <a:p>
-            <a:fld id="{E0DD038B-8963-4682-9B6A-77DD6731484F}" type="datetimeFigureOut">
+            <a:fld id="{FD7079CB-071A-449F-AAB0-43D7BB178EB7}" type="datetimeFigureOut">
               <a:rPr lang="zh-CN" altLang="en-US" smtClean="0"/>
               <a:t>2026/10/19</a:t>
             </a:fld>
@@ -2927,7 +2927,7 @@
           <p:cNvPr id="5" name="页脚占位符 4">
             <a:extLst>
               <a:ext uri="{FF2B5EF4-FFF2-40B4-BE49-F238E27FC236}">
-                <a16:creationId xmlns:a16="http://schemas.microsoft.com/office/drawing/2014/main" id="{40259896-062E-F625-99AA-0759442B82A8}"/>
+                <a16:creationId xmlns:a16="http://schemas.microsoft.com/office/drawing/2014/main" id="{D877F81F-1D70-0232-8A66-FB8746642280}"/>
               </a:ext>
             </a:extLst>
           </p:cNvPr>
@@ -2970,7 +2970,7 @@
           <p:cNvPr id="6" name="灯片编号占位符 5">
             <a:extLst>
               <a:ext uri="{FF2B5EF4-FFF2-40B4-BE49-F238E27FC236}">
-                <a16:creationId xmlns:a16="http://schemas.microsoft.com/office/drawing/2014/main" id="{11324195-D135-9494-6E42-3BE69F5338CC}"/>
+                <a16:creationId xmlns:a16="http://schemas.microsoft.com/office/drawing/2014/main" id="{E9B5A0A0-51C9-AD35-940E-2BF1DBA7A343}"/>
               </a:ext>
             </a:extLst>
           </p:cNvPr>
@@ -3004,7 +3004,7 @@
             </a:lvl1pPr>
           </a:lstStyle>
           <a:p>
-            <a:fld id="{A7784EAB-20A2-4BDB-8C23-CD8580ABFC8F}" type="slidenum">
+            <a:fld id="{0F1972F0-3F01-4D16-8DBE-E2786E6451C7}" type="slidenum">
               <a:rPr lang="zh-CN" altLang="en-US" smtClean="0"/>
               <a:t>‹#›</a:t>
             </a:fld>
@@ -3015,7 +3015,7 @@
     </p:spTree>
     <p:extLst>
       <p:ext uri="{BB962C8B-B14F-4D97-AF65-F5344CB8AC3E}">
-        <p14:creationId xmlns:p14="http://schemas.microsoft.com/office/powerpoint/2010/main" val="2665737443"/>
+        <p14:creationId xmlns:p14="http://schemas.microsoft.com/office/powerpoint/2010/main" val="2285153648"/>
       </p:ext>
     </p:extLst>
   </p:cSld>
@@ -3346,7 +3346,7 @@
           <p:cNvPr id="2" name="椭圆 1">
             <a:extLst>
               <a:ext uri="{FF2B5EF4-FFF2-40B4-BE49-F238E27FC236}">
-                <a16:creationId xmlns:a16="http://schemas.microsoft.com/office/drawing/2014/main" id="{E690DFAE-BF23-2EA5-3362-2B820A566EB2}"/>
+                <a16:creationId xmlns:a16="http://schemas.microsoft.com/office/drawing/2014/main" id="{A70BFA76-1AC8-181F-42A1-EA486E4928D8}"/>
               </a:ext>
             </a:extLst>
           </p:cNvPr>
@@ -3416,7 +3416,7 @@
           <p:cNvPr id="3" name="椭圆 2">
             <a:extLst>
               <a:ext uri="{FF2B5EF4-FFF2-40B4-BE49-F238E27FC236}">
-                <a16:creationId xmlns:a16="http://schemas.microsoft.com/office/drawing/2014/main" id="{B968E538-6146-3D80-2E7A-1AEDA0A6F54C}"/>
+                <a16:creationId xmlns:a16="http://schemas.microsoft.com/office/drawing/2014/main" id="{93EE660C-4E61-C516-98C3-138952E19015}"/>
               </a:ext>
             </a:extLst>
           </p:cNvPr>
@@ -3486,7 +3486,7 @@
           <p:cNvPr id="4" name="文本框 3">
             <a:extLst>
               <a:ext uri="{FF2B5EF4-FFF2-40B4-BE49-F238E27FC236}">
-                <a16:creationId xmlns:a16="http://schemas.microsoft.com/office/drawing/2014/main" id="{2A16772F-E54A-F2A6-6C0C-BB4EDE59631B}"/>
+                <a16:creationId xmlns:a16="http://schemas.microsoft.com/office/drawing/2014/main" id="{CA2769A4-C931-8E3C-DBAB-2854CBE9E611}"/>
               </a:ext>
             </a:extLst>
           </p:cNvPr>
@@ -3552,7 +3552,7 @@
           <p:cNvPr id="5" name="矩形 4">
             <a:extLst>
               <a:ext uri="{FF2B5EF4-FFF2-40B4-BE49-F238E27FC236}">
-                <a16:creationId xmlns:a16="http://schemas.microsoft.com/office/drawing/2014/main" id="{1F08E0FC-32C9-BE5E-5112-0402D31733D5}"/>
+                <a16:creationId xmlns:a16="http://schemas.microsoft.com/office/drawing/2014/main" id="{C6BB9772-A579-5E03-3629-200D0517A2D6}"/>
               </a:ext>
             </a:extLst>
           </p:cNvPr>
@@ -3620,7 +3620,7 @@
           <p:cNvPr id="6" name="文本框 5">
             <a:extLst>
               <a:ext uri="{FF2B5EF4-FFF2-40B4-BE49-F238E27FC236}">
-                <a16:creationId xmlns:a16="http://schemas.microsoft.com/office/drawing/2014/main" id="{05EB0FDB-ED01-F396-085A-F8AAC2176586}"/>
+                <a16:creationId xmlns:a16="http://schemas.microsoft.com/office/drawing/2014/main" id="{D259CD49-69CE-8B55-3ADB-111B5F5880C0}"/>
               </a:ext>
             </a:extLst>
           </p:cNvPr>
@@ -3686,7 +3686,7 @@
           <p:cNvPr id="7" name="文本框 6">
             <a:extLst>
               <a:ext uri="{FF2B5EF4-FFF2-40B4-BE49-F238E27FC236}">
-                <a16:creationId xmlns:a16="http://schemas.microsoft.com/office/drawing/2014/main" id="{40C8E605-C88E-065E-845B-64CE07B04253}"/>
+                <a16:creationId xmlns:a16="http://schemas.microsoft.com/office/drawing/2014/main" id="{DF77121F-A993-1036-BBCF-F21AD860F9F3}"/>
               </a:ext>
             </a:extLst>
           </p:cNvPr>
@@ -3742,7 +3742,7 @@
           <p:cNvPr id="8" name="文本框 7">
             <a:extLst>
               <a:ext uri="{FF2B5EF4-FFF2-40B4-BE49-F238E27FC236}">
-                <a16:creationId xmlns:a16="http://schemas.microsoft.com/office/drawing/2014/main" id="{464CA445-FD01-8D50-20D3-0B0D0F4EF42D}"/>
+                <a16:creationId xmlns:a16="http://schemas.microsoft.com/office/drawing/2014/main" id="{C6658CA7-7303-1FF1-5D9F-051B2D5551DF}"/>
               </a:ext>
             </a:extLst>
           </p:cNvPr>
@@ -3808,7 +3808,7 @@
           <p:cNvPr id="9" name="文本框 8">
             <a:extLst>
               <a:ext uri="{FF2B5EF4-FFF2-40B4-BE49-F238E27FC236}">
-                <a16:creationId xmlns:a16="http://schemas.microsoft.com/office/drawing/2014/main" id="{C114C1EC-4E1E-1673-0900-F4742A4BAE35}"/>
+                <a16:creationId xmlns:a16="http://schemas.microsoft.com/office/drawing/2014/main" id="{46566E3E-F89E-6338-9812-B0DAE788B54C}"/>
               </a:ext>
             </a:extLst>
           </p:cNvPr>
@@ -3914,7 +3914,7 @@
           <p:cNvPr id="10" name="文本框 9">
             <a:extLst>
               <a:ext uri="{FF2B5EF4-FFF2-40B4-BE49-F238E27FC236}">
-                <a16:creationId xmlns:a16="http://schemas.microsoft.com/office/drawing/2014/main" id="{69C801C2-E94C-B844-EDF6-613C1830811E}"/>
+                <a16:creationId xmlns:a16="http://schemas.microsoft.com/office/drawing/2014/main" id="{54DA92BA-3B46-3DD2-2904-89FA7A491601}"/>
               </a:ext>
             </a:extLst>
           </p:cNvPr>
@@ -4000,7 +4000,7 @@
           <p:cNvPr id="11" name="文本框 10">
             <a:extLst>
               <a:ext uri="{FF2B5EF4-FFF2-40B4-BE49-F238E27FC236}">
-                <a16:creationId xmlns:a16="http://schemas.microsoft.com/office/drawing/2014/main" id="{3D1B8990-F281-B814-68B2-37FF4E6865E3}"/>
+                <a16:creationId xmlns:a16="http://schemas.microsoft.com/office/drawing/2014/main" id="{C604454F-613A-0220-47E4-20FD81797368}"/>
               </a:ext>
             </a:extLst>
           </p:cNvPr>
@@ -4086,7 +4086,7 @@
           <p:cNvPr id="12" name="文本框 11">
             <a:extLst>
               <a:ext uri="{FF2B5EF4-FFF2-40B4-BE49-F238E27FC236}">
-                <a16:creationId xmlns:a16="http://schemas.microsoft.com/office/drawing/2014/main" id="{4A4CCBA0-9C10-8F18-9D08-BE5A93E3F500}"/>
+                <a16:creationId xmlns:a16="http://schemas.microsoft.com/office/drawing/2014/main" id="{4542889E-559C-7B71-EA3C-D43F245762A4}"/>
               </a:ext>
             </a:extLst>
           </p:cNvPr>
@@ -4190,7 +4190,7 @@
     </p:spTree>
     <p:extLst>
       <p:ext uri="{BB962C8B-B14F-4D97-AF65-F5344CB8AC3E}">
-        <p14:creationId xmlns:p14="http://schemas.microsoft.com/office/powerpoint/2010/main" val="2725397967"/>
+        <p14:creationId xmlns:p14="http://schemas.microsoft.com/office/powerpoint/2010/main" val="733976411"/>
       </p:ext>
     </p:extLst>
   </p:cSld>
@@ -4230,7 +4230,7 @@
           <p:cNvPr id="2" name="矩形 1">
             <a:extLst>
               <a:ext uri="{FF2B5EF4-FFF2-40B4-BE49-F238E27FC236}">
-                <a16:creationId xmlns:a16="http://schemas.microsoft.com/office/drawing/2014/main" id="{EE53AE8F-7627-E33E-51F0-A398618F426E}"/>
+                <a16:creationId xmlns:a16="http://schemas.microsoft.com/office/drawing/2014/main" id="{BDE73D6C-630E-7670-3C2A-937C29D6AFD1}"/>
               </a:ext>
             </a:extLst>
           </p:cNvPr>
@@ -4298,7 +4298,7 @@
           <p:cNvPr id="3" name="文本框 2">
             <a:extLst>
               <a:ext uri="{FF2B5EF4-FFF2-40B4-BE49-F238E27FC236}">
-                <a16:creationId xmlns:a16="http://schemas.microsoft.com/office/drawing/2014/main" id="{DE4E47B2-ECBC-437D-F68F-F521024B3025}"/>
+                <a16:creationId xmlns:a16="http://schemas.microsoft.com/office/drawing/2014/main" id="{F7A8FF2E-6DE5-2313-9B8B-EB5D57FDA715}"/>
               </a:ext>
             </a:extLst>
           </p:cNvPr>
@@ -4401,7 +4401,7 @@
           <p:cNvPr id="4" name="文本框 3">
             <a:extLst>
               <a:ext uri="{FF2B5EF4-FFF2-40B4-BE49-F238E27FC236}">
-                <a16:creationId xmlns:a16="http://schemas.microsoft.com/office/drawing/2014/main" id="{08F61C73-5C7D-883E-AF29-8DB811547E7B}"/>
+                <a16:creationId xmlns:a16="http://schemas.microsoft.com/office/drawing/2014/main" id="{B1185F56-E3D7-2A1D-54E4-22F457207BC7}"/>
               </a:ext>
             </a:extLst>
           </p:cNvPr>
@@ -4411,7 +4411,7 @@
         <p:spPr>
           <a:xfrm>
             <a:off x="711200" y="914400"/>
-            <a:ext cx="10922000" cy="161583"/>
+            <a:ext cx="10922000" cy="196849"/>
           </a:xfrm>
           <a:prstGeom prst="rect">
             <a:avLst/>
@@ -4426,11 +4426,11 @@
           <a:p>
             <a:pPr>
               <a:lnSpc>
-                <a:spcPct val="105000"/>
+                <a:spcPct val="110000"/>
               </a:lnSpc>
             </a:pPr>
             <a:r>
-              <a:rPr lang="zh-CN" altLang="en-US" sz="1050">
+              <a:rPr lang="zh-CN" altLang="en-US" sz="1250">
                 <a:solidFill>
                   <a:srgbClr val="7F8C8D"/>
                 </a:solidFill>
@@ -4440,7 +4440,7 @@
               <a:t>覆盖 </a:t>
             </a:r>
             <a:r>
-              <a:rPr lang="en-US" altLang="zh-CN" sz="1050">
+              <a:rPr lang="en-US" altLang="zh-CN" sz="1250">
                 <a:solidFill>
                   <a:srgbClr val="7F8C8D"/>
                 </a:solidFill>
@@ -4450,7 +4450,7 @@
               <a:t>7/8 </a:t>
             </a:r>
             <a:r>
-              <a:rPr lang="zh-CN" altLang="en-US" sz="1050">
+              <a:rPr lang="zh-CN" altLang="en-US" sz="1250">
                 <a:solidFill>
                   <a:srgbClr val="7F8C8D"/>
                 </a:solidFill>
@@ -4460,7 +4460,7 @@
               <a:t>类异常；</a:t>
             </a:r>
             <a:r>
-              <a:rPr lang="en-US" altLang="zh-CN" sz="1050">
+              <a:rPr lang="en-US" altLang="zh-CN" sz="1250">
                 <a:solidFill>
                   <a:srgbClr val="7F8C8D"/>
                 </a:solidFill>
@@ -4470,7 +4470,7 @@
               <a:t>Benford </a:t>
             </a:r>
             <a:r>
-              <a:rPr lang="zh-CN" altLang="en-US" sz="1050">
+              <a:rPr lang="zh-CN" altLang="en-US" sz="1250">
                 <a:solidFill>
                   <a:srgbClr val="7F8C8D"/>
                 </a:solidFill>
@@ -4487,7 +4487,7 @@
           <p:cNvPr id="5" name="矩形: 圆角 4">
             <a:extLst>
               <a:ext uri="{FF2B5EF4-FFF2-40B4-BE49-F238E27FC236}">
-                <a16:creationId xmlns:a16="http://schemas.microsoft.com/office/drawing/2014/main" id="{43DADA59-84F7-DE88-A196-BB5AE0BF84D9}"/>
+                <a16:creationId xmlns:a16="http://schemas.microsoft.com/office/drawing/2014/main" id="{15DA3545-D22F-063A-6785-7D44110DFDAD}"/>
               </a:ext>
             </a:extLst>
           </p:cNvPr>
@@ -4541,7 +4541,7 @@
           <p:cNvPr id="6" name="矩形 5">
             <a:extLst>
               <a:ext uri="{FF2B5EF4-FFF2-40B4-BE49-F238E27FC236}">
-                <a16:creationId xmlns:a16="http://schemas.microsoft.com/office/drawing/2014/main" id="{6239AA0A-2B72-C59B-7017-E32146DB4393}"/>
+                <a16:creationId xmlns:a16="http://schemas.microsoft.com/office/drawing/2014/main" id="{59E65570-E275-D943-50F2-C8B6DDB35560}"/>
               </a:ext>
             </a:extLst>
           </p:cNvPr>
@@ -4609,7 +4609,7 @@
           <p:cNvPr id="7" name="文本框 6">
             <a:extLst>
               <a:ext uri="{FF2B5EF4-FFF2-40B4-BE49-F238E27FC236}">
-                <a16:creationId xmlns:a16="http://schemas.microsoft.com/office/drawing/2014/main" id="{7A0D3A2C-FDC6-E5C8-01AC-D8BB6D5565A3}"/>
+                <a16:creationId xmlns:a16="http://schemas.microsoft.com/office/drawing/2014/main" id="{9CBFE25C-A70D-1521-AB27-526AF5EEA65D}"/>
               </a:ext>
             </a:extLst>
           </p:cNvPr>
@@ -4655,7 +4655,7 @@
           <p:cNvPr id="8" name="文本框 7">
             <a:extLst>
               <a:ext uri="{FF2B5EF4-FFF2-40B4-BE49-F238E27FC236}">
-                <a16:creationId xmlns:a16="http://schemas.microsoft.com/office/drawing/2014/main" id="{AD73BDC7-D145-9522-A596-06FE0E76C811}"/>
+                <a16:creationId xmlns:a16="http://schemas.microsoft.com/office/drawing/2014/main" id="{25B054CD-B18C-2F10-853C-9F53AB5379A7}"/>
               </a:ext>
             </a:extLst>
           </p:cNvPr>
@@ -4805,7 +4805,7 @@
           <p:cNvPr id="9" name="矩形 8">
             <a:extLst>
               <a:ext uri="{FF2B5EF4-FFF2-40B4-BE49-F238E27FC236}">
-                <a16:creationId xmlns:a16="http://schemas.microsoft.com/office/drawing/2014/main" id="{9D7C3721-AF45-6894-C550-B7F14F752402}"/>
+                <a16:creationId xmlns:a16="http://schemas.microsoft.com/office/drawing/2014/main" id="{B84AFA28-FDA4-BDE0-3CC5-9780FD6325E3}"/>
               </a:ext>
             </a:extLst>
           </p:cNvPr>
@@ -4873,7 +4873,7 @@
           <p:cNvPr id="10" name="文本框 9">
             <a:extLst>
               <a:ext uri="{FF2B5EF4-FFF2-40B4-BE49-F238E27FC236}">
-                <a16:creationId xmlns:a16="http://schemas.microsoft.com/office/drawing/2014/main" id="{776E1D2A-AF47-23E2-51A1-F4443C84124F}"/>
+                <a16:creationId xmlns:a16="http://schemas.microsoft.com/office/drawing/2014/main" id="{A89D0669-450D-C80E-4EFB-DBC48D5BDC06}"/>
               </a:ext>
             </a:extLst>
           </p:cNvPr>
@@ -4926,7 +4926,7 @@
           <p:cNvPr id="11" name="矩形: 圆角 10">
             <a:extLst>
               <a:ext uri="{FF2B5EF4-FFF2-40B4-BE49-F238E27FC236}">
-                <a16:creationId xmlns:a16="http://schemas.microsoft.com/office/drawing/2014/main" id="{92BD9D78-1D72-C14D-A0D5-3CFE2FA14CEF}"/>
+                <a16:creationId xmlns:a16="http://schemas.microsoft.com/office/drawing/2014/main" id="{73C11AE7-1592-61F2-9047-13D9AC491ED8}"/>
               </a:ext>
             </a:extLst>
           </p:cNvPr>
@@ -4980,7 +4980,7 @@
           <p:cNvPr id="12" name="矩形 11">
             <a:extLst>
               <a:ext uri="{FF2B5EF4-FFF2-40B4-BE49-F238E27FC236}">
-                <a16:creationId xmlns:a16="http://schemas.microsoft.com/office/drawing/2014/main" id="{A2C8D722-EE2B-4FD2-D533-2BF7B09B05B6}"/>
+                <a16:creationId xmlns:a16="http://schemas.microsoft.com/office/drawing/2014/main" id="{D12DF32C-6D40-6F51-85A6-1B82DECBA954}"/>
               </a:ext>
             </a:extLst>
           </p:cNvPr>
@@ -5048,7 +5048,7 @@
           <p:cNvPr id="13" name="文本框 12">
             <a:extLst>
               <a:ext uri="{FF2B5EF4-FFF2-40B4-BE49-F238E27FC236}">
-                <a16:creationId xmlns:a16="http://schemas.microsoft.com/office/drawing/2014/main" id="{6124B429-2DC4-9CE6-3FE4-360351238472}"/>
+                <a16:creationId xmlns:a16="http://schemas.microsoft.com/office/drawing/2014/main" id="{887B089C-E79B-3BDD-0D6E-0CD2B2496704}"/>
               </a:ext>
             </a:extLst>
           </p:cNvPr>
@@ -5094,7 +5094,7 @@
           <p:cNvPr id="14" name="文本框 13">
             <a:extLst>
               <a:ext uri="{FF2B5EF4-FFF2-40B4-BE49-F238E27FC236}">
-                <a16:creationId xmlns:a16="http://schemas.microsoft.com/office/drawing/2014/main" id="{A1EE3393-BE79-29AC-BF73-F537F4307072}"/>
+                <a16:creationId xmlns:a16="http://schemas.microsoft.com/office/drawing/2014/main" id="{461931BB-32D4-6255-E9BB-C97FFEB6E698}"/>
               </a:ext>
             </a:extLst>
           </p:cNvPr>
@@ -5244,7 +5244,7 @@
           <p:cNvPr id="15" name="矩形 14">
             <a:extLst>
               <a:ext uri="{FF2B5EF4-FFF2-40B4-BE49-F238E27FC236}">
-                <a16:creationId xmlns:a16="http://schemas.microsoft.com/office/drawing/2014/main" id="{589B57F7-1F67-1274-B860-618551F54063}"/>
+                <a16:creationId xmlns:a16="http://schemas.microsoft.com/office/drawing/2014/main" id="{F0B66C08-9487-5698-6710-B3ACC2D31942}"/>
               </a:ext>
             </a:extLst>
           </p:cNvPr>
@@ -5312,7 +5312,7 @@
           <p:cNvPr id="16" name="文本框 15">
             <a:extLst>
               <a:ext uri="{FF2B5EF4-FFF2-40B4-BE49-F238E27FC236}">
-                <a16:creationId xmlns:a16="http://schemas.microsoft.com/office/drawing/2014/main" id="{F2DBB3D9-419C-0095-7A43-BE5B2ED01428}"/>
+                <a16:creationId xmlns:a16="http://schemas.microsoft.com/office/drawing/2014/main" id="{C727DA28-BC33-9EC0-2457-64DB32012E03}"/>
               </a:ext>
             </a:extLst>
           </p:cNvPr>
@@ -5365,7 +5365,7 @@
           <p:cNvPr id="17" name="矩形: 圆角 16">
             <a:extLst>
               <a:ext uri="{FF2B5EF4-FFF2-40B4-BE49-F238E27FC236}">
-                <a16:creationId xmlns:a16="http://schemas.microsoft.com/office/drawing/2014/main" id="{A310DD7B-6328-F424-7D78-0DF45CD6043C}"/>
+                <a16:creationId xmlns:a16="http://schemas.microsoft.com/office/drawing/2014/main" id="{5BC06426-A724-D4FF-8B85-11B7A459677E}"/>
               </a:ext>
             </a:extLst>
           </p:cNvPr>
@@ -5419,7 +5419,7 @@
           <p:cNvPr id="18" name="矩形 17">
             <a:extLst>
               <a:ext uri="{FF2B5EF4-FFF2-40B4-BE49-F238E27FC236}">
-                <a16:creationId xmlns:a16="http://schemas.microsoft.com/office/drawing/2014/main" id="{55C1101F-CF6D-92F2-EDA4-65D81D24797E}"/>
+                <a16:creationId xmlns:a16="http://schemas.microsoft.com/office/drawing/2014/main" id="{4AC16498-0E5E-93F7-4D54-D0F7D903F29B}"/>
               </a:ext>
             </a:extLst>
           </p:cNvPr>
@@ -5487,7 +5487,7 @@
           <p:cNvPr id="19" name="文本框 18">
             <a:extLst>
               <a:ext uri="{FF2B5EF4-FFF2-40B4-BE49-F238E27FC236}">
-                <a16:creationId xmlns:a16="http://schemas.microsoft.com/office/drawing/2014/main" id="{1DF0F45E-2C92-ECBF-FE39-AD3096AB8317}"/>
+                <a16:creationId xmlns:a16="http://schemas.microsoft.com/office/drawing/2014/main" id="{394675A2-D9EF-5828-82DD-7841ABAEA3DF}"/>
               </a:ext>
             </a:extLst>
           </p:cNvPr>
@@ -5533,7 +5533,7 @@
           <p:cNvPr id="20" name="文本框 19">
             <a:extLst>
               <a:ext uri="{FF2B5EF4-FFF2-40B4-BE49-F238E27FC236}">
-                <a16:creationId xmlns:a16="http://schemas.microsoft.com/office/drawing/2014/main" id="{B1BE599E-F5C4-86CD-44D8-4258ECD3842D}"/>
+                <a16:creationId xmlns:a16="http://schemas.microsoft.com/office/drawing/2014/main" id="{C5AB80E8-B475-B52D-029C-6555B941EFF3}"/>
               </a:ext>
             </a:extLst>
           </p:cNvPr>
@@ -5690,7 +5690,7 @@
           <p:cNvPr id="21" name="矩形 20">
             <a:extLst>
               <a:ext uri="{FF2B5EF4-FFF2-40B4-BE49-F238E27FC236}">
-                <a16:creationId xmlns:a16="http://schemas.microsoft.com/office/drawing/2014/main" id="{C8B53499-BFA4-0DB4-6E68-302CCF890466}"/>
+                <a16:creationId xmlns:a16="http://schemas.microsoft.com/office/drawing/2014/main" id="{79B15148-6752-B404-0017-9B2E6ABDCC75}"/>
               </a:ext>
             </a:extLst>
           </p:cNvPr>
@@ -5758,7 +5758,7 @@
           <p:cNvPr id="22" name="文本框 21">
             <a:extLst>
               <a:ext uri="{FF2B5EF4-FFF2-40B4-BE49-F238E27FC236}">
-                <a16:creationId xmlns:a16="http://schemas.microsoft.com/office/drawing/2014/main" id="{A27A0DA7-B4A6-EB23-250F-5B39A4519946}"/>
+                <a16:creationId xmlns:a16="http://schemas.microsoft.com/office/drawing/2014/main" id="{D8B82431-BFB0-B3B1-8B08-19AFE97CD92F}"/>
               </a:ext>
             </a:extLst>
           </p:cNvPr>
@@ -5811,7 +5811,7 @@
           <p:cNvPr id="23" name="矩形: 圆角 22">
             <a:extLst>
               <a:ext uri="{FF2B5EF4-FFF2-40B4-BE49-F238E27FC236}">
-                <a16:creationId xmlns:a16="http://schemas.microsoft.com/office/drawing/2014/main" id="{D06EC6DB-3DF3-F111-7328-B8A22143FC30}"/>
+                <a16:creationId xmlns:a16="http://schemas.microsoft.com/office/drawing/2014/main" id="{885AAC2F-08A8-8252-7586-B8BC73380B7D}"/>
               </a:ext>
             </a:extLst>
           </p:cNvPr>
@@ -5879,7 +5879,7 @@
           <p:cNvPr id="24" name="文本框 23">
             <a:extLst>
               <a:ext uri="{FF2B5EF4-FFF2-40B4-BE49-F238E27FC236}">
-                <a16:creationId xmlns:a16="http://schemas.microsoft.com/office/drawing/2014/main" id="{50FFDC93-3A3E-51C5-60DA-0B79FF6F4F38}"/>
+                <a16:creationId xmlns:a16="http://schemas.microsoft.com/office/drawing/2014/main" id="{13585686-465A-1F4D-D3A6-8970AA620909}"/>
               </a:ext>
             </a:extLst>
           </p:cNvPr>
@@ -5925,7 +5925,7 @@
           <p:cNvPr id="25" name="文本框 24">
             <a:extLst>
               <a:ext uri="{FF2B5EF4-FFF2-40B4-BE49-F238E27FC236}">
-                <a16:creationId xmlns:a16="http://schemas.microsoft.com/office/drawing/2014/main" id="{FFD9AEAF-5EF4-9FC2-02DD-25990F457543}"/>
+                <a16:creationId xmlns:a16="http://schemas.microsoft.com/office/drawing/2014/main" id="{A07E6AAB-DB97-176C-8532-5B45A4E64964}"/>
               </a:ext>
             </a:extLst>
           </p:cNvPr>
@@ -6135,7 +6135,7 @@
           <p:cNvPr id="26" name="矩形: 圆角 25">
             <a:extLst>
               <a:ext uri="{FF2B5EF4-FFF2-40B4-BE49-F238E27FC236}">
-                <a16:creationId xmlns:a16="http://schemas.microsoft.com/office/drawing/2014/main" id="{6B2355A1-F83E-BF2B-89C7-DC26DCD16474}"/>
+                <a16:creationId xmlns:a16="http://schemas.microsoft.com/office/drawing/2014/main" id="{1A97F131-1DC5-ACD6-56C5-4C9A96DC31E7}"/>
               </a:ext>
             </a:extLst>
           </p:cNvPr>
@@ -6203,7 +6203,7 @@
           <p:cNvPr id="27" name="文本框 26">
             <a:extLst>
               <a:ext uri="{FF2B5EF4-FFF2-40B4-BE49-F238E27FC236}">
-                <a16:creationId xmlns:a16="http://schemas.microsoft.com/office/drawing/2014/main" id="{36329AE9-B838-552D-749D-728A172AFB29}"/>
+                <a16:creationId xmlns:a16="http://schemas.microsoft.com/office/drawing/2014/main" id="{EA26D9D7-D533-0062-4BF4-8B6DC0C93153}"/>
               </a:ext>
             </a:extLst>
           </p:cNvPr>
@@ -6249,7 +6249,7 @@
           <p:cNvPr id="28" name="矩形 27">
             <a:extLst>
               <a:ext uri="{FF2B5EF4-FFF2-40B4-BE49-F238E27FC236}">
-                <a16:creationId xmlns:a16="http://schemas.microsoft.com/office/drawing/2014/main" id="{8DD53D35-8535-19A8-AE18-104E5BE1C289}"/>
+                <a16:creationId xmlns:a16="http://schemas.microsoft.com/office/drawing/2014/main" id="{52590DBC-1F1E-934B-078B-EFBC08D74F31}"/>
               </a:ext>
             </a:extLst>
           </p:cNvPr>
@@ -6317,7 +6317,7 @@
           <p:cNvPr id="29" name="文本框 28">
             <a:extLst>
               <a:ext uri="{FF2B5EF4-FFF2-40B4-BE49-F238E27FC236}">
-                <a16:creationId xmlns:a16="http://schemas.microsoft.com/office/drawing/2014/main" id="{320F6094-23AA-22F2-E60A-8A501278CCA7}"/>
+                <a16:creationId xmlns:a16="http://schemas.microsoft.com/office/drawing/2014/main" id="{BD6F0398-16E1-00A1-3108-FE904B9F06C6}"/>
               </a:ext>
             </a:extLst>
           </p:cNvPr>
@@ -6403,7 +6403,7 @@
           <p:cNvPr id="30" name="文本框 29">
             <a:extLst>
               <a:ext uri="{FF2B5EF4-FFF2-40B4-BE49-F238E27FC236}">
-                <a16:creationId xmlns:a16="http://schemas.microsoft.com/office/drawing/2014/main" id="{DE47B80F-0D43-8669-F262-3A7F75A05CC5}"/>
+                <a16:creationId xmlns:a16="http://schemas.microsoft.com/office/drawing/2014/main" id="{BB976E21-FA7F-E627-ED2E-0DE77CDCE784}"/>
               </a:ext>
             </a:extLst>
           </p:cNvPr>
@@ -6454,7 +6454,7 @@
     </p:spTree>
     <p:extLst>
       <p:ext uri="{BB962C8B-B14F-4D97-AF65-F5344CB8AC3E}">
-        <p14:creationId xmlns:p14="http://schemas.microsoft.com/office/powerpoint/2010/main" val="1893334513"/>
+        <p14:creationId xmlns:p14="http://schemas.microsoft.com/office/powerpoint/2010/main" val="4079958942"/>
       </p:ext>
     </p:extLst>
   </p:cSld>
@@ -6494,7 +6494,7 @@
           <p:cNvPr id="2" name="矩形 1">
             <a:extLst>
               <a:ext uri="{FF2B5EF4-FFF2-40B4-BE49-F238E27FC236}">
-                <a16:creationId xmlns:a16="http://schemas.microsoft.com/office/drawing/2014/main" id="{E1C1CED5-BFC6-C353-E751-95CF0071AF8F}"/>
+                <a16:creationId xmlns:a16="http://schemas.microsoft.com/office/drawing/2014/main" id="{294DD660-3DFF-A602-80CC-64BF29B9F461}"/>
               </a:ext>
             </a:extLst>
           </p:cNvPr>
@@ -6562,7 +6562,7 @@
           <p:cNvPr id="3" name="文本框 2">
             <a:extLst>
               <a:ext uri="{FF2B5EF4-FFF2-40B4-BE49-F238E27FC236}">
-                <a16:creationId xmlns:a16="http://schemas.microsoft.com/office/drawing/2014/main" id="{3B9B4D2D-A254-5341-5E02-6A90F97E57E5}"/>
+                <a16:creationId xmlns:a16="http://schemas.microsoft.com/office/drawing/2014/main" id="{E800EA1C-210B-437F-D513-B4EDDF26D480}"/>
               </a:ext>
             </a:extLst>
           </p:cNvPr>
@@ -6648,7 +6648,7 @@
           <p:cNvPr id="4" name="文本框 3">
             <a:extLst>
               <a:ext uri="{FF2B5EF4-FFF2-40B4-BE49-F238E27FC236}">
-                <a16:creationId xmlns:a16="http://schemas.microsoft.com/office/drawing/2014/main" id="{FA114775-65CB-D64E-6461-688985E96899}"/>
+                <a16:creationId xmlns:a16="http://schemas.microsoft.com/office/drawing/2014/main" id="{20D8125A-799E-EEC8-192A-28ADC01A86C4}"/>
               </a:ext>
             </a:extLst>
           </p:cNvPr>
@@ -6658,7 +6658,7 @@
         <p:spPr>
           <a:xfrm>
             <a:off x="711200" y="914400"/>
-            <a:ext cx="10922000" cy="161583"/>
+            <a:ext cx="10922000" cy="196849"/>
           </a:xfrm>
           <a:prstGeom prst="rect">
             <a:avLst/>
@@ -6673,11 +6673,11 @@
           <a:p>
             <a:pPr>
               <a:lnSpc>
-                <a:spcPct val="105000"/>
+                <a:spcPct val="110000"/>
               </a:lnSpc>
             </a:pPr>
             <a:r>
-              <a:rPr lang="zh-CN" altLang="en-US" sz="1050">
+              <a:rPr lang="zh-CN" altLang="en-US" sz="1250">
                 <a:solidFill>
                   <a:srgbClr val="7F8C8D"/>
                 </a:solidFill>
@@ -6687,7 +6687,7 @@
               <a:t>原始 </a:t>
             </a:r>
             <a:r>
-              <a:rPr lang="en-US" altLang="zh-CN" sz="1050">
+              <a:rPr lang="en-US" altLang="zh-CN" sz="1250">
                 <a:solidFill>
                   <a:srgbClr val="7F8C8D"/>
                 </a:solidFill>
@@ -6697,7 +6697,7 @@
               <a:t>59 </a:t>
             </a:r>
             <a:r>
-              <a:rPr lang="zh-CN" altLang="en-US" sz="1050">
+              <a:rPr lang="zh-CN" altLang="en-US" sz="1250">
                 <a:solidFill>
                   <a:srgbClr val="7F8C8D"/>
                 </a:solidFill>
@@ -6707,7 +6707,7 @@
               <a:t>列 → 剔除 </a:t>
             </a:r>
             <a:r>
-              <a:rPr lang="en-US" altLang="zh-CN" sz="1050">
+              <a:rPr lang="en-US" altLang="zh-CN" sz="1250">
                 <a:solidFill>
                   <a:srgbClr val="7F8C8D"/>
                 </a:solidFill>
@@ -6717,7 +6717,7 @@
               <a:t>13 </a:t>
             </a:r>
             <a:r>
-              <a:rPr lang="zh-CN" altLang="en-US" sz="1050">
+              <a:rPr lang="zh-CN" altLang="en-US" sz="1250">
                 <a:solidFill>
                   <a:srgbClr val="7F8C8D"/>
                 </a:solidFill>
@@ -6727,7 +6727,7 @@
               <a:t>列 → </a:t>
             </a:r>
             <a:r>
-              <a:rPr lang="en-US" altLang="zh-CN" sz="1050">
+              <a:rPr lang="en-US" altLang="zh-CN" sz="1250">
                 <a:solidFill>
                   <a:srgbClr val="7F8C8D"/>
                 </a:solidFill>
@@ -6737,7 +6737,7 @@
               <a:t>46 </a:t>
             </a:r>
             <a:r>
-              <a:rPr lang="zh-CN" altLang="en-US" sz="1050">
+              <a:rPr lang="zh-CN" altLang="en-US" sz="1250">
                 <a:solidFill>
                   <a:srgbClr val="7F8C8D"/>
                 </a:solidFill>
@@ -6747,7 +6747,7 @@
               <a:t>列 → </a:t>
             </a:r>
             <a:r>
-              <a:rPr lang="en-US" altLang="zh-CN" sz="1050">
+              <a:rPr lang="en-US" altLang="zh-CN" sz="1250">
                 <a:solidFill>
                   <a:srgbClr val="7F8C8D"/>
                 </a:solidFill>
@@ -6757,7 +6757,7 @@
               <a:t>One-Hot </a:t>
             </a:r>
             <a:r>
-              <a:rPr lang="zh-CN" altLang="en-US" sz="1050">
+              <a:rPr lang="zh-CN" altLang="en-US" sz="1250">
                 <a:solidFill>
                   <a:srgbClr val="7F8C8D"/>
                 </a:solidFill>
@@ -6767,7 +6767,7 @@
               <a:t>后 </a:t>
             </a:r>
             <a:r>
-              <a:rPr lang="en-US" altLang="zh-CN" sz="1050">
+              <a:rPr lang="en-US" altLang="zh-CN" sz="1250">
                 <a:solidFill>
                   <a:srgbClr val="7F8C8D"/>
                 </a:solidFill>
@@ -6777,7 +6777,7 @@
               <a:t>115 </a:t>
             </a:r>
             <a:r>
-              <a:rPr lang="zh-CN" altLang="en-US" sz="1050">
+              <a:rPr lang="zh-CN" altLang="en-US" sz="1250">
                 <a:solidFill>
                   <a:srgbClr val="7F8C8D"/>
                 </a:solidFill>
@@ -6787,7 +6787,7 @@
               <a:t>列；</a:t>
             </a:r>
             <a:r>
-              <a:rPr lang="en-US" altLang="zh-CN" sz="1050">
+              <a:rPr lang="en-US" altLang="zh-CN" sz="1250">
                 <a:solidFill>
                   <a:srgbClr val="7F8C8D"/>
                 </a:solidFill>
@@ -6797,7 +6797,7 @@
               <a:t>0 </a:t>
             </a:r>
             <a:r>
-              <a:rPr lang="zh-CN" altLang="en-US" sz="1050">
+              <a:rPr lang="zh-CN" altLang="en-US" sz="1250">
                 <a:solidFill>
                   <a:srgbClr val="7F8C8D"/>
                 </a:solidFill>
@@ -6807,7 +6807,7 @@
               <a:t>行删除、</a:t>
             </a:r>
             <a:r>
-              <a:rPr lang="en-US" altLang="zh-CN" sz="1050">
+              <a:rPr lang="en-US" altLang="zh-CN" sz="1250">
                 <a:solidFill>
                   <a:srgbClr val="7F8C8D"/>
                 </a:solidFill>
@@ -6817,7 +6817,7 @@
               <a:t>0 </a:t>
             </a:r>
             <a:r>
-              <a:rPr lang="zh-CN" altLang="en-US" sz="1050">
+              <a:rPr lang="zh-CN" altLang="en-US" sz="1250">
                 <a:solidFill>
                   <a:srgbClr val="7F8C8D"/>
                 </a:solidFill>
@@ -6834,7 +6834,7 @@
           <p:cNvPr id="5" name="矩形 4">
             <a:extLst>
               <a:ext uri="{FF2B5EF4-FFF2-40B4-BE49-F238E27FC236}">
-                <a16:creationId xmlns:a16="http://schemas.microsoft.com/office/drawing/2014/main" id="{87061DCF-0225-30CA-6B5B-B2095877E256}"/>
+                <a16:creationId xmlns:a16="http://schemas.microsoft.com/office/drawing/2014/main" id="{C4D952D0-9047-2D75-005B-507793AC06C9}"/>
               </a:ext>
             </a:extLst>
           </p:cNvPr>
@@ -6888,7 +6888,7 @@
           <p:cNvPr id="6" name="文本框 5">
             <a:extLst>
               <a:ext uri="{FF2B5EF4-FFF2-40B4-BE49-F238E27FC236}">
-                <a16:creationId xmlns:a16="http://schemas.microsoft.com/office/drawing/2014/main" id="{41A62522-A6F2-29F1-30F9-3DF433871142}"/>
+                <a16:creationId xmlns:a16="http://schemas.microsoft.com/office/drawing/2014/main" id="{93B718A3-4BF3-ABC9-506C-B745D31E4974}"/>
               </a:ext>
             </a:extLst>
           </p:cNvPr>
@@ -6934,7 +6934,7 @@
           <p:cNvPr id="7" name="矩形 6">
             <a:extLst>
               <a:ext uri="{FF2B5EF4-FFF2-40B4-BE49-F238E27FC236}">
-                <a16:creationId xmlns:a16="http://schemas.microsoft.com/office/drawing/2014/main" id="{D45EF0B4-C4D4-DB2D-177D-A29FE7AEEDAB}"/>
+                <a16:creationId xmlns:a16="http://schemas.microsoft.com/office/drawing/2014/main" id="{FE9C26F7-D383-4B5D-3D60-E63233E7C1A4}"/>
               </a:ext>
             </a:extLst>
           </p:cNvPr>
@@ -6988,7 +6988,7 @@
           <p:cNvPr id="8" name="文本框 7">
             <a:extLst>
               <a:ext uri="{FF2B5EF4-FFF2-40B4-BE49-F238E27FC236}">
-                <a16:creationId xmlns:a16="http://schemas.microsoft.com/office/drawing/2014/main" id="{DE59CF78-A06E-B261-94D0-4E8D51BA82BD}"/>
+                <a16:creationId xmlns:a16="http://schemas.microsoft.com/office/drawing/2014/main" id="{72F8FE84-C441-BEDC-6EAD-A993A916EB1B}"/>
               </a:ext>
             </a:extLst>
           </p:cNvPr>
@@ -7034,7 +7034,7 @@
           <p:cNvPr id="9" name="矩形 8">
             <a:extLst>
               <a:ext uri="{FF2B5EF4-FFF2-40B4-BE49-F238E27FC236}">
-                <a16:creationId xmlns:a16="http://schemas.microsoft.com/office/drawing/2014/main" id="{847E922E-6EE3-A10E-9538-83545CA1B8B4}"/>
+                <a16:creationId xmlns:a16="http://schemas.microsoft.com/office/drawing/2014/main" id="{1893B4B8-81B8-DFB8-68FB-644C9CA414D5}"/>
               </a:ext>
             </a:extLst>
           </p:cNvPr>
@@ -7088,7 +7088,7 @@
           <p:cNvPr id="10" name="文本框 9">
             <a:extLst>
               <a:ext uri="{FF2B5EF4-FFF2-40B4-BE49-F238E27FC236}">
-                <a16:creationId xmlns:a16="http://schemas.microsoft.com/office/drawing/2014/main" id="{46EFF709-A085-5AF3-ACFE-E73208B83CD7}"/>
+                <a16:creationId xmlns:a16="http://schemas.microsoft.com/office/drawing/2014/main" id="{D1DCAD20-1B1E-BD5C-2718-960444D36BEA}"/>
               </a:ext>
             </a:extLst>
           </p:cNvPr>
@@ -7134,7 +7134,7 @@
           <p:cNvPr id="11" name="矩形 10">
             <a:extLst>
               <a:ext uri="{FF2B5EF4-FFF2-40B4-BE49-F238E27FC236}">
-                <a16:creationId xmlns:a16="http://schemas.microsoft.com/office/drawing/2014/main" id="{9EEF7498-F1E7-1E38-38AA-8DF1EE98F69B}"/>
+                <a16:creationId xmlns:a16="http://schemas.microsoft.com/office/drawing/2014/main" id="{A940B23A-2AB6-8EE0-6652-D8B01BAD5AC9}"/>
               </a:ext>
             </a:extLst>
           </p:cNvPr>
@@ -7188,7 +7188,7 @@
           <p:cNvPr id="12" name="文本框 11">
             <a:extLst>
               <a:ext uri="{FF2B5EF4-FFF2-40B4-BE49-F238E27FC236}">
-                <a16:creationId xmlns:a16="http://schemas.microsoft.com/office/drawing/2014/main" id="{B1A3BC4F-CC55-AED4-6FAB-09FF4D839016}"/>
+                <a16:creationId xmlns:a16="http://schemas.microsoft.com/office/drawing/2014/main" id="{580A223A-4763-2006-BCE5-91A994227E80}"/>
               </a:ext>
             </a:extLst>
           </p:cNvPr>
@@ -7244,7 +7244,7 @@
           <p:cNvPr id="13" name="矩形 12">
             <a:extLst>
               <a:ext uri="{FF2B5EF4-FFF2-40B4-BE49-F238E27FC236}">
-                <a16:creationId xmlns:a16="http://schemas.microsoft.com/office/drawing/2014/main" id="{7B4D0C6A-E7DB-8E24-E3D3-440646D55F83}"/>
+                <a16:creationId xmlns:a16="http://schemas.microsoft.com/office/drawing/2014/main" id="{4059A0AE-FC17-B158-07D3-A8485FE42E5A}"/>
               </a:ext>
             </a:extLst>
           </p:cNvPr>
@@ -7298,7 +7298,7 @@
           <p:cNvPr id="14" name="文本框 13">
             <a:extLst>
               <a:ext uri="{FF2B5EF4-FFF2-40B4-BE49-F238E27FC236}">
-                <a16:creationId xmlns:a16="http://schemas.microsoft.com/office/drawing/2014/main" id="{D9B24A4D-2C72-A6A9-A6D0-00489DA23C1F}"/>
+                <a16:creationId xmlns:a16="http://schemas.microsoft.com/office/drawing/2014/main" id="{94C4A161-44F0-C908-949E-E3806731417F}"/>
               </a:ext>
             </a:extLst>
           </p:cNvPr>
@@ -7351,7 +7351,7 @@
           <p:cNvPr id="15" name="矩形 14">
             <a:extLst>
               <a:ext uri="{FF2B5EF4-FFF2-40B4-BE49-F238E27FC236}">
-                <a16:creationId xmlns:a16="http://schemas.microsoft.com/office/drawing/2014/main" id="{E81DF25E-F128-0C9A-0218-0BEC9813C357}"/>
+                <a16:creationId xmlns:a16="http://schemas.microsoft.com/office/drawing/2014/main" id="{FF8BE8DB-2C73-06A4-A274-2EEE14690760}"/>
               </a:ext>
             </a:extLst>
           </p:cNvPr>
@@ -7405,7 +7405,7 @@
           <p:cNvPr id="16" name="文本框 15">
             <a:extLst>
               <a:ext uri="{FF2B5EF4-FFF2-40B4-BE49-F238E27FC236}">
-                <a16:creationId xmlns:a16="http://schemas.microsoft.com/office/drawing/2014/main" id="{8A147122-7A2A-57E1-F0B5-3FE91F2438EF}"/>
+                <a16:creationId xmlns:a16="http://schemas.microsoft.com/office/drawing/2014/main" id="{BCF9C207-7B67-3C34-FC27-A741EA75F0F8}"/>
               </a:ext>
             </a:extLst>
           </p:cNvPr>
@@ -7588,7 +7588,7 @@
           <p:cNvPr id="17" name="矩形 16">
             <a:extLst>
               <a:ext uri="{FF2B5EF4-FFF2-40B4-BE49-F238E27FC236}">
-                <a16:creationId xmlns:a16="http://schemas.microsoft.com/office/drawing/2014/main" id="{7D99721B-5E2F-9265-E350-A637178F2085}"/>
+                <a16:creationId xmlns:a16="http://schemas.microsoft.com/office/drawing/2014/main" id="{2080A8BF-FF0E-8859-EADB-5ED9BC7E04A1}"/>
               </a:ext>
             </a:extLst>
           </p:cNvPr>
@@ -7642,7 +7642,7 @@
           <p:cNvPr id="18" name="文本框 17">
             <a:extLst>
               <a:ext uri="{FF2B5EF4-FFF2-40B4-BE49-F238E27FC236}">
-                <a16:creationId xmlns:a16="http://schemas.microsoft.com/office/drawing/2014/main" id="{B4EE4F0E-2842-6246-F478-3DC4DA6B80E3}"/>
+                <a16:creationId xmlns:a16="http://schemas.microsoft.com/office/drawing/2014/main" id="{36A5D4F6-869E-E534-85F8-36FB79A641B0}"/>
               </a:ext>
             </a:extLst>
           </p:cNvPr>
@@ -7688,7 +7688,7 @@
           <p:cNvPr id="19" name="矩形 18">
             <a:extLst>
               <a:ext uri="{FF2B5EF4-FFF2-40B4-BE49-F238E27FC236}">
-                <a16:creationId xmlns:a16="http://schemas.microsoft.com/office/drawing/2014/main" id="{EC40FB70-253B-C58E-6957-B8F87AEDE35C}"/>
+                <a16:creationId xmlns:a16="http://schemas.microsoft.com/office/drawing/2014/main" id="{B00436D5-8E35-EE77-96A6-1F145AEF4147}"/>
               </a:ext>
             </a:extLst>
           </p:cNvPr>
@@ -7742,7 +7742,7 @@
           <p:cNvPr id="20" name="文本框 19">
             <a:extLst>
               <a:ext uri="{FF2B5EF4-FFF2-40B4-BE49-F238E27FC236}">
-                <a16:creationId xmlns:a16="http://schemas.microsoft.com/office/drawing/2014/main" id="{516FC22A-574E-6DAB-4BF6-6FD598A1BF32}"/>
+                <a16:creationId xmlns:a16="http://schemas.microsoft.com/office/drawing/2014/main" id="{BDE4BE4E-3490-9300-C23C-F30AF9724E60}"/>
               </a:ext>
             </a:extLst>
           </p:cNvPr>
@@ -7795,7 +7795,7 @@
           <p:cNvPr id="21" name="矩形 20">
             <a:extLst>
               <a:ext uri="{FF2B5EF4-FFF2-40B4-BE49-F238E27FC236}">
-                <a16:creationId xmlns:a16="http://schemas.microsoft.com/office/drawing/2014/main" id="{D39B0822-73B6-0731-68D8-D1CDA716E7DE}"/>
+                <a16:creationId xmlns:a16="http://schemas.microsoft.com/office/drawing/2014/main" id="{BE379878-5E5F-6476-38C9-92D42815928F}"/>
               </a:ext>
             </a:extLst>
           </p:cNvPr>
@@ -7849,7 +7849,7 @@
           <p:cNvPr id="22" name="文本框 21">
             <a:extLst>
               <a:ext uri="{FF2B5EF4-FFF2-40B4-BE49-F238E27FC236}">
-                <a16:creationId xmlns:a16="http://schemas.microsoft.com/office/drawing/2014/main" id="{2AFCEB8A-9B22-D1F1-0ADA-8E0975567803}"/>
+                <a16:creationId xmlns:a16="http://schemas.microsoft.com/office/drawing/2014/main" id="{AE3A37D0-5341-FE5B-D968-D792B569EF6E}"/>
               </a:ext>
             </a:extLst>
           </p:cNvPr>
@@ -7895,7 +7895,7 @@
           <p:cNvPr id="23" name="矩形 22">
             <a:extLst>
               <a:ext uri="{FF2B5EF4-FFF2-40B4-BE49-F238E27FC236}">
-                <a16:creationId xmlns:a16="http://schemas.microsoft.com/office/drawing/2014/main" id="{70BA340E-6FCD-C82A-ACF6-D1D83B3F1A32}"/>
+                <a16:creationId xmlns:a16="http://schemas.microsoft.com/office/drawing/2014/main" id="{B6E85330-0A2F-7F1B-449E-7123F4E9871A}"/>
               </a:ext>
             </a:extLst>
           </p:cNvPr>
@@ -7949,7 +7949,7 @@
           <p:cNvPr id="24" name="文本框 23">
             <a:extLst>
               <a:ext uri="{FF2B5EF4-FFF2-40B4-BE49-F238E27FC236}">
-                <a16:creationId xmlns:a16="http://schemas.microsoft.com/office/drawing/2014/main" id="{8154FAA5-7A7C-68BA-D17E-DAE629E7AD8E}"/>
+                <a16:creationId xmlns:a16="http://schemas.microsoft.com/office/drawing/2014/main" id="{7635710C-D5DB-D409-600E-A7DF5E4E063B}"/>
               </a:ext>
             </a:extLst>
           </p:cNvPr>
@@ -8032,7 +8032,7 @@
           <p:cNvPr id="25" name="矩形 24">
             <a:extLst>
               <a:ext uri="{FF2B5EF4-FFF2-40B4-BE49-F238E27FC236}">
-                <a16:creationId xmlns:a16="http://schemas.microsoft.com/office/drawing/2014/main" id="{F5F9758B-16D3-283E-27B5-B60D737FEF9C}"/>
+                <a16:creationId xmlns:a16="http://schemas.microsoft.com/office/drawing/2014/main" id="{3D13CB64-3C54-756F-4F52-23559E7F889A}"/>
               </a:ext>
             </a:extLst>
           </p:cNvPr>
@@ -8086,7 +8086,7 @@
           <p:cNvPr id="26" name="文本框 25">
             <a:extLst>
               <a:ext uri="{FF2B5EF4-FFF2-40B4-BE49-F238E27FC236}">
-                <a16:creationId xmlns:a16="http://schemas.microsoft.com/office/drawing/2014/main" id="{42A5D3A3-AD69-FA7B-CD22-133A07C767B3}"/>
+                <a16:creationId xmlns:a16="http://schemas.microsoft.com/office/drawing/2014/main" id="{37968B04-01CD-5DB9-B182-A6A28BD51AA4}"/>
               </a:ext>
             </a:extLst>
           </p:cNvPr>
@@ -8139,7 +8139,7 @@
           <p:cNvPr id="27" name="矩形 26">
             <a:extLst>
               <a:ext uri="{FF2B5EF4-FFF2-40B4-BE49-F238E27FC236}">
-                <a16:creationId xmlns:a16="http://schemas.microsoft.com/office/drawing/2014/main" id="{40B51A59-0BE6-4A14-0DFE-7FE6F7CA1761}"/>
+                <a16:creationId xmlns:a16="http://schemas.microsoft.com/office/drawing/2014/main" id="{63990764-46F0-C54A-3FC7-6DF9FF1A38BB}"/>
               </a:ext>
             </a:extLst>
           </p:cNvPr>
@@ -8193,7 +8193,7 @@
           <p:cNvPr id="28" name="文本框 27">
             <a:extLst>
               <a:ext uri="{FF2B5EF4-FFF2-40B4-BE49-F238E27FC236}">
-                <a16:creationId xmlns:a16="http://schemas.microsoft.com/office/drawing/2014/main" id="{C1AA85FC-5369-6C44-D7D1-9CEBD6DAB186}"/>
+                <a16:creationId xmlns:a16="http://schemas.microsoft.com/office/drawing/2014/main" id="{493DC366-1E12-3027-EBD1-B4FAD52A25A3}"/>
               </a:ext>
             </a:extLst>
           </p:cNvPr>
@@ -8259,7 +8259,7 @@
           <p:cNvPr id="29" name="矩形 28">
             <a:extLst>
               <a:ext uri="{FF2B5EF4-FFF2-40B4-BE49-F238E27FC236}">
-                <a16:creationId xmlns:a16="http://schemas.microsoft.com/office/drawing/2014/main" id="{2EE0466B-323B-E5F4-124E-280A696E20A5}"/>
+                <a16:creationId xmlns:a16="http://schemas.microsoft.com/office/drawing/2014/main" id="{8DBBC1E1-866B-1D38-A003-DF57D1CB00F3}"/>
               </a:ext>
             </a:extLst>
           </p:cNvPr>
@@ -8313,7 +8313,7 @@
           <p:cNvPr id="30" name="文本框 29">
             <a:extLst>
               <a:ext uri="{FF2B5EF4-FFF2-40B4-BE49-F238E27FC236}">
-                <a16:creationId xmlns:a16="http://schemas.microsoft.com/office/drawing/2014/main" id="{6A558194-447A-01BF-D780-B23299AC2302}"/>
+                <a16:creationId xmlns:a16="http://schemas.microsoft.com/office/drawing/2014/main" id="{25CF9196-473C-675B-ADA7-F80728A0B517}"/>
               </a:ext>
             </a:extLst>
           </p:cNvPr>
@@ -8359,7 +8359,7 @@
           <p:cNvPr id="31" name="矩形 30">
             <a:extLst>
               <a:ext uri="{FF2B5EF4-FFF2-40B4-BE49-F238E27FC236}">
-                <a16:creationId xmlns:a16="http://schemas.microsoft.com/office/drawing/2014/main" id="{1BEA22EA-A43A-D49B-706B-2824CF15BF3E}"/>
+                <a16:creationId xmlns:a16="http://schemas.microsoft.com/office/drawing/2014/main" id="{74209277-B461-B77D-383B-B5E20B02ABCC}"/>
               </a:ext>
             </a:extLst>
           </p:cNvPr>
@@ -8413,7 +8413,7 @@
           <p:cNvPr id="32" name="文本框 31">
             <a:extLst>
               <a:ext uri="{FF2B5EF4-FFF2-40B4-BE49-F238E27FC236}">
-                <a16:creationId xmlns:a16="http://schemas.microsoft.com/office/drawing/2014/main" id="{59DF58D7-586E-CAAB-67F5-A421B55FF217}"/>
+                <a16:creationId xmlns:a16="http://schemas.microsoft.com/office/drawing/2014/main" id="{D464E7CA-09BA-ADB8-DA3C-D057ACC3FCFC}"/>
               </a:ext>
             </a:extLst>
           </p:cNvPr>
@@ -8466,7 +8466,7 @@
           <p:cNvPr id="33" name="矩形 32">
             <a:extLst>
               <a:ext uri="{FF2B5EF4-FFF2-40B4-BE49-F238E27FC236}">
-                <a16:creationId xmlns:a16="http://schemas.microsoft.com/office/drawing/2014/main" id="{B4F7732D-8F41-DD0F-0BDB-4685C6625826}"/>
+                <a16:creationId xmlns:a16="http://schemas.microsoft.com/office/drawing/2014/main" id="{42C0987D-29ED-204C-40A0-F1A8752B1279}"/>
               </a:ext>
             </a:extLst>
           </p:cNvPr>
@@ -8520,7 +8520,7 @@
           <p:cNvPr id="34" name="文本框 33">
             <a:extLst>
               <a:ext uri="{FF2B5EF4-FFF2-40B4-BE49-F238E27FC236}">
-                <a16:creationId xmlns:a16="http://schemas.microsoft.com/office/drawing/2014/main" id="{8D2B2438-FF2B-3FCE-465F-C9902C374E7C}"/>
+                <a16:creationId xmlns:a16="http://schemas.microsoft.com/office/drawing/2014/main" id="{24371145-B93C-FAAA-E957-FB6A863BBC8D}"/>
               </a:ext>
             </a:extLst>
           </p:cNvPr>
@@ -8596,7 +8596,7 @@
           <p:cNvPr id="35" name="矩形 34">
             <a:extLst>
               <a:ext uri="{FF2B5EF4-FFF2-40B4-BE49-F238E27FC236}">
-                <a16:creationId xmlns:a16="http://schemas.microsoft.com/office/drawing/2014/main" id="{CAE7D240-8702-AD3D-6460-30604EEFC393}"/>
+                <a16:creationId xmlns:a16="http://schemas.microsoft.com/office/drawing/2014/main" id="{9DAC8068-804C-0D1D-866F-F2615B82932B}"/>
               </a:ext>
             </a:extLst>
           </p:cNvPr>
@@ -8650,7 +8650,7 @@
           <p:cNvPr id="36" name="文本框 35">
             <a:extLst>
               <a:ext uri="{FF2B5EF4-FFF2-40B4-BE49-F238E27FC236}">
-                <a16:creationId xmlns:a16="http://schemas.microsoft.com/office/drawing/2014/main" id="{D00CE00C-861E-9C2A-AAC3-60BA480AE584}"/>
+                <a16:creationId xmlns:a16="http://schemas.microsoft.com/office/drawing/2014/main" id="{3007F884-58C1-3367-FB5A-1D86C924BF7A}"/>
               </a:ext>
             </a:extLst>
           </p:cNvPr>
@@ -8696,7 +8696,7 @@
           <p:cNvPr id="37" name="矩形 36">
             <a:extLst>
               <a:ext uri="{FF2B5EF4-FFF2-40B4-BE49-F238E27FC236}">
-                <a16:creationId xmlns:a16="http://schemas.microsoft.com/office/drawing/2014/main" id="{2D90442C-2189-C410-17A5-8714AA4063CB}"/>
+                <a16:creationId xmlns:a16="http://schemas.microsoft.com/office/drawing/2014/main" id="{D89A36F4-5549-98D8-F068-1765C2E6E6CC}"/>
               </a:ext>
             </a:extLst>
           </p:cNvPr>
@@ -8750,7 +8750,7 @@
           <p:cNvPr id="38" name="文本框 37">
             <a:extLst>
               <a:ext uri="{FF2B5EF4-FFF2-40B4-BE49-F238E27FC236}">
-                <a16:creationId xmlns:a16="http://schemas.microsoft.com/office/drawing/2014/main" id="{76308DFE-75A4-BE05-C034-653F2D435AEA}"/>
+                <a16:creationId xmlns:a16="http://schemas.microsoft.com/office/drawing/2014/main" id="{7371AE7F-3417-E8DE-3949-C3AFA179794F}"/>
               </a:ext>
             </a:extLst>
           </p:cNvPr>
@@ -8803,7 +8803,7 @@
           <p:cNvPr id="39" name="矩形 38">
             <a:extLst>
               <a:ext uri="{FF2B5EF4-FFF2-40B4-BE49-F238E27FC236}">
-                <a16:creationId xmlns:a16="http://schemas.microsoft.com/office/drawing/2014/main" id="{3876E6BE-0D2D-DF68-D541-DAA27C39022C}"/>
+                <a16:creationId xmlns:a16="http://schemas.microsoft.com/office/drawing/2014/main" id="{2FCC37A5-2696-308C-EFCC-33105C7EF41B}"/>
               </a:ext>
             </a:extLst>
           </p:cNvPr>
@@ -8857,7 +8857,7 @@
           <p:cNvPr id="40" name="文本框 39">
             <a:extLst>
               <a:ext uri="{FF2B5EF4-FFF2-40B4-BE49-F238E27FC236}">
-                <a16:creationId xmlns:a16="http://schemas.microsoft.com/office/drawing/2014/main" id="{C157CEEA-882B-6DF2-C5BD-BECD5F1878E8}"/>
+                <a16:creationId xmlns:a16="http://schemas.microsoft.com/office/drawing/2014/main" id="{9DCF9970-B58A-0FF9-B122-5D17CCDFC393}"/>
               </a:ext>
             </a:extLst>
           </p:cNvPr>
@@ -8953,7 +8953,7 @@
           <p:cNvPr id="41" name="矩形 40">
             <a:extLst>
               <a:ext uri="{FF2B5EF4-FFF2-40B4-BE49-F238E27FC236}">
-                <a16:creationId xmlns:a16="http://schemas.microsoft.com/office/drawing/2014/main" id="{4A5B645C-CFEB-A7D6-9BFD-6866973CB775}"/>
+                <a16:creationId xmlns:a16="http://schemas.microsoft.com/office/drawing/2014/main" id="{00C746E8-E025-DCB3-E496-CD5F69F433A8}"/>
               </a:ext>
             </a:extLst>
           </p:cNvPr>
@@ -9007,7 +9007,7 @@
           <p:cNvPr id="42" name="文本框 41">
             <a:extLst>
               <a:ext uri="{FF2B5EF4-FFF2-40B4-BE49-F238E27FC236}">
-                <a16:creationId xmlns:a16="http://schemas.microsoft.com/office/drawing/2014/main" id="{F02351D0-34E4-BACF-575D-8DF806706F67}"/>
+                <a16:creationId xmlns:a16="http://schemas.microsoft.com/office/drawing/2014/main" id="{B50CF31B-1873-2A91-B41C-F6710395C8CE}"/>
               </a:ext>
             </a:extLst>
           </p:cNvPr>
@@ -9053,7 +9053,7 @@
           <p:cNvPr id="43" name="矩形 42">
             <a:extLst>
               <a:ext uri="{FF2B5EF4-FFF2-40B4-BE49-F238E27FC236}">
-                <a16:creationId xmlns:a16="http://schemas.microsoft.com/office/drawing/2014/main" id="{F26994F7-6F48-AC9B-735E-7D798A17FFD7}"/>
+                <a16:creationId xmlns:a16="http://schemas.microsoft.com/office/drawing/2014/main" id="{88B5F872-0F07-007F-28F3-E7D8FA94704B}"/>
               </a:ext>
             </a:extLst>
           </p:cNvPr>
@@ -9107,7 +9107,7 @@
           <p:cNvPr id="44" name="文本框 43">
             <a:extLst>
               <a:ext uri="{FF2B5EF4-FFF2-40B4-BE49-F238E27FC236}">
-                <a16:creationId xmlns:a16="http://schemas.microsoft.com/office/drawing/2014/main" id="{679AFC91-02CC-241F-D681-85FA4509AF60}"/>
+                <a16:creationId xmlns:a16="http://schemas.microsoft.com/office/drawing/2014/main" id="{C3BCF1E0-999D-12B0-EB7E-25605F334EE3}"/>
               </a:ext>
             </a:extLst>
           </p:cNvPr>
@@ -9160,7 +9160,7 @@
           <p:cNvPr id="45" name="矩形 44">
             <a:extLst>
               <a:ext uri="{FF2B5EF4-FFF2-40B4-BE49-F238E27FC236}">
-                <a16:creationId xmlns:a16="http://schemas.microsoft.com/office/drawing/2014/main" id="{366788F2-8599-DE70-07F0-0DA52FBADE6C}"/>
+                <a16:creationId xmlns:a16="http://schemas.microsoft.com/office/drawing/2014/main" id="{BC676DD2-6199-72A2-418A-D7BDCA5B2417}"/>
               </a:ext>
             </a:extLst>
           </p:cNvPr>
@@ -9214,7 +9214,7 @@
           <p:cNvPr id="46" name="文本框 45">
             <a:extLst>
               <a:ext uri="{FF2B5EF4-FFF2-40B4-BE49-F238E27FC236}">
-                <a16:creationId xmlns:a16="http://schemas.microsoft.com/office/drawing/2014/main" id="{408900C5-6BAC-5989-41AA-E8C722579E0A}"/>
+                <a16:creationId xmlns:a16="http://schemas.microsoft.com/office/drawing/2014/main" id="{33FA9F06-85A4-BA85-49B3-1DD8FC465CCD}"/>
               </a:ext>
             </a:extLst>
           </p:cNvPr>
@@ -9280,7 +9280,7 @@
           <p:cNvPr id="47" name="矩形: 圆角 46">
             <a:extLst>
               <a:ext uri="{FF2B5EF4-FFF2-40B4-BE49-F238E27FC236}">
-                <a16:creationId xmlns:a16="http://schemas.microsoft.com/office/drawing/2014/main" id="{537420C2-E450-5B83-3479-883F7ABE3D62}"/>
+                <a16:creationId xmlns:a16="http://schemas.microsoft.com/office/drawing/2014/main" id="{2108F52F-A07D-63F7-052B-01E04C92BF11}"/>
               </a:ext>
             </a:extLst>
           </p:cNvPr>
@@ -9348,7 +9348,7 @@
           <p:cNvPr id="48" name="文本框 47">
             <a:extLst>
               <a:ext uri="{FF2B5EF4-FFF2-40B4-BE49-F238E27FC236}">
-                <a16:creationId xmlns:a16="http://schemas.microsoft.com/office/drawing/2014/main" id="{75E8771F-AB3A-ADCA-DA0F-3D317FF97785}"/>
+                <a16:creationId xmlns:a16="http://schemas.microsoft.com/office/drawing/2014/main" id="{6669B199-D84A-E8BC-ADEB-A76044A21C16}"/>
               </a:ext>
             </a:extLst>
           </p:cNvPr>
@@ -9524,7 +9524,7 @@
           <p:cNvPr id="49" name="文本框 48">
             <a:extLst>
               <a:ext uri="{FF2B5EF4-FFF2-40B4-BE49-F238E27FC236}">
-                <a16:creationId xmlns:a16="http://schemas.microsoft.com/office/drawing/2014/main" id="{3ACCE42B-FBFE-3D75-0C6E-577E4893ADFE}"/>
+                <a16:creationId xmlns:a16="http://schemas.microsoft.com/office/drawing/2014/main" id="{37037B00-7C2C-7BBD-5B8F-0A01BCA923BA}"/>
               </a:ext>
             </a:extLst>
           </p:cNvPr>
@@ -9690,7 +9690,7 @@
           <p:cNvPr id="50" name="矩形 49">
             <a:extLst>
               <a:ext uri="{FF2B5EF4-FFF2-40B4-BE49-F238E27FC236}">
-                <a16:creationId xmlns:a16="http://schemas.microsoft.com/office/drawing/2014/main" id="{069B0F9E-CEDD-DDAA-A519-9FC5DA0BF918}"/>
+                <a16:creationId xmlns:a16="http://schemas.microsoft.com/office/drawing/2014/main" id="{60466D86-5574-F39F-2DE7-599C36D5207C}"/>
               </a:ext>
             </a:extLst>
           </p:cNvPr>
@@ -9758,7 +9758,7 @@
           <p:cNvPr id="51" name="文本框 50">
             <a:extLst>
               <a:ext uri="{FF2B5EF4-FFF2-40B4-BE49-F238E27FC236}">
-                <a16:creationId xmlns:a16="http://schemas.microsoft.com/office/drawing/2014/main" id="{4A477B9C-5E94-0A76-340D-8B9B5992F46D}"/>
+                <a16:creationId xmlns:a16="http://schemas.microsoft.com/office/drawing/2014/main" id="{CF50CF59-609D-3EDD-6FF8-0C149013E9B5}"/>
               </a:ext>
             </a:extLst>
           </p:cNvPr>
@@ -9904,7 +9904,7 @@
           <p:cNvPr id="52" name="文本框 51">
             <a:extLst>
               <a:ext uri="{FF2B5EF4-FFF2-40B4-BE49-F238E27FC236}">
-                <a16:creationId xmlns:a16="http://schemas.microsoft.com/office/drawing/2014/main" id="{BAE0685B-DA9D-8B27-BB49-1EC8792576D0}"/>
+                <a16:creationId xmlns:a16="http://schemas.microsoft.com/office/drawing/2014/main" id="{6078DF69-00F4-C756-F746-2D6B7B1359DD}"/>
               </a:ext>
             </a:extLst>
           </p:cNvPr>
@@ -9955,7 +9955,7 @@
     </p:spTree>
     <p:extLst>
       <p:ext uri="{BB962C8B-B14F-4D97-AF65-F5344CB8AC3E}">
-        <p14:creationId xmlns:p14="http://schemas.microsoft.com/office/powerpoint/2010/main" val="4029003740"/>
+        <p14:creationId xmlns:p14="http://schemas.microsoft.com/office/powerpoint/2010/main" val="1325641371"/>
       </p:ext>
     </p:extLst>
   </p:cSld>
@@ -9995,7 +9995,7 @@
           <p:cNvPr id="2" name="矩形 1">
             <a:extLst>
               <a:ext uri="{FF2B5EF4-FFF2-40B4-BE49-F238E27FC236}">
-                <a16:creationId xmlns:a16="http://schemas.microsoft.com/office/drawing/2014/main" id="{7BC8F863-A7E0-44D5-871B-54E6178467A4}"/>
+                <a16:creationId xmlns:a16="http://schemas.microsoft.com/office/drawing/2014/main" id="{E2AF15D4-95AC-0949-D110-C275823C4097}"/>
               </a:ext>
             </a:extLst>
           </p:cNvPr>
@@ -10063,7 +10063,7 @@
           <p:cNvPr id="3" name="文本框 2">
             <a:extLst>
               <a:ext uri="{FF2B5EF4-FFF2-40B4-BE49-F238E27FC236}">
-                <a16:creationId xmlns:a16="http://schemas.microsoft.com/office/drawing/2014/main" id="{7BAC2E33-4692-7D59-E928-7A06C7AB8949}"/>
+                <a16:creationId xmlns:a16="http://schemas.microsoft.com/office/drawing/2014/main" id="{93E89E3F-0CA4-9ADC-4D28-AEF910239F0E}"/>
               </a:ext>
             </a:extLst>
           </p:cNvPr>
@@ -10169,7 +10169,7 @@
           <p:cNvPr id="4" name="文本框 3">
             <a:extLst>
               <a:ext uri="{FF2B5EF4-FFF2-40B4-BE49-F238E27FC236}">
-                <a16:creationId xmlns:a16="http://schemas.microsoft.com/office/drawing/2014/main" id="{1913B605-DC3F-9042-DBDA-07FA050607E7}"/>
+                <a16:creationId xmlns:a16="http://schemas.microsoft.com/office/drawing/2014/main" id="{FF881DEE-91DD-710B-079C-9486E7BAB5DB}"/>
               </a:ext>
             </a:extLst>
           </p:cNvPr>
@@ -10179,7 +10179,7 @@
         <p:spPr>
           <a:xfrm>
             <a:off x="711200" y="914400"/>
-            <a:ext cx="10922000" cy="161583"/>
+            <a:ext cx="10922000" cy="196849"/>
           </a:xfrm>
           <a:prstGeom prst="rect">
             <a:avLst/>
@@ -10194,11 +10194,11 @@
           <a:p>
             <a:pPr>
               <a:lnSpc>
-                <a:spcPct val="105000"/>
+                <a:spcPct val="110000"/>
               </a:lnSpc>
             </a:pPr>
             <a:r>
-              <a:rPr lang="zh-CN" altLang="en-US" sz="1050">
+              <a:rPr lang="zh-CN" altLang="en-US" sz="1250">
                 <a:solidFill>
                   <a:srgbClr val="7F8C8D"/>
                 </a:solidFill>
@@ -10208,7 +10208,7 @@
               <a:t>分数排序不变；</a:t>
             </a:r>
             <a:r>
-              <a:rPr lang="en-US" altLang="zh-CN" sz="1050">
+              <a:rPr lang="en-US" altLang="zh-CN" sz="1250">
                 <a:solidFill>
                   <a:srgbClr val="7F8C8D"/>
                 </a:solidFill>
@@ -10218,7 +10218,7 @@
               <a:t>K </a:t>
             </a:r>
             <a:r>
-              <a:rPr lang="zh-CN" altLang="en-US" sz="1050">
+              <a:rPr lang="zh-CN" altLang="en-US" sz="1250">
                 <a:solidFill>
                   <a:srgbClr val="7F8C8D"/>
                 </a:solidFill>
@@ -10228,7 +10228,7 @@
               <a:t>越大，召回越高、精确率越低。</a:t>
             </a:r>
             <a:r>
-              <a:rPr lang="en-US" altLang="zh-CN" sz="1050">
+              <a:rPr lang="en-US" altLang="zh-CN" sz="1250">
                 <a:solidFill>
                   <a:srgbClr val="7F8C8D"/>
                 </a:solidFill>
@@ -10238,7 +10238,7 @@
               <a:t>K=140 </a:t>
             </a:r>
             <a:r>
-              <a:rPr lang="zh-CN" altLang="en-US" sz="1050">
+              <a:rPr lang="zh-CN" altLang="en-US" sz="1250">
                 <a:solidFill>
                   <a:srgbClr val="7F8C8D"/>
                 </a:solidFill>
@@ -10248,7 +10248,7 @@
               <a:t>对应本项目 </a:t>
             </a:r>
             <a:r>
-              <a:rPr lang="en-US" altLang="zh-CN" sz="1050">
+              <a:rPr lang="en-US" altLang="zh-CN" sz="1250">
                 <a:solidFill>
                   <a:srgbClr val="7F8C8D"/>
                 </a:solidFill>
@@ -10258,7 +10258,7 @@
               <a:t>2% </a:t>
             </a:r>
             <a:r>
-              <a:rPr lang="zh-CN" altLang="en-US" sz="1050">
+              <a:rPr lang="zh-CN" altLang="en-US" sz="1250">
                 <a:solidFill>
                   <a:srgbClr val="7F8C8D"/>
                 </a:solidFill>
@@ -10275,7 +10275,7 @@
           <p:cNvPr id="5" name="矩形 4">
             <a:extLst>
               <a:ext uri="{FF2B5EF4-FFF2-40B4-BE49-F238E27FC236}">
-                <a16:creationId xmlns:a16="http://schemas.microsoft.com/office/drawing/2014/main" id="{7DDA1E72-0D7E-9A83-9AED-5F9DA912D587}"/>
+                <a16:creationId xmlns:a16="http://schemas.microsoft.com/office/drawing/2014/main" id="{BBD7A2BC-669D-A45C-7F97-94E190A0640F}"/>
               </a:ext>
             </a:extLst>
           </p:cNvPr>
@@ -10329,7 +10329,7 @@
           <p:cNvPr id="6" name="文本框 5">
             <a:extLst>
               <a:ext uri="{FF2B5EF4-FFF2-40B4-BE49-F238E27FC236}">
-                <a16:creationId xmlns:a16="http://schemas.microsoft.com/office/drawing/2014/main" id="{D66E7553-A6F1-135A-8158-5921EB14B451}"/>
+                <a16:creationId xmlns:a16="http://schemas.microsoft.com/office/drawing/2014/main" id="{98F9286C-F625-B582-F0A8-CA8A434D92CA}"/>
               </a:ext>
             </a:extLst>
           </p:cNvPr>
@@ -10382,7 +10382,7 @@
           <p:cNvPr id="7" name="矩形 6">
             <a:extLst>
               <a:ext uri="{FF2B5EF4-FFF2-40B4-BE49-F238E27FC236}">
-                <a16:creationId xmlns:a16="http://schemas.microsoft.com/office/drawing/2014/main" id="{825F6A2E-F996-9BBA-9C61-51FF5C6F2067}"/>
+                <a16:creationId xmlns:a16="http://schemas.microsoft.com/office/drawing/2014/main" id="{C618B20C-BE96-FDC8-E012-3480FE01CAF7}"/>
               </a:ext>
             </a:extLst>
           </p:cNvPr>
@@ -10436,7 +10436,7 @@
           <p:cNvPr id="8" name="文本框 7">
             <a:extLst>
               <a:ext uri="{FF2B5EF4-FFF2-40B4-BE49-F238E27FC236}">
-                <a16:creationId xmlns:a16="http://schemas.microsoft.com/office/drawing/2014/main" id="{E05EF578-EBCB-65E9-BD31-7431062C627A}"/>
+                <a16:creationId xmlns:a16="http://schemas.microsoft.com/office/drawing/2014/main" id="{CD57B046-F9BD-5929-3D33-3B135E8EFFF1}"/>
               </a:ext>
             </a:extLst>
           </p:cNvPr>
@@ -10482,7 +10482,7 @@
           <p:cNvPr id="9" name="矩形 8">
             <a:extLst>
               <a:ext uri="{FF2B5EF4-FFF2-40B4-BE49-F238E27FC236}">
-                <a16:creationId xmlns:a16="http://schemas.microsoft.com/office/drawing/2014/main" id="{D36DC6B5-9DB0-A889-00DF-C81A224BD92A}"/>
+                <a16:creationId xmlns:a16="http://schemas.microsoft.com/office/drawing/2014/main" id="{0E46880E-A47A-8B96-8354-F786F8357FC2}"/>
               </a:ext>
             </a:extLst>
           </p:cNvPr>
@@ -10536,7 +10536,7 @@
           <p:cNvPr id="10" name="文本框 9">
             <a:extLst>
               <a:ext uri="{FF2B5EF4-FFF2-40B4-BE49-F238E27FC236}">
-                <a16:creationId xmlns:a16="http://schemas.microsoft.com/office/drawing/2014/main" id="{A9E5482E-03F9-76EC-E116-618740A66A02}"/>
+                <a16:creationId xmlns:a16="http://schemas.microsoft.com/office/drawing/2014/main" id="{FD0A3FEA-FA34-E63B-9FDF-F0AB7E17CDE7}"/>
               </a:ext>
             </a:extLst>
           </p:cNvPr>
@@ -10582,7 +10582,7 @@
           <p:cNvPr id="11" name="矩形 10">
             <a:extLst>
               <a:ext uri="{FF2B5EF4-FFF2-40B4-BE49-F238E27FC236}">
-                <a16:creationId xmlns:a16="http://schemas.microsoft.com/office/drawing/2014/main" id="{55E2E6F7-3C85-F348-86C6-7C847B13658A}"/>
+                <a16:creationId xmlns:a16="http://schemas.microsoft.com/office/drawing/2014/main" id="{A415E02E-471C-F6D5-405C-583CA7CF6E26}"/>
               </a:ext>
             </a:extLst>
           </p:cNvPr>
@@ -10636,7 +10636,7 @@
           <p:cNvPr id="12" name="文本框 11">
             <a:extLst>
               <a:ext uri="{FF2B5EF4-FFF2-40B4-BE49-F238E27FC236}">
-                <a16:creationId xmlns:a16="http://schemas.microsoft.com/office/drawing/2014/main" id="{AC29F7F0-668B-06C1-2129-289802E5A804}"/>
+                <a16:creationId xmlns:a16="http://schemas.microsoft.com/office/drawing/2014/main" id="{47D3A536-4B89-3CAC-171D-1F4217ABF4B5}"/>
               </a:ext>
             </a:extLst>
           </p:cNvPr>
@@ -10682,7 +10682,7 @@
           <p:cNvPr id="13" name="矩形 12">
             <a:extLst>
               <a:ext uri="{FF2B5EF4-FFF2-40B4-BE49-F238E27FC236}">
-                <a16:creationId xmlns:a16="http://schemas.microsoft.com/office/drawing/2014/main" id="{4190B0A9-F534-0F49-6BD6-A4FBD6E64C37}"/>
+                <a16:creationId xmlns:a16="http://schemas.microsoft.com/office/drawing/2014/main" id="{41A50531-E227-78DF-B4AE-C5DE497B4B6D}"/>
               </a:ext>
             </a:extLst>
           </p:cNvPr>
@@ -10736,7 +10736,7 @@
           <p:cNvPr id="14" name="文本框 13">
             <a:extLst>
               <a:ext uri="{FF2B5EF4-FFF2-40B4-BE49-F238E27FC236}">
-                <a16:creationId xmlns:a16="http://schemas.microsoft.com/office/drawing/2014/main" id="{53679F91-A6B4-8542-B040-AFD7389B31BA}"/>
+                <a16:creationId xmlns:a16="http://schemas.microsoft.com/office/drawing/2014/main" id="{2AA6A35B-A1A7-7C66-F72A-63BB6E97F0F4}"/>
               </a:ext>
             </a:extLst>
           </p:cNvPr>
@@ -10789,7 +10789,7 @@
           <p:cNvPr id="15" name="矩形 14">
             <a:extLst>
               <a:ext uri="{FF2B5EF4-FFF2-40B4-BE49-F238E27FC236}">
-                <a16:creationId xmlns:a16="http://schemas.microsoft.com/office/drawing/2014/main" id="{DECBF030-AEF3-9E72-DBB9-4EF40FAF48FE}"/>
+                <a16:creationId xmlns:a16="http://schemas.microsoft.com/office/drawing/2014/main" id="{BD078B5D-F014-6A9A-1EE0-6721E14687BB}"/>
               </a:ext>
             </a:extLst>
           </p:cNvPr>
@@ -10843,7 +10843,7 @@
           <p:cNvPr id="16" name="文本框 15">
             <a:extLst>
               <a:ext uri="{FF2B5EF4-FFF2-40B4-BE49-F238E27FC236}">
-                <a16:creationId xmlns:a16="http://schemas.microsoft.com/office/drawing/2014/main" id="{78DDF376-240F-EFCD-1D4C-7C0D780D2BF3}"/>
+                <a16:creationId xmlns:a16="http://schemas.microsoft.com/office/drawing/2014/main" id="{49447512-37B2-FCBD-74A5-EDDEC6E66C3F}"/>
               </a:ext>
             </a:extLst>
           </p:cNvPr>
@@ -10889,7 +10889,7 @@
           <p:cNvPr id="17" name="矩形 16">
             <a:extLst>
               <a:ext uri="{FF2B5EF4-FFF2-40B4-BE49-F238E27FC236}">
-                <a16:creationId xmlns:a16="http://schemas.microsoft.com/office/drawing/2014/main" id="{20A3B63B-5738-B515-6C4E-954D9CC46E58}"/>
+                <a16:creationId xmlns:a16="http://schemas.microsoft.com/office/drawing/2014/main" id="{F37165EF-4C24-700F-18E3-391539260754}"/>
               </a:ext>
             </a:extLst>
           </p:cNvPr>
@@ -10943,7 +10943,7 @@
           <p:cNvPr id="18" name="文本框 17">
             <a:extLst>
               <a:ext uri="{FF2B5EF4-FFF2-40B4-BE49-F238E27FC236}">
-                <a16:creationId xmlns:a16="http://schemas.microsoft.com/office/drawing/2014/main" id="{0D57E7D5-6182-D246-04A5-D10C2BD39A5E}"/>
+                <a16:creationId xmlns:a16="http://schemas.microsoft.com/office/drawing/2014/main" id="{F93815BD-4A7E-9F61-BA41-EB97F48B1D2D}"/>
               </a:ext>
             </a:extLst>
           </p:cNvPr>
@@ -10996,7 +10996,7 @@
           <p:cNvPr id="19" name="矩形 18">
             <a:extLst>
               <a:ext uri="{FF2B5EF4-FFF2-40B4-BE49-F238E27FC236}">
-                <a16:creationId xmlns:a16="http://schemas.microsoft.com/office/drawing/2014/main" id="{AB3559D7-6830-D1E7-6667-832D448BE808}"/>
+                <a16:creationId xmlns:a16="http://schemas.microsoft.com/office/drawing/2014/main" id="{26DF6349-686E-F937-88F8-3602897E52B7}"/>
               </a:ext>
             </a:extLst>
           </p:cNvPr>
@@ -11050,7 +11050,7 @@
           <p:cNvPr id="20" name="文本框 19">
             <a:extLst>
               <a:ext uri="{FF2B5EF4-FFF2-40B4-BE49-F238E27FC236}">
-                <a16:creationId xmlns:a16="http://schemas.microsoft.com/office/drawing/2014/main" id="{0103EA8D-C555-2E3E-6899-01425F33A422}"/>
+                <a16:creationId xmlns:a16="http://schemas.microsoft.com/office/drawing/2014/main" id="{4D9C7DC5-E2E6-249D-7B5C-AB0BAD19397A}"/>
               </a:ext>
             </a:extLst>
           </p:cNvPr>
@@ -11103,7 +11103,7 @@
           <p:cNvPr id="21" name="矩形 20">
             <a:extLst>
               <a:ext uri="{FF2B5EF4-FFF2-40B4-BE49-F238E27FC236}">
-                <a16:creationId xmlns:a16="http://schemas.microsoft.com/office/drawing/2014/main" id="{962ED9E3-7562-E18C-7F22-627C2F27203E}"/>
+                <a16:creationId xmlns:a16="http://schemas.microsoft.com/office/drawing/2014/main" id="{1823CA3F-1A77-0996-5FA3-5AAB0BBF65DE}"/>
               </a:ext>
             </a:extLst>
           </p:cNvPr>
@@ -11157,7 +11157,7 @@
           <p:cNvPr id="22" name="文本框 21">
             <a:extLst>
               <a:ext uri="{FF2B5EF4-FFF2-40B4-BE49-F238E27FC236}">
-                <a16:creationId xmlns:a16="http://schemas.microsoft.com/office/drawing/2014/main" id="{206575B6-4D53-D646-ECC6-82FAA033DF09}"/>
+                <a16:creationId xmlns:a16="http://schemas.microsoft.com/office/drawing/2014/main" id="{629CA72E-1A09-1D2F-90D6-5D7A2A304FEF}"/>
               </a:ext>
             </a:extLst>
           </p:cNvPr>
@@ -11210,7 +11210,7 @@
           <p:cNvPr id="23" name="矩形 22">
             <a:extLst>
               <a:ext uri="{FF2B5EF4-FFF2-40B4-BE49-F238E27FC236}">
-                <a16:creationId xmlns:a16="http://schemas.microsoft.com/office/drawing/2014/main" id="{5F979F96-7600-0483-2215-AC96A9934508}"/>
+                <a16:creationId xmlns:a16="http://schemas.microsoft.com/office/drawing/2014/main" id="{F50EB066-348E-1CF0-C3FA-EF6CA3C62B21}"/>
               </a:ext>
             </a:extLst>
           </p:cNvPr>
@@ -11264,7 +11264,7 @@
           <p:cNvPr id="24" name="文本框 23">
             <a:extLst>
               <a:ext uri="{FF2B5EF4-FFF2-40B4-BE49-F238E27FC236}">
-                <a16:creationId xmlns:a16="http://schemas.microsoft.com/office/drawing/2014/main" id="{7921A38E-BCB1-F853-F37D-A55919887855}"/>
+                <a16:creationId xmlns:a16="http://schemas.microsoft.com/office/drawing/2014/main" id="{21E4C2F4-500F-12AD-7092-A388D2534906}"/>
               </a:ext>
             </a:extLst>
           </p:cNvPr>
@@ -11317,7 +11317,7 @@
           <p:cNvPr id="25" name="矩形 24">
             <a:extLst>
               <a:ext uri="{FF2B5EF4-FFF2-40B4-BE49-F238E27FC236}">
-                <a16:creationId xmlns:a16="http://schemas.microsoft.com/office/drawing/2014/main" id="{6DB0CD45-86C3-4E4C-D219-0AA8BD5AAAF6}"/>
+                <a16:creationId xmlns:a16="http://schemas.microsoft.com/office/drawing/2014/main" id="{252E975C-2EE3-7F86-8C82-1B7F8075F3E5}"/>
               </a:ext>
             </a:extLst>
           </p:cNvPr>
@@ -11371,7 +11371,7 @@
           <p:cNvPr id="26" name="文本框 25">
             <a:extLst>
               <a:ext uri="{FF2B5EF4-FFF2-40B4-BE49-F238E27FC236}">
-                <a16:creationId xmlns:a16="http://schemas.microsoft.com/office/drawing/2014/main" id="{05471620-721A-2EEE-6389-D23369D54DA1}"/>
+                <a16:creationId xmlns:a16="http://schemas.microsoft.com/office/drawing/2014/main" id="{AE7B2D6E-C4FD-CD20-92D0-2D786AAFF859}"/>
               </a:ext>
             </a:extLst>
           </p:cNvPr>
@@ -11424,7 +11424,7 @@
           <p:cNvPr id="27" name="矩形 26">
             <a:extLst>
               <a:ext uri="{FF2B5EF4-FFF2-40B4-BE49-F238E27FC236}">
-                <a16:creationId xmlns:a16="http://schemas.microsoft.com/office/drawing/2014/main" id="{958A0D39-3739-7177-1245-3438798B2D6D}"/>
+                <a16:creationId xmlns:a16="http://schemas.microsoft.com/office/drawing/2014/main" id="{7B4A2E89-6AFF-4024-1900-850413264305}"/>
               </a:ext>
             </a:extLst>
           </p:cNvPr>
@@ -11478,7 +11478,7 @@
           <p:cNvPr id="28" name="文本框 27">
             <a:extLst>
               <a:ext uri="{FF2B5EF4-FFF2-40B4-BE49-F238E27FC236}">
-                <a16:creationId xmlns:a16="http://schemas.microsoft.com/office/drawing/2014/main" id="{76F3E13C-EDF9-FE32-EF20-D6D4AE036F0C}"/>
+                <a16:creationId xmlns:a16="http://schemas.microsoft.com/office/drawing/2014/main" id="{222A7355-3C9F-FE94-73DE-D3137993053F}"/>
               </a:ext>
             </a:extLst>
           </p:cNvPr>
@@ -11524,7 +11524,7 @@
           <p:cNvPr id="29" name="矩形 28">
             <a:extLst>
               <a:ext uri="{FF2B5EF4-FFF2-40B4-BE49-F238E27FC236}">
-                <a16:creationId xmlns:a16="http://schemas.microsoft.com/office/drawing/2014/main" id="{B809CBA4-712A-27A1-3CA2-53B06B831F12}"/>
+                <a16:creationId xmlns:a16="http://schemas.microsoft.com/office/drawing/2014/main" id="{4F28A072-EA33-3CE3-B2DE-078A9850736E}"/>
               </a:ext>
             </a:extLst>
           </p:cNvPr>
@@ -11578,7 +11578,7 @@
           <p:cNvPr id="30" name="文本框 29">
             <a:extLst>
               <a:ext uri="{FF2B5EF4-FFF2-40B4-BE49-F238E27FC236}">
-                <a16:creationId xmlns:a16="http://schemas.microsoft.com/office/drawing/2014/main" id="{328FF3CC-8C19-A8B1-38F0-900410F40311}"/>
+                <a16:creationId xmlns:a16="http://schemas.microsoft.com/office/drawing/2014/main" id="{4D1C894B-69BB-66EB-D94C-D1D25021AE13}"/>
               </a:ext>
             </a:extLst>
           </p:cNvPr>
@@ -11631,7 +11631,7 @@
           <p:cNvPr id="31" name="矩形 30">
             <a:extLst>
               <a:ext uri="{FF2B5EF4-FFF2-40B4-BE49-F238E27FC236}">
-                <a16:creationId xmlns:a16="http://schemas.microsoft.com/office/drawing/2014/main" id="{ACBC7D8F-129A-BBCB-E975-B14F0B6432DB}"/>
+                <a16:creationId xmlns:a16="http://schemas.microsoft.com/office/drawing/2014/main" id="{9CF0C5FD-12E3-63A3-1E37-70D05BEF460B}"/>
               </a:ext>
             </a:extLst>
           </p:cNvPr>
@@ -11685,7 +11685,7 @@
           <p:cNvPr id="32" name="文本框 31">
             <a:extLst>
               <a:ext uri="{FF2B5EF4-FFF2-40B4-BE49-F238E27FC236}">
-                <a16:creationId xmlns:a16="http://schemas.microsoft.com/office/drawing/2014/main" id="{785FD05C-8B62-9F04-B16A-7501E3F5D305}"/>
+                <a16:creationId xmlns:a16="http://schemas.microsoft.com/office/drawing/2014/main" id="{A2D330C5-4F38-4043-ECAC-7DD92FEEC59A}"/>
               </a:ext>
             </a:extLst>
           </p:cNvPr>
@@ -11738,7 +11738,7 @@
           <p:cNvPr id="33" name="矩形 32">
             <a:extLst>
               <a:ext uri="{FF2B5EF4-FFF2-40B4-BE49-F238E27FC236}">
-                <a16:creationId xmlns:a16="http://schemas.microsoft.com/office/drawing/2014/main" id="{F9236891-6356-881D-4555-3D3E60049CAE}"/>
+                <a16:creationId xmlns:a16="http://schemas.microsoft.com/office/drawing/2014/main" id="{73102753-4A2C-1CCB-1B14-C1D747FA8E8E}"/>
               </a:ext>
             </a:extLst>
           </p:cNvPr>
@@ -11792,7 +11792,7 @@
           <p:cNvPr id="34" name="文本框 33">
             <a:extLst>
               <a:ext uri="{FF2B5EF4-FFF2-40B4-BE49-F238E27FC236}">
-                <a16:creationId xmlns:a16="http://schemas.microsoft.com/office/drawing/2014/main" id="{66D93974-A259-EB2B-A7D2-A48C5657CFF2}"/>
+                <a16:creationId xmlns:a16="http://schemas.microsoft.com/office/drawing/2014/main" id="{46BD71AD-D2CF-F135-BD25-9292ADFDA9ED}"/>
               </a:ext>
             </a:extLst>
           </p:cNvPr>
@@ -11845,7 +11845,7 @@
           <p:cNvPr id="35" name="矩形 34">
             <a:extLst>
               <a:ext uri="{FF2B5EF4-FFF2-40B4-BE49-F238E27FC236}">
-                <a16:creationId xmlns:a16="http://schemas.microsoft.com/office/drawing/2014/main" id="{367333E9-7F36-1893-7288-6EF04666A00F}"/>
+                <a16:creationId xmlns:a16="http://schemas.microsoft.com/office/drawing/2014/main" id="{FA2FA521-1BB1-AAD4-7A83-140E88148AF8}"/>
               </a:ext>
             </a:extLst>
           </p:cNvPr>
@@ -11899,7 +11899,7 @@
           <p:cNvPr id="36" name="文本框 35">
             <a:extLst>
               <a:ext uri="{FF2B5EF4-FFF2-40B4-BE49-F238E27FC236}">
-                <a16:creationId xmlns:a16="http://schemas.microsoft.com/office/drawing/2014/main" id="{214D1860-0A9E-EA74-AB55-5DC6E3AD38AB}"/>
+                <a16:creationId xmlns:a16="http://schemas.microsoft.com/office/drawing/2014/main" id="{ACD53437-67CD-C370-7E92-88BCDF85D87E}"/>
               </a:ext>
             </a:extLst>
           </p:cNvPr>
@@ -11952,7 +11952,7 @@
           <p:cNvPr id="37" name="矩形 36">
             <a:extLst>
               <a:ext uri="{FF2B5EF4-FFF2-40B4-BE49-F238E27FC236}">
-                <a16:creationId xmlns:a16="http://schemas.microsoft.com/office/drawing/2014/main" id="{015D9F06-1B9F-3302-D71D-39B7C88E9312}"/>
+                <a16:creationId xmlns:a16="http://schemas.microsoft.com/office/drawing/2014/main" id="{2B291B90-44A8-44EA-DFBE-F64254D447C3}"/>
               </a:ext>
             </a:extLst>
           </p:cNvPr>
@@ -12006,7 +12006,7 @@
           <p:cNvPr id="38" name="文本框 37">
             <a:extLst>
               <a:ext uri="{FF2B5EF4-FFF2-40B4-BE49-F238E27FC236}">
-                <a16:creationId xmlns:a16="http://schemas.microsoft.com/office/drawing/2014/main" id="{CDD11318-05AB-364D-2801-5B09EA5A1F42}"/>
+                <a16:creationId xmlns:a16="http://schemas.microsoft.com/office/drawing/2014/main" id="{B09EE703-A3EE-3C17-C9B3-E426D27DDFF5}"/>
               </a:ext>
             </a:extLst>
           </p:cNvPr>
@@ -12059,7 +12059,7 @@
           <p:cNvPr id="39" name="矩形 38">
             <a:extLst>
               <a:ext uri="{FF2B5EF4-FFF2-40B4-BE49-F238E27FC236}">
-                <a16:creationId xmlns:a16="http://schemas.microsoft.com/office/drawing/2014/main" id="{13D03FE5-F5A8-2CC6-9159-5FFC65CEEF88}"/>
+                <a16:creationId xmlns:a16="http://schemas.microsoft.com/office/drawing/2014/main" id="{6C1536B4-A27E-920A-8B3F-AC5A56128879}"/>
               </a:ext>
             </a:extLst>
           </p:cNvPr>
@@ -12113,7 +12113,7 @@
           <p:cNvPr id="40" name="文本框 39">
             <a:extLst>
               <a:ext uri="{FF2B5EF4-FFF2-40B4-BE49-F238E27FC236}">
-                <a16:creationId xmlns:a16="http://schemas.microsoft.com/office/drawing/2014/main" id="{6F8BAADA-2238-F9C1-BD3B-82B4309FC9C6}"/>
+                <a16:creationId xmlns:a16="http://schemas.microsoft.com/office/drawing/2014/main" id="{A5A8F2A0-CAFB-82C4-000C-135D7C800B67}"/>
               </a:ext>
             </a:extLst>
           </p:cNvPr>
@@ -12189,7 +12189,7 @@
           <p:cNvPr id="41" name="矩形 40">
             <a:extLst>
               <a:ext uri="{FF2B5EF4-FFF2-40B4-BE49-F238E27FC236}">
-                <a16:creationId xmlns:a16="http://schemas.microsoft.com/office/drawing/2014/main" id="{AE2406F1-779A-5F63-1C22-065A75463792}"/>
+                <a16:creationId xmlns:a16="http://schemas.microsoft.com/office/drawing/2014/main" id="{F6154D9F-FAD3-FF37-4858-EE783F0CBEB5}"/>
               </a:ext>
             </a:extLst>
           </p:cNvPr>
@@ -12243,7 +12243,7 @@
           <p:cNvPr id="42" name="文本框 41">
             <a:extLst>
               <a:ext uri="{FF2B5EF4-FFF2-40B4-BE49-F238E27FC236}">
-                <a16:creationId xmlns:a16="http://schemas.microsoft.com/office/drawing/2014/main" id="{6A50C86E-487D-A67F-C762-902B542BBC1C}"/>
+                <a16:creationId xmlns:a16="http://schemas.microsoft.com/office/drawing/2014/main" id="{67E484F6-E705-E0F5-8278-7913163488C6}"/>
               </a:ext>
             </a:extLst>
           </p:cNvPr>
@@ -12296,7 +12296,7 @@
           <p:cNvPr id="43" name="矩形 42">
             <a:extLst>
               <a:ext uri="{FF2B5EF4-FFF2-40B4-BE49-F238E27FC236}">
-                <a16:creationId xmlns:a16="http://schemas.microsoft.com/office/drawing/2014/main" id="{E953220F-3864-9163-D215-6DAFAE8FC811}"/>
+                <a16:creationId xmlns:a16="http://schemas.microsoft.com/office/drawing/2014/main" id="{8B08EE31-5970-F5D9-A6A6-B980A52D66C9}"/>
               </a:ext>
             </a:extLst>
           </p:cNvPr>
@@ -12350,7 +12350,7 @@
           <p:cNvPr id="44" name="文本框 43">
             <a:extLst>
               <a:ext uri="{FF2B5EF4-FFF2-40B4-BE49-F238E27FC236}">
-                <a16:creationId xmlns:a16="http://schemas.microsoft.com/office/drawing/2014/main" id="{3D0B9576-4E52-2396-87EA-D0E25C8E8F8F}"/>
+                <a16:creationId xmlns:a16="http://schemas.microsoft.com/office/drawing/2014/main" id="{B4CD1F1E-EE9C-F045-93D3-A2A00E23869F}"/>
               </a:ext>
             </a:extLst>
           </p:cNvPr>
@@ -12403,7 +12403,7 @@
           <p:cNvPr id="45" name="矩形 44">
             <a:extLst>
               <a:ext uri="{FF2B5EF4-FFF2-40B4-BE49-F238E27FC236}">
-                <a16:creationId xmlns:a16="http://schemas.microsoft.com/office/drawing/2014/main" id="{5152B9A1-E183-2C32-9B64-DFBD10AC7E8C}"/>
+                <a16:creationId xmlns:a16="http://schemas.microsoft.com/office/drawing/2014/main" id="{E3114E25-26B9-39CA-D5A2-7972D8B73401}"/>
               </a:ext>
             </a:extLst>
           </p:cNvPr>
@@ -12457,7 +12457,7 @@
           <p:cNvPr id="46" name="文本框 45">
             <a:extLst>
               <a:ext uri="{FF2B5EF4-FFF2-40B4-BE49-F238E27FC236}">
-                <a16:creationId xmlns:a16="http://schemas.microsoft.com/office/drawing/2014/main" id="{B671EAFF-BE99-FE00-D8B6-B8DDB424E79B}"/>
+                <a16:creationId xmlns:a16="http://schemas.microsoft.com/office/drawing/2014/main" id="{BF64BE73-72C8-F095-5E44-A34B1A9F6C9F}"/>
               </a:ext>
             </a:extLst>
           </p:cNvPr>
@@ -12510,7 +12510,7 @@
           <p:cNvPr id="47" name="矩形 46">
             <a:extLst>
               <a:ext uri="{FF2B5EF4-FFF2-40B4-BE49-F238E27FC236}">
-                <a16:creationId xmlns:a16="http://schemas.microsoft.com/office/drawing/2014/main" id="{26C63582-B03B-45C8-6DD4-12A815C75452}"/>
+                <a16:creationId xmlns:a16="http://schemas.microsoft.com/office/drawing/2014/main" id="{E7927866-AA02-86F7-832E-0D82646D010C}"/>
               </a:ext>
             </a:extLst>
           </p:cNvPr>
@@ -12564,7 +12564,7 @@
           <p:cNvPr id="48" name="文本框 47">
             <a:extLst>
               <a:ext uri="{FF2B5EF4-FFF2-40B4-BE49-F238E27FC236}">
-                <a16:creationId xmlns:a16="http://schemas.microsoft.com/office/drawing/2014/main" id="{70C3E636-1F37-39D3-3039-AE4465EE2007}"/>
+                <a16:creationId xmlns:a16="http://schemas.microsoft.com/office/drawing/2014/main" id="{D5F8C421-D58C-3BA6-4C30-41E658DCE785}"/>
               </a:ext>
             </a:extLst>
           </p:cNvPr>
@@ -12617,7 +12617,7 @@
           <p:cNvPr id="49" name="矩形 48">
             <a:extLst>
               <a:ext uri="{FF2B5EF4-FFF2-40B4-BE49-F238E27FC236}">
-                <a16:creationId xmlns:a16="http://schemas.microsoft.com/office/drawing/2014/main" id="{343C47D0-3BD3-1FF1-E568-B8EDF0AE9443}"/>
+                <a16:creationId xmlns:a16="http://schemas.microsoft.com/office/drawing/2014/main" id="{4735202B-81F1-6EE8-55E6-FB82C5629BEA}"/>
               </a:ext>
             </a:extLst>
           </p:cNvPr>
@@ -12671,7 +12671,7 @@
           <p:cNvPr id="50" name="文本框 49">
             <a:extLst>
               <a:ext uri="{FF2B5EF4-FFF2-40B4-BE49-F238E27FC236}">
-                <a16:creationId xmlns:a16="http://schemas.microsoft.com/office/drawing/2014/main" id="{0019E81C-7C19-F8D5-267F-67CF3DC13519}"/>
+                <a16:creationId xmlns:a16="http://schemas.microsoft.com/office/drawing/2014/main" id="{BD8A945F-9A85-591D-3A87-E51EF928CDC1}"/>
               </a:ext>
             </a:extLst>
           </p:cNvPr>
@@ -12724,7 +12724,7 @@
           <p:cNvPr id="51" name="矩形 50">
             <a:extLst>
               <a:ext uri="{FF2B5EF4-FFF2-40B4-BE49-F238E27FC236}">
-                <a16:creationId xmlns:a16="http://schemas.microsoft.com/office/drawing/2014/main" id="{9EF78224-4B6F-8810-FC8F-27134E996C4B}"/>
+                <a16:creationId xmlns:a16="http://schemas.microsoft.com/office/drawing/2014/main" id="{FA9D0ABC-80D2-3599-1CB6-19A77FAF2AF2}"/>
               </a:ext>
             </a:extLst>
           </p:cNvPr>
@@ -12778,7 +12778,7 @@
           <p:cNvPr id="52" name="文本框 51">
             <a:extLst>
               <a:ext uri="{FF2B5EF4-FFF2-40B4-BE49-F238E27FC236}">
-                <a16:creationId xmlns:a16="http://schemas.microsoft.com/office/drawing/2014/main" id="{70ECBDB6-7CB3-282E-CCED-3BB9205FED6D}"/>
+                <a16:creationId xmlns:a16="http://schemas.microsoft.com/office/drawing/2014/main" id="{880F264B-3936-5F97-E1D0-A7327D3D316E}"/>
               </a:ext>
             </a:extLst>
           </p:cNvPr>
@@ -12844,7 +12844,7 @@
           <p:cNvPr id="53" name="矩形 52">
             <a:extLst>
               <a:ext uri="{FF2B5EF4-FFF2-40B4-BE49-F238E27FC236}">
-                <a16:creationId xmlns:a16="http://schemas.microsoft.com/office/drawing/2014/main" id="{CB43CA69-ADF2-C927-B093-BC863BD8C930}"/>
+                <a16:creationId xmlns:a16="http://schemas.microsoft.com/office/drawing/2014/main" id="{BF6A486A-7F41-19E3-D9F5-4C4BC3811D0E}"/>
               </a:ext>
             </a:extLst>
           </p:cNvPr>
@@ -12898,7 +12898,7 @@
           <p:cNvPr id="54" name="文本框 53">
             <a:extLst>
               <a:ext uri="{FF2B5EF4-FFF2-40B4-BE49-F238E27FC236}">
-                <a16:creationId xmlns:a16="http://schemas.microsoft.com/office/drawing/2014/main" id="{279E5994-3208-C513-DF0C-9DBF064AA765}"/>
+                <a16:creationId xmlns:a16="http://schemas.microsoft.com/office/drawing/2014/main" id="{E5A3AEE0-4AB2-77E0-C164-002AD40E7865}"/>
               </a:ext>
             </a:extLst>
           </p:cNvPr>
@@ -12951,7 +12951,7 @@
           <p:cNvPr id="55" name="矩形 54">
             <a:extLst>
               <a:ext uri="{FF2B5EF4-FFF2-40B4-BE49-F238E27FC236}">
-                <a16:creationId xmlns:a16="http://schemas.microsoft.com/office/drawing/2014/main" id="{8C3465ED-263D-43E2-6702-5DD151292A02}"/>
+                <a16:creationId xmlns:a16="http://schemas.microsoft.com/office/drawing/2014/main" id="{19D65652-5C2F-619A-BAE2-0DBDD583ED00}"/>
               </a:ext>
             </a:extLst>
           </p:cNvPr>
@@ -13005,7 +13005,7 @@
           <p:cNvPr id="56" name="文本框 55">
             <a:extLst>
               <a:ext uri="{FF2B5EF4-FFF2-40B4-BE49-F238E27FC236}">
-                <a16:creationId xmlns:a16="http://schemas.microsoft.com/office/drawing/2014/main" id="{D7AA6C21-8BCF-D07E-640E-56C993C933C2}"/>
+                <a16:creationId xmlns:a16="http://schemas.microsoft.com/office/drawing/2014/main" id="{63413C33-801B-0B22-F2A6-43F76D0617E0}"/>
               </a:ext>
             </a:extLst>
           </p:cNvPr>
@@ -13058,7 +13058,7 @@
           <p:cNvPr id="57" name="矩形 56">
             <a:extLst>
               <a:ext uri="{FF2B5EF4-FFF2-40B4-BE49-F238E27FC236}">
-                <a16:creationId xmlns:a16="http://schemas.microsoft.com/office/drawing/2014/main" id="{14C67A8B-3AA8-D7C3-94BA-2636A94B3E98}"/>
+                <a16:creationId xmlns:a16="http://schemas.microsoft.com/office/drawing/2014/main" id="{6F28F02E-AC7A-6E91-8B7F-2D00443685B1}"/>
               </a:ext>
             </a:extLst>
           </p:cNvPr>
@@ -13112,7 +13112,7 @@
           <p:cNvPr id="58" name="文本框 57">
             <a:extLst>
               <a:ext uri="{FF2B5EF4-FFF2-40B4-BE49-F238E27FC236}">
-                <a16:creationId xmlns:a16="http://schemas.microsoft.com/office/drawing/2014/main" id="{EC3AD696-96A4-D116-A911-D30441E53080}"/>
+                <a16:creationId xmlns:a16="http://schemas.microsoft.com/office/drawing/2014/main" id="{93DD5A9B-D02F-16CF-A561-4F12265099B6}"/>
               </a:ext>
             </a:extLst>
           </p:cNvPr>
@@ -13165,7 +13165,7 @@
           <p:cNvPr id="59" name="矩形 58">
             <a:extLst>
               <a:ext uri="{FF2B5EF4-FFF2-40B4-BE49-F238E27FC236}">
-                <a16:creationId xmlns:a16="http://schemas.microsoft.com/office/drawing/2014/main" id="{E7D63918-3712-4213-1C94-CBF1C666D3A7}"/>
+                <a16:creationId xmlns:a16="http://schemas.microsoft.com/office/drawing/2014/main" id="{25C0548C-D8C0-291C-48DF-A75D5BE6CE27}"/>
               </a:ext>
             </a:extLst>
           </p:cNvPr>
@@ -13219,7 +13219,7 @@
           <p:cNvPr id="60" name="文本框 59">
             <a:extLst>
               <a:ext uri="{FF2B5EF4-FFF2-40B4-BE49-F238E27FC236}">
-                <a16:creationId xmlns:a16="http://schemas.microsoft.com/office/drawing/2014/main" id="{8D2A78B7-70E3-F673-BE88-BB6C1125525C}"/>
+                <a16:creationId xmlns:a16="http://schemas.microsoft.com/office/drawing/2014/main" id="{879AB727-7425-79C4-CDEA-79986E805E99}"/>
               </a:ext>
             </a:extLst>
           </p:cNvPr>
@@ -13272,7 +13272,7 @@
           <p:cNvPr id="61" name="矩形 60">
             <a:extLst>
               <a:ext uri="{FF2B5EF4-FFF2-40B4-BE49-F238E27FC236}">
-                <a16:creationId xmlns:a16="http://schemas.microsoft.com/office/drawing/2014/main" id="{4049D194-EF30-ED96-F7A8-7A7C94EDCE1C}"/>
+                <a16:creationId xmlns:a16="http://schemas.microsoft.com/office/drawing/2014/main" id="{BB2B6664-F8AE-FA93-5082-E4C348F93568}"/>
               </a:ext>
             </a:extLst>
           </p:cNvPr>
@@ -13326,7 +13326,7 @@
           <p:cNvPr id="62" name="文本框 61">
             <a:extLst>
               <a:ext uri="{FF2B5EF4-FFF2-40B4-BE49-F238E27FC236}">
-                <a16:creationId xmlns:a16="http://schemas.microsoft.com/office/drawing/2014/main" id="{4A6CE03C-9685-3C80-6C7F-A6B2353B2934}"/>
+                <a16:creationId xmlns:a16="http://schemas.microsoft.com/office/drawing/2014/main" id="{AC43FB53-6C8A-DA94-C9FB-98795CDCE147}"/>
               </a:ext>
             </a:extLst>
           </p:cNvPr>
@@ -13379,7 +13379,7 @@
           <p:cNvPr id="63" name="矩形 62">
             <a:extLst>
               <a:ext uri="{FF2B5EF4-FFF2-40B4-BE49-F238E27FC236}">
-                <a16:creationId xmlns:a16="http://schemas.microsoft.com/office/drawing/2014/main" id="{B56BC6F2-0310-53B0-4E6D-E5732569A59B}"/>
+                <a16:creationId xmlns:a16="http://schemas.microsoft.com/office/drawing/2014/main" id="{BAAECD21-9180-CD29-AABF-A333F28D2A66}"/>
               </a:ext>
             </a:extLst>
           </p:cNvPr>
@@ -13433,7 +13433,7 @@
           <p:cNvPr id="64" name="文本框 63">
             <a:extLst>
               <a:ext uri="{FF2B5EF4-FFF2-40B4-BE49-F238E27FC236}">
-                <a16:creationId xmlns:a16="http://schemas.microsoft.com/office/drawing/2014/main" id="{63888464-647F-984A-032B-F77B1F89B987}"/>
+                <a16:creationId xmlns:a16="http://schemas.microsoft.com/office/drawing/2014/main" id="{A9E29B10-A340-9762-FF04-0FBE05D8DB2E}"/>
               </a:ext>
             </a:extLst>
           </p:cNvPr>
@@ -13509,7 +13509,7 @@
           <p:cNvPr id="65" name="矩形 64">
             <a:extLst>
               <a:ext uri="{FF2B5EF4-FFF2-40B4-BE49-F238E27FC236}">
-                <a16:creationId xmlns:a16="http://schemas.microsoft.com/office/drawing/2014/main" id="{1F3C2B53-8737-3014-EA35-AB68D8A35F02}"/>
+                <a16:creationId xmlns:a16="http://schemas.microsoft.com/office/drawing/2014/main" id="{4EE25E43-63C8-9EED-6950-EBE6FF43391B}"/>
               </a:ext>
             </a:extLst>
           </p:cNvPr>
@@ -13563,7 +13563,7 @@
           <p:cNvPr id="66" name="文本框 65">
             <a:extLst>
               <a:ext uri="{FF2B5EF4-FFF2-40B4-BE49-F238E27FC236}">
-                <a16:creationId xmlns:a16="http://schemas.microsoft.com/office/drawing/2014/main" id="{0F0A038F-4646-2E80-32A8-55EC4820637E}"/>
+                <a16:creationId xmlns:a16="http://schemas.microsoft.com/office/drawing/2014/main" id="{D33DC616-2006-0648-3A2C-0BD89D5DC9B5}"/>
               </a:ext>
             </a:extLst>
           </p:cNvPr>
@@ -13616,7 +13616,7 @@
           <p:cNvPr id="67" name="矩形 66">
             <a:extLst>
               <a:ext uri="{FF2B5EF4-FFF2-40B4-BE49-F238E27FC236}">
-                <a16:creationId xmlns:a16="http://schemas.microsoft.com/office/drawing/2014/main" id="{1AEA8F10-6518-8138-025D-6B9E30523613}"/>
+                <a16:creationId xmlns:a16="http://schemas.microsoft.com/office/drawing/2014/main" id="{F926F39A-371C-3780-25B9-F62DDC0E51D5}"/>
               </a:ext>
             </a:extLst>
           </p:cNvPr>
@@ -13670,7 +13670,7 @@
           <p:cNvPr id="68" name="文本框 67">
             <a:extLst>
               <a:ext uri="{FF2B5EF4-FFF2-40B4-BE49-F238E27FC236}">
-                <a16:creationId xmlns:a16="http://schemas.microsoft.com/office/drawing/2014/main" id="{2F9F6F6F-2F59-C192-5D1B-6DF209ED6DE7}"/>
+                <a16:creationId xmlns:a16="http://schemas.microsoft.com/office/drawing/2014/main" id="{A0418B2A-79A9-15F9-7FB1-0724786E9331}"/>
               </a:ext>
             </a:extLst>
           </p:cNvPr>
@@ -13723,7 +13723,7 @@
           <p:cNvPr id="69" name="矩形 68">
             <a:extLst>
               <a:ext uri="{FF2B5EF4-FFF2-40B4-BE49-F238E27FC236}">
-                <a16:creationId xmlns:a16="http://schemas.microsoft.com/office/drawing/2014/main" id="{98277C49-582C-B365-1FDE-8858F679EBB7}"/>
+                <a16:creationId xmlns:a16="http://schemas.microsoft.com/office/drawing/2014/main" id="{CC94F5B4-4690-1898-1FED-17A3965276A6}"/>
               </a:ext>
             </a:extLst>
           </p:cNvPr>
@@ -13777,7 +13777,7 @@
           <p:cNvPr id="70" name="文本框 69">
             <a:extLst>
               <a:ext uri="{FF2B5EF4-FFF2-40B4-BE49-F238E27FC236}">
-                <a16:creationId xmlns:a16="http://schemas.microsoft.com/office/drawing/2014/main" id="{012E11E2-929E-8FDD-045D-F7C7B23004F9}"/>
+                <a16:creationId xmlns:a16="http://schemas.microsoft.com/office/drawing/2014/main" id="{D58C5D8D-58C6-4F3F-CCD4-C9687A39C0A7}"/>
               </a:ext>
             </a:extLst>
           </p:cNvPr>
@@ -13830,7 +13830,7 @@
           <p:cNvPr id="71" name="矩形 70">
             <a:extLst>
               <a:ext uri="{FF2B5EF4-FFF2-40B4-BE49-F238E27FC236}">
-                <a16:creationId xmlns:a16="http://schemas.microsoft.com/office/drawing/2014/main" id="{1088EA0C-F679-5FCF-6CB2-8AAE362BC631}"/>
+                <a16:creationId xmlns:a16="http://schemas.microsoft.com/office/drawing/2014/main" id="{4C292168-F964-DA85-A7C8-F1AD7A2BA08D}"/>
               </a:ext>
             </a:extLst>
           </p:cNvPr>
@@ -13884,7 +13884,7 @@
           <p:cNvPr id="72" name="文本框 71">
             <a:extLst>
               <a:ext uri="{FF2B5EF4-FFF2-40B4-BE49-F238E27FC236}">
-                <a16:creationId xmlns:a16="http://schemas.microsoft.com/office/drawing/2014/main" id="{686099B3-2CEC-E688-8D5C-537F551498AB}"/>
+                <a16:creationId xmlns:a16="http://schemas.microsoft.com/office/drawing/2014/main" id="{E74F7F3E-2B63-533E-C24A-A1CE0303A447}"/>
               </a:ext>
             </a:extLst>
           </p:cNvPr>
@@ -13937,7 +13937,7 @@
           <p:cNvPr id="73" name="矩形 72">
             <a:extLst>
               <a:ext uri="{FF2B5EF4-FFF2-40B4-BE49-F238E27FC236}">
-                <a16:creationId xmlns:a16="http://schemas.microsoft.com/office/drawing/2014/main" id="{3F520730-F22B-05B0-19AD-C7D184C50B84}"/>
+                <a16:creationId xmlns:a16="http://schemas.microsoft.com/office/drawing/2014/main" id="{909FD7A6-49A0-CB95-CAB9-23D80DF9578B}"/>
               </a:ext>
             </a:extLst>
           </p:cNvPr>
@@ -13991,7 +13991,7 @@
           <p:cNvPr id="74" name="文本框 73">
             <a:extLst>
               <a:ext uri="{FF2B5EF4-FFF2-40B4-BE49-F238E27FC236}">
-                <a16:creationId xmlns:a16="http://schemas.microsoft.com/office/drawing/2014/main" id="{660A72E7-967A-EB55-1CA4-06AEB3186465}"/>
+                <a16:creationId xmlns:a16="http://schemas.microsoft.com/office/drawing/2014/main" id="{51FDC08B-2434-412F-6A0D-6A021869092C}"/>
               </a:ext>
             </a:extLst>
           </p:cNvPr>
@@ -14044,7 +14044,7 @@
           <p:cNvPr id="75" name="矩形 74">
             <a:extLst>
               <a:ext uri="{FF2B5EF4-FFF2-40B4-BE49-F238E27FC236}">
-                <a16:creationId xmlns:a16="http://schemas.microsoft.com/office/drawing/2014/main" id="{D59693A1-14A4-5BA9-E8EF-AEEF9C8B13C2}"/>
+                <a16:creationId xmlns:a16="http://schemas.microsoft.com/office/drawing/2014/main" id="{9EE1E749-C2D9-5624-205E-7A98CD4B28F5}"/>
               </a:ext>
             </a:extLst>
           </p:cNvPr>
@@ -14098,7 +14098,7 @@
           <p:cNvPr id="76" name="文本框 75">
             <a:extLst>
               <a:ext uri="{FF2B5EF4-FFF2-40B4-BE49-F238E27FC236}">
-                <a16:creationId xmlns:a16="http://schemas.microsoft.com/office/drawing/2014/main" id="{C635BFF1-125D-DD61-3BD2-0C2BA3B5528A}"/>
+                <a16:creationId xmlns:a16="http://schemas.microsoft.com/office/drawing/2014/main" id="{CA27F7AE-D519-23F3-EFAF-D98E88FDBE8D}"/>
               </a:ext>
             </a:extLst>
           </p:cNvPr>
@@ -14144,7 +14144,7 @@
           <p:cNvPr id="77" name="矩形 76">
             <a:extLst>
               <a:ext uri="{FF2B5EF4-FFF2-40B4-BE49-F238E27FC236}">
-                <a16:creationId xmlns:a16="http://schemas.microsoft.com/office/drawing/2014/main" id="{FF594EBA-8CB0-22BF-A1DF-468F29F72FCE}"/>
+                <a16:creationId xmlns:a16="http://schemas.microsoft.com/office/drawing/2014/main" id="{A050B8F2-2EA6-8A90-CCF2-303E37FD076B}"/>
               </a:ext>
             </a:extLst>
           </p:cNvPr>
@@ -14198,7 +14198,7 @@
           <p:cNvPr id="78" name="文本框 77">
             <a:extLst>
               <a:ext uri="{FF2B5EF4-FFF2-40B4-BE49-F238E27FC236}">
-                <a16:creationId xmlns:a16="http://schemas.microsoft.com/office/drawing/2014/main" id="{9294888E-AA38-562E-FA06-FE03A2CBAA06}"/>
+                <a16:creationId xmlns:a16="http://schemas.microsoft.com/office/drawing/2014/main" id="{2AEF4DA9-AEE5-6B24-603E-E0C0458A556B}"/>
               </a:ext>
             </a:extLst>
           </p:cNvPr>
@@ -14251,7 +14251,7 @@
           <p:cNvPr id="79" name="矩形 78">
             <a:extLst>
               <a:ext uri="{FF2B5EF4-FFF2-40B4-BE49-F238E27FC236}">
-                <a16:creationId xmlns:a16="http://schemas.microsoft.com/office/drawing/2014/main" id="{02287A61-BC29-3CDE-1385-7B3683CE70F2}"/>
+                <a16:creationId xmlns:a16="http://schemas.microsoft.com/office/drawing/2014/main" id="{65214843-9A60-0835-9E1D-44C6451887C0}"/>
               </a:ext>
             </a:extLst>
           </p:cNvPr>
@@ -14305,7 +14305,7 @@
           <p:cNvPr id="80" name="文本框 79">
             <a:extLst>
               <a:ext uri="{FF2B5EF4-FFF2-40B4-BE49-F238E27FC236}">
-                <a16:creationId xmlns:a16="http://schemas.microsoft.com/office/drawing/2014/main" id="{6CDC520E-40F5-C08B-7253-D63D814D089A}"/>
+                <a16:creationId xmlns:a16="http://schemas.microsoft.com/office/drawing/2014/main" id="{F488861C-2B21-E0D8-1206-D26CB3211047}"/>
               </a:ext>
             </a:extLst>
           </p:cNvPr>
@@ -14358,7 +14358,7 @@
           <p:cNvPr id="81" name="矩形 80">
             <a:extLst>
               <a:ext uri="{FF2B5EF4-FFF2-40B4-BE49-F238E27FC236}">
-                <a16:creationId xmlns:a16="http://schemas.microsoft.com/office/drawing/2014/main" id="{ACADFFF8-74B2-1D53-7B2D-DC70A20A5561}"/>
+                <a16:creationId xmlns:a16="http://schemas.microsoft.com/office/drawing/2014/main" id="{2DB8B623-7BCC-569B-06BD-97DE13F47775}"/>
               </a:ext>
             </a:extLst>
           </p:cNvPr>
@@ -14412,7 +14412,7 @@
           <p:cNvPr id="82" name="文本框 81">
             <a:extLst>
               <a:ext uri="{FF2B5EF4-FFF2-40B4-BE49-F238E27FC236}">
-                <a16:creationId xmlns:a16="http://schemas.microsoft.com/office/drawing/2014/main" id="{F2F4E866-95E7-267B-01F9-05C456804EF3}"/>
+                <a16:creationId xmlns:a16="http://schemas.microsoft.com/office/drawing/2014/main" id="{00FF9B24-578C-8EE2-C25E-BDB28BE6020B}"/>
               </a:ext>
             </a:extLst>
           </p:cNvPr>
@@ -14465,7 +14465,7 @@
           <p:cNvPr id="83" name="矩形 82">
             <a:extLst>
               <a:ext uri="{FF2B5EF4-FFF2-40B4-BE49-F238E27FC236}">
-                <a16:creationId xmlns:a16="http://schemas.microsoft.com/office/drawing/2014/main" id="{DC26B583-E7E4-3EF7-DE2A-F2AF68A4C5B8}"/>
+                <a16:creationId xmlns:a16="http://schemas.microsoft.com/office/drawing/2014/main" id="{DA190A04-EFA0-9AA1-28E7-F642D99B2086}"/>
               </a:ext>
             </a:extLst>
           </p:cNvPr>
@@ -14519,7 +14519,7 @@
           <p:cNvPr id="84" name="文本框 83">
             <a:extLst>
               <a:ext uri="{FF2B5EF4-FFF2-40B4-BE49-F238E27FC236}">
-                <a16:creationId xmlns:a16="http://schemas.microsoft.com/office/drawing/2014/main" id="{9CC7681D-3AE2-3187-55E2-1FEE2849A326}"/>
+                <a16:creationId xmlns:a16="http://schemas.microsoft.com/office/drawing/2014/main" id="{0018F505-69D0-BE3B-BBA4-1336F2D1E6B6}"/>
               </a:ext>
             </a:extLst>
           </p:cNvPr>
@@ -14572,7 +14572,7 @@
           <p:cNvPr id="85" name="矩形 84">
             <a:extLst>
               <a:ext uri="{FF2B5EF4-FFF2-40B4-BE49-F238E27FC236}">
-                <a16:creationId xmlns:a16="http://schemas.microsoft.com/office/drawing/2014/main" id="{9A5DACEA-628E-7D79-2100-EEDEB177D4E4}"/>
+                <a16:creationId xmlns:a16="http://schemas.microsoft.com/office/drawing/2014/main" id="{D6894DFD-0E76-6396-3911-D5DCF026EB43}"/>
               </a:ext>
             </a:extLst>
           </p:cNvPr>
@@ -14626,7 +14626,7 @@
           <p:cNvPr id="86" name="文本框 85">
             <a:extLst>
               <a:ext uri="{FF2B5EF4-FFF2-40B4-BE49-F238E27FC236}">
-                <a16:creationId xmlns:a16="http://schemas.microsoft.com/office/drawing/2014/main" id="{CA59FDBE-5D08-451E-F30A-1A3243EEB5C5}"/>
+                <a16:creationId xmlns:a16="http://schemas.microsoft.com/office/drawing/2014/main" id="{D77B9AD2-0325-7736-272B-DA9184ADF863}"/>
               </a:ext>
             </a:extLst>
           </p:cNvPr>
@@ -14679,7 +14679,7 @@
           <p:cNvPr id="87" name="矩形 86">
             <a:extLst>
               <a:ext uri="{FF2B5EF4-FFF2-40B4-BE49-F238E27FC236}">
-                <a16:creationId xmlns:a16="http://schemas.microsoft.com/office/drawing/2014/main" id="{1D71081C-7B0B-2AA4-FEE7-90B8D6D35134}"/>
+                <a16:creationId xmlns:a16="http://schemas.microsoft.com/office/drawing/2014/main" id="{784A8559-C1BB-C0FE-5BE5-D1826E0CB60E}"/>
               </a:ext>
             </a:extLst>
           </p:cNvPr>
@@ -14733,7 +14733,7 @@
           <p:cNvPr id="88" name="文本框 87">
             <a:extLst>
               <a:ext uri="{FF2B5EF4-FFF2-40B4-BE49-F238E27FC236}">
-                <a16:creationId xmlns:a16="http://schemas.microsoft.com/office/drawing/2014/main" id="{6FDA97B3-1278-A480-1DEE-16646B0A971C}"/>
+                <a16:creationId xmlns:a16="http://schemas.microsoft.com/office/drawing/2014/main" id="{8178E6A0-108E-00E6-0670-32340210D8FA}"/>
               </a:ext>
             </a:extLst>
           </p:cNvPr>
@@ -14779,7 +14779,7 @@
           <p:cNvPr id="89" name="矩形: 圆角 88">
             <a:extLst>
               <a:ext uri="{FF2B5EF4-FFF2-40B4-BE49-F238E27FC236}">
-                <a16:creationId xmlns:a16="http://schemas.microsoft.com/office/drawing/2014/main" id="{CE911690-6C68-9BD9-1F81-959D1C0CFC46}"/>
+                <a16:creationId xmlns:a16="http://schemas.microsoft.com/office/drawing/2014/main" id="{8DB30C56-1EB9-28A0-DE78-0F8E42728166}"/>
               </a:ext>
             </a:extLst>
           </p:cNvPr>
@@ -14847,7 +14847,7 @@
           <p:cNvPr id="90" name="文本框 89">
             <a:extLst>
               <a:ext uri="{FF2B5EF4-FFF2-40B4-BE49-F238E27FC236}">
-                <a16:creationId xmlns:a16="http://schemas.microsoft.com/office/drawing/2014/main" id="{5CC9D825-C186-7406-5EFA-FFE168AE8142}"/>
+                <a16:creationId xmlns:a16="http://schemas.microsoft.com/office/drawing/2014/main" id="{E134CAB3-5EDE-5EB3-91E6-B56391FD8F62}"/>
               </a:ext>
             </a:extLst>
           </p:cNvPr>
@@ -15013,7 +15013,7 @@
           <p:cNvPr id="91" name="文本框 90">
             <a:extLst>
               <a:ext uri="{FF2B5EF4-FFF2-40B4-BE49-F238E27FC236}">
-                <a16:creationId xmlns:a16="http://schemas.microsoft.com/office/drawing/2014/main" id="{303D1CCA-249A-417D-2CA6-5C31E66E983F}"/>
+                <a16:creationId xmlns:a16="http://schemas.microsoft.com/office/drawing/2014/main" id="{95B510E5-512D-E645-11B2-639E8C4414B0}"/>
               </a:ext>
             </a:extLst>
           </p:cNvPr>
@@ -15089,7 +15089,7 @@
           <p:cNvPr id="92" name="矩形 91">
             <a:extLst>
               <a:ext uri="{FF2B5EF4-FFF2-40B4-BE49-F238E27FC236}">
-                <a16:creationId xmlns:a16="http://schemas.microsoft.com/office/drawing/2014/main" id="{DE395300-750F-4BED-886F-4F8A69CCF6BF}"/>
+                <a16:creationId xmlns:a16="http://schemas.microsoft.com/office/drawing/2014/main" id="{E4A808ED-F673-A666-DB20-52EEDF0A7A4B}"/>
               </a:ext>
             </a:extLst>
           </p:cNvPr>
@@ -15157,7 +15157,7 @@
           <p:cNvPr id="93" name="文本框 92">
             <a:extLst>
               <a:ext uri="{FF2B5EF4-FFF2-40B4-BE49-F238E27FC236}">
-                <a16:creationId xmlns:a16="http://schemas.microsoft.com/office/drawing/2014/main" id="{9C2C61FB-A177-AC63-73E3-1E04A8062B13}"/>
+                <a16:creationId xmlns:a16="http://schemas.microsoft.com/office/drawing/2014/main" id="{D1DB0C21-6A35-B6F8-408F-4A19EB6796D4}"/>
               </a:ext>
             </a:extLst>
           </p:cNvPr>
@@ -15303,7 +15303,7 @@
           <p:cNvPr id="94" name="文本框 93">
             <a:extLst>
               <a:ext uri="{FF2B5EF4-FFF2-40B4-BE49-F238E27FC236}">
-                <a16:creationId xmlns:a16="http://schemas.microsoft.com/office/drawing/2014/main" id="{ADCCE318-9D6A-5091-210F-04A05CB8D1CD}"/>
+                <a16:creationId xmlns:a16="http://schemas.microsoft.com/office/drawing/2014/main" id="{B651D973-6CF1-E5F2-FF05-01E0369FB7BD}"/>
               </a:ext>
             </a:extLst>
           </p:cNvPr>
@@ -15354,7 +15354,7 @@
     </p:spTree>
     <p:extLst>
       <p:ext uri="{BB962C8B-B14F-4D97-AF65-F5344CB8AC3E}">
-        <p14:creationId xmlns:p14="http://schemas.microsoft.com/office/powerpoint/2010/main" val="1692637411"/>
+        <p14:creationId xmlns:p14="http://schemas.microsoft.com/office/powerpoint/2010/main" val="541295165"/>
       </p:ext>
     </p:extLst>
   </p:cSld>
@@ -15394,7 +15394,7 @@
           <p:cNvPr id="2" name="矩形 1">
             <a:extLst>
               <a:ext uri="{FF2B5EF4-FFF2-40B4-BE49-F238E27FC236}">
-                <a16:creationId xmlns:a16="http://schemas.microsoft.com/office/drawing/2014/main" id="{EC0840FF-3304-92F7-F01E-78EBB8ADAF28}"/>
+                <a16:creationId xmlns:a16="http://schemas.microsoft.com/office/drawing/2014/main" id="{5727D745-EFE8-D374-C8E4-84C8FC686688}"/>
               </a:ext>
             </a:extLst>
           </p:cNvPr>
@@ -15462,7 +15462,7 @@
           <p:cNvPr id="3" name="文本框 2">
             <a:extLst>
               <a:ext uri="{FF2B5EF4-FFF2-40B4-BE49-F238E27FC236}">
-                <a16:creationId xmlns:a16="http://schemas.microsoft.com/office/drawing/2014/main" id="{698BEE52-F7EB-6460-86ED-FC5E3F9FE0CD}"/>
+                <a16:creationId xmlns:a16="http://schemas.microsoft.com/office/drawing/2014/main" id="{2B8DBB2E-E422-41A5-F6D4-F30BB7078564}"/>
               </a:ext>
             </a:extLst>
           </p:cNvPr>
@@ -15548,7 +15548,7 @@
           <p:cNvPr id="4" name="文本框 3">
             <a:extLst>
               <a:ext uri="{FF2B5EF4-FFF2-40B4-BE49-F238E27FC236}">
-                <a16:creationId xmlns:a16="http://schemas.microsoft.com/office/drawing/2014/main" id="{6EB33E98-441A-928A-3F71-FE3AC34E8916}"/>
+                <a16:creationId xmlns:a16="http://schemas.microsoft.com/office/drawing/2014/main" id="{EB04E64E-136E-F384-C991-33A902F9F92E}"/>
               </a:ext>
             </a:extLst>
           </p:cNvPr>
@@ -15558,7 +15558,7 @@
         <p:spPr>
           <a:xfrm>
             <a:off x="711200" y="914400"/>
-            <a:ext cx="10922000" cy="161583"/>
+            <a:ext cx="10922000" cy="196849"/>
           </a:xfrm>
           <a:prstGeom prst="rect">
             <a:avLst/>
@@ -15573,11 +15573,11 @@
           <a:p>
             <a:pPr>
               <a:lnSpc>
-                <a:spcPct val="105000"/>
+                <a:spcPct val="110000"/>
               </a:lnSpc>
             </a:pPr>
             <a:r>
-              <a:rPr lang="zh-CN" altLang="en-US" sz="1050">
+              <a:rPr lang="zh-CN" altLang="en-US" sz="1250">
                 <a:solidFill>
                   <a:srgbClr val="7F8C8D"/>
                 </a:solidFill>
@@ -15587,7 +15587,7 @@
               <a:t>模型排名 </a:t>
             </a:r>
             <a:r>
-              <a:rPr lang="en-US" altLang="zh-CN" sz="1050">
+              <a:rPr lang="en-US" altLang="zh-CN" sz="1250">
                 <a:solidFill>
                   <a:srgbClr val="7F8C8D"/>
                 </a:solidFill>
@@ -15597,7 +15597,7 @@
               <a:t>1 / 7,000 </a:t>
             </a:r>
             <a:r>
-              <a:rPr lang="zh-CN" altLang="en-US" sz="1050">
+              <a:rPr lang="zh-CN" altLang="en-US" sz="1250">
                 <a:solidFill>
                   <a:srgbClr val="7F8C8D"/>
                 </a:solidFill>
@@ -15607,7 +15607,7 @@
               <a:t>的重复发票案例；</a:t>
             </a:r>
             <a:r>
-              <a:rPr lang="en-US" altLang="zh-CN" sz="1050">
+              <a:rPr lang="en-US" altLang="zh-CN" sz="1250">
                 <a:solidFill>
                   <a:srgbClr val="7F8C8D"/>
                 </a:solidFill>
@@ -15617,7 +15617,7 @@
               <a:t>Benford </a:t>
             </a:r>
             <a:r>
-              <a:rPr lang="zh-CN" altLang="en-US" sz="1050">
+              <a:rPr lang="zh-CN" altLang="en-US" sz="1250">
                 <a:solidFill>
                   <a:srgbClr val="7F8C8D"/>
                 </a:solidFill>
@@ -15627,7 +15627,7 @@
               <a:t>未标记，模型 </a:t>
             </a:r>
             <a:r>
-              <a:rPr lang="en-US" altLang="zh-CN" sz="1050">
+              <a:rPr lang="en-US" altLang="zh-CN" sz="1250">
                 <a:solidFill>
                   <a:srgbClr val="7F8C8D"/>
                 </a:solidFill>
@@ -15637,7 +15637,7 @@
               <a:t>Top-140 </a:t>
             </a:r>
             <a:r>
-              <a:rPr lang="zh-CN" altLang="en-US" sz="1050">
+              <a:rPr lang="zh-CN" altLang="en-US" sz="1250">
                 <a:solidFill>
                   <a:srgbClr val="7F8C8D"/>
                 </a:solidFill>
@@ -15654,7 +15654,7 @@
           <p:cNvPr id="5" name="矩形: 圆角 4">
             <a:extLst>
               <a:ext uri="{FF2B5EF4-FFF2-40B4-BE49-F238E27FC236}">
-                <a16:creationId xmlns:a16="http://schemas.microsoft.com/office/drawing/2014/main" id="{D73F28AC-1C4E-DED9-7AE7-5D8E72556128}"/>
+                <a16:creationId xmlns:a16="http://schemas.microsoft.com/office/drawing/2014/main" id="{1CF92151-6D74-0690-8856-2D9848ACFA3F}"/>
               </a:ext>
             </a:extLst>
           </p:cNvPr>
@@ -15708,7 +15708,7 @@
           <p:cNvPr id="6" name="文本框 5">
             <a:extLst>
               <a:ext uri="{FF2B5EF4-FFF2-40B4-BE49-F238E27FC236}">
-                <a16:creationId xmlns:a16="http://schemas.microsoft.com/office/drawing/2014/main" id="{B01F112C-BC08-69EF-897C-FE0F262DADA9}"/>
+                <a16:creationId xmlns:a16="http://schemas.microsoft.com/office/drawing/2014/main" id="{74B36B32-A2EC-E269-5327-C2E4C3EDE618}"/>
               </a:ext>
             </a:extLst>
           </p:cNvPr>
@@ -15754,7 +15754,7 @@
           <p:cNvPr id="7" name="矩形 6">
             <a:extLst>
               <a:ext uri="{FF2B5EF4-FFF2-40B4-BE49-F238E27FC236}">
-                <a16:creationId xmlns:a16="http://schemas.microsoft.com/office/drawing/2014/main" id="{FBDD2401-700A-D86C-D5A8-596E559B8AA4}"/>
+                <a16:creationId xmlns:a16="http://schemas.microsoft.com/office/drawing/2014/main" id="{2116771A-9BEF-FED3-6CBC-1C5A7FD1704D}"/>
               </a:ext>
             </a:extLst>
           </p:cNvPr>
@@ -15808,7 +15808,7 @@
           <p:cNvPr id="8" name="文本框 7">
             <a:extLst>
               <a:ext uri="{FF2B5EF4-FFF2-40B4-BE49-F238E27FC236}">
-                <a16:creationId xmlns:a16="http://schemas.microsoft.com/office/drawing/2014/main" id="{E8223F01-1A0E-4259-38E9-C3CAA0EBB5BA}"/>
+                <a16:creationId xmlns:a16="http://schemas.microsoft.com/office/drawing/2014/main" id="{5E258ECE-A985-C807-1BD7-7D539A3F6FEB}"/>
               </a:ext>
             </a:extLst>
           </p:cNvPr>
@@ -15871,7 +15871,7 @@
           <p:cNvPr id="9" name="矩形 8">
             <a:extLst>
               <a:ext uri="{FF2B5EF4-FFF2-40B4-BE49-F238E27FC236}">
-                <a16:creationId xmlns:a16="http://schemas.microsoft.com/office/drawing/2014/main" id="{589617F0-5D4A-9C0C-EA4C-3A9D2BF9246B}"/>
+                <a16:creationId xmlns:a16="http://schemas.microsoft.com/office/drawing/2014/main" id="{D392FBD8-6CB7-03A6-EC00-3190D7E28D6C}"/>
               </a:ext>
             </a:extLst>
           </p:cNvPr>
@@ -15925,7 +15925,7 @@
           <p:cNvPr id="10" name="文本框 9">
             <a:extLst>
               <a:ext uri="{FF2B5EF4-FFF2-40B4-BE49-F238E27FC236}">
-                <a16:creationId xmlns:a16="http://schemas.microsoft.com/office/drawing/2014/main" id="{FC8FF791-4785-2917-E179-306D601ED61D}"/>
+                <a16:creationId xmlns:a16="http://schemas.microsoft.com/office/drawing/2014/main" id="{FAF47BCE-656E-1A60-4A82-879743172F42}"/>
               </a:ext>
             </a:extLst>
           </p:cNvPr>
@@ -15978,7 +15978,7 @@
           <p:cNvPr id="11" name="矩形 10">
             <a:extLst>
               <a:ext uri="{FF2B5EF4-FFF2-40B4-BE49-F238E27FC236}">
-                <a16:creationId xmlns:a16="http://schemas.microsoft.com/office/drawing/2014/main" id="{90523E8D-44D6-9D20-BE9C-AB8E68BA73C7}"/>
+                <a16:creationId xmlns:a16="http://schemas.microsoft.com/office/drawing/2014/main" id="{EC1B72E9-BB8D-2671-F476-0599305F4C6C}"/>
               </a:ext>
             </a:extLst>
           </p:cNvPr>
@@ -16032,7 +16032,7 @@
           <p:cNvPr id="12" name="文本框 11">
             <a:extLst>
               <a:ext uri="{FF2B5EF4-FFF2-40B4-BE49-F238E27FC236}">
-                <a16:creationId xmlns:a16="http://schemas.microsoft.com/office/drawing/2014/main" id="{0860BC1B-A895-1953-C2A3-700E18C9790F}"/>
+                <a16:creationId xmlns:a16="http://schemas.microsoft.com/office/drawing/2014/main" id="{644460F0-8334-1D3E-5A65-7C31A31A5E36}"/>
               </a:ext>
             </a:extLst>
           </p:cNvPr>
@@ -16078,7 +16078,7 @@
           <p:cNvPr id="13" name="矩形 12">
             <a:extLst>
               <a:ext uri="{FF2B5EF4-FFF2-40B4-BE49-F238E27FC236}">
-                <a16:creationId xmlns:a16="http://schemas.microsoft.com/office/drawing/2014/main" id="{70045272-08C9-B03C-3385-94C79DD984BB}"/>
+                <a16:creationId xmlns:a16="http://schemas.microsoft.com/office/drawing/2014/main" id="{D2CB8FE6-5BB5-5E83-25A3-DC0A4C0BCE76}"/>
               </a:ext>
             </a:extLst>
           </p:cNvPr>
@@ -16132,7 +16132,7 @@
           <p:cNvPr id="14" name="文本框 13">
             <a:extLst>
               <a:ext uri="{FF2B5EF4-FFF2-40B4-BE49-F238E27FC236}">
-                <a16:creationId xmlns:a16="http://schemas.microsoft.com/office/drawing/2014/main" id="{6FEE3445-D479-CFC4-EDEE-34C6D30F0399}"/>
+                <a16:creationId xmlns:a16="http://schemas.microsoft.com/office/drawing/2014/main" id="{40B3D5D9-7B3A-9C86-1678-D6F7858CAAC8}"/>
               </a:ext>
             </a:extLst>
           </p:cNvPr>
@@ -16185,7 +16185,7 @@
           <p:cNvPr id="15" name="矩形 14">
             <a:extLst>
               <a:ext uri="{FF2B5EF4-FFF2-40B4-BE49-F238E27FC236}">
-                <a16:creationId xmlns:a16="http://schemas.microsoft.com/office/drawing/2014/main" id="{95D418AB-9BFE-6067-612C-32ECEB744C0F}"/>
+                <a16:creationId xmlns:a16="http://schemas.microsoft.com/office/drawing/2014/main" id="{61D373B8-8F7E-4370-3733-C2EA93CB2F33}"/>
               </a:ext>
             </a:extLst>
           </p:cNvPr>
@@ -16239,7 +16239,7 @@
           <p:cNvPr id="16" name="文本框 15">
             <a:extLst>
               <a:ext uri="{FF2B5EF4-FFF2-40B4-BE49-F238E27FC236}">
-                <a16:creationId xmlns:a16="http://schemas.microsoft.com/office/drawing/2014/main" id="{A10EDB11-CC0B-2DCA-6B10-CC9A8150110A}"/>
+                <a16:creationId xmlns:a16="http://schemas.microsoft.com/office/drawing/2014/main" id="{76696081-10CF-4F1B-EFA8-154C10786396}"/>
               </a:ext>
             </a:extLst>
           </p:cNvPr>
@@ -16285,7 +16285,7 @@
           <p:cNvPr id="17" name="矩形 16">
             <a:extLst>
               <a:ext uri="{FF2B5EF4-FFF2-40B4-BE49-F238E27FC236}">
-                <a16:creationId xmlns:a16="http://schemas.microsoft.com/office/drawing/2014/main" id="{D425C4E4-8A0D-F246-C72A-59D6F379D540}"/>
+                <a16:creationId xmlns:a16="http://schemas.microsoft.com/office/drawing/2014/main" id="{00A469F7-93E9-17DA-1233-BA102D43BEFF}"/>
               </a:ext>
             </a:extLst>
           </p:cNvPr>
@@ -16339,7 +16339,7 @@
           <p:cNvPr id="18" name="文本框 17">
             <a:extLst>
               <a:ext uri="{FF2B5EF4-FFF2-40B4-BE49-F238E27FC236}">
-                <a16:creationId xmlns:a16="http://schemas.microsoft.com/office/drawing/2014/main" id="{640A9678-838A-2EF0-9599-CA56C0F1AD7B}"/>
+                <a16:creationId xmlns:a16="http://schemas.microsoft.com/office/drawing/2014/main" id="{6F38E4F4-F4EA-0175-0E8E-A557FD6AC455}"/>
               </a:ext>
             </a:extLst>
           </p:cNvPr>
@@ -16392,7 +16392,7 @@
           <p:cNvPr id="19" name="矩形 18">
             <a:extLst>
               <a:ext uri="{FF2B5EF4-FFF2-40B4-BE49-F238E27FC236}">
-                <a16:creationId xmlns:a16="http://schemas.microsoft.com/office/drawing/2014/main" id="{2396952A-2F16-30F9-9119-6273660D6CB8}"/>
+                <a16:creationId xmlns:a16="http://schemas.microsoft.com/office/drawing/2014/main" id="{EDCD244E-10D9-B964-5137-F8853F18C7BD}"/>
               </a:ext>
             </a:extLst>
           </p:cNvPr>
@@ -16446,7 +16446,7 @@
           <p:cNvPr id="20" name="文本框 19">
             <a:extLst>
               <a:ext uri="{FF2B5EF4-FFF2-40B4-BE49-F238E27FC236}">
-                <a16:creationId xmlns:a16="http://schemas.microsoft.com/office/drawing/2014/main" id="{0DA21ECD-16C1-16B9-F3F6-7B6F39F92F7B}"/>
+                <a16:creationId xmlns:a16="http://schemas.microsoft.com/office/drawing/2014/main" id="{0C27548D-C453-0E62-47FC-CE53600BF4E5}"/>
               </a:ext>
             </a:extLst>
           </p:cNvPr>
@@ -16492,7 +16492,7 @@
           <p:cNvPr id="21" name="矩形 20">
             <a:extLst>
               <a:ext uri="{FF2B5EF4-FFF2-40B4-BE49-F238E27FC236}">
-                <a16:creationId xmlns:a16="http://schemas.microsoft.com/office/drawing/2014/main" id="{64387911-6D8B-54DB-B901-38784A252229}"/>
+                <a16:creationId xmlns:a16="http://schemas.microsoft.com/office/drawing/2014/main" id="{23C5007A-DD01-0289-5153-1819D86F3BB2}"/>
               </a:ext>
             </a:extLst>
           </p:cNvPr>
@@ -16546,7 +16546,7 @@
           <p:cNvPr id="22" name="文本框 21">
             <a:extLst>
               <a:ext uri="{FF2B5EF4-FFF2-40B4-BE49-F238E27FC236}">
-                <a16:creationId xmlns:a16="http://schemas.microsoft.com/office/drawing/2014/main" id="{F3A0B769-0962-D85C-CF3B-1F89680DC0B0}"/>
+                <a16:creationId xmlns:a16="http://schemas.microsoft.com/office/drawing/2014/main" id="{52F413C5-55D3-5645-8E14-544FCE2A3983}"/>
               </a:ext>
             </a:extLst>
           </p:cNvPr>
@@ -16599,7 +16599,7 @@
           <p:cNvPr id="23" name="矩形 22">
             <a:extLst>
               <a:ext uri="{FF2B5EF4-FFF2-40B4-BE49-F238E27FC236}">
-                <a16:creationId xmlns:a16="http://schemas.microsoft.com/office/drawing/2014/main" id="{681BCA30-7837-FEBE-640E-4064F5F1B4EF}"/>
+                <a16:creationId xmlns:a16="http://schemas.microsoft.com/office/drawing/2014/main" id="{72F5DD5F-0F42-5843-92E4-09F57978116E}"/>
               </a:ext>
             </a:extLst>
           </p:cNvPr>
@@ -16653,7 +16653,7 @@
           <p:cNvPr id="24" name="文本框 23">
             <a:extLst>
               <a:ext uri="{FF2B5EF4-FFF2-40B4-BE49-F238E27FC236}">
-                <a16:creationId xmlns:a16="http://schemas.microsoft.com/office/drawing/2014/main" id="{DF5E832B-79D0-753A-E46E-06D56CBA47B9}"/>
+                <a16:creationId xmlns:a16="http://schemas.microsoft.com/office/drawing/2014/main" id="{48CB28CB-1555-85D6-C9C9-A6CABB442616}"/>
               </a:ext>
             </a:extLst>
           </p:cNvPr>
@@ -16699,7 +16699,7 @@
           <p:cNvPr id="25" name="矩形 24">
             <a:extLst>
               <a:ext uri="{FF2B5EF4-FFF2-40B4-BE49-F238E27FC236}">
-                <a16:creationId xmlns:a16="http://schemas.microsoft.com/office/drawing/2014/main" id="{06782D74-27D1-A565-3063-49C48E0E70EF}"/>
+                <a16:creationId xmlns:a16="http://schemas.microsoft.com/office/drawing/2014/main" id="{B7034110-C50E-E8D5-7862-9CBE110CDFCB}"/>
               </a:ext>
             </a:extLst>
           </p:cNvPr>
@@ -16753,7 +16753,7 @@
           <p:cNvPr id="26" name="文本框 25">
             <a:extLst>
               <a:ext uri="{FF2B5EF4-FFF2-40B4-BE49-F238E27FC236}">
-                <a16:creationId xmlns:a16="http://schemas.microsoft.com/office/drawing/2014/main" id="{2D2EAD94-CB39-E847-6AFB-9B01A3B08599}"/>
+                <a16:creationId xmlns:a16="http://schemas.microsoft.com/office/drawing/2014/main" id="{E96D8F2A-D4D0-D480-295E-B96B84928121}"/>
               </a:ext>
             </a:extLst>
           </p:cNvPr>
@@ -16806,7 +16806,7 @@
           <p:cNvPr id="27" name="矩形 26">
             <a:extLst>
               <a:ext uri="{FF2B5EF4-FFF2-40B4-BE49-F238E27FC236}">
-                <a16:creationId xmlns:a16="http://schemas.microsoft.com/office/drawing/2014/main" id="{8BAB695E-CA5D-F1A6-7CEC-A0DE9603B0B9}"/>
+                <a16:creationId xmlns:a16="http://schemas.microsoft.com/office/drawing/2014/main" id="{88B93221-63B3-1A41-AF55-C87CD15635A4}"/>
               </a:ext>
             </a:extLst>
           </p:cNvPr>
@@ -16860,7 +16860,7 @@
           <p:cNvPr id="28" name="文本框 27">
             <a:extLst>
               <a:ext uri="{FF2B5EF4-FFF2-40B4-BE49-F238E27FC236}">
-                <a16:creationId xmlns:a16="http://schemas.microsoft.com/office/drawing/2014/main" id="{37AAE598-46E9-80EC-066A-6453FF17FA4B}"/>
+                <a16:creationId xmlns:a16="http://schemas.microsoft.com/office/drawing/2014/main" id="{7FC957CA-5B86-E053-6980-4D6F2DF85336}"/>
               </a:ext>
             </a:extLst>
           </p:cNvPr>
@@ -16906,7 +16906,7 @@
           <p:cNvPr id="29" name="矩形 28">
             <a:extLst>
               <a:ext uri="{FF2B5EF4-FFF2-40B4-BE49-F238E27FC236}">
-                <a16:creationId xmlns:a16="http://schemas.microsoft.com/office/drawing/2014/main" id="{75C00BA1-82B8-CCB6-9038-90270F2B12A0}"/>
+                <a16:creationId xmlns:a16="http://schemas.microsoft.com/office/drawing/2014/main" id="{ED3EDBA2-EA6F-2CAD-DF63-AFBDA2DF5FF7}"/>
               </a:ext>
             </a:extLst>
           </p:cNvPr>
@@ -16960,7 +16960,7 @@
           <p:cNvPr id="30" name="文本框 29">
             <a:extLst>
               <a:ext uri="{FF2B5EF4-FFF2-40B4-BE49-F238E27FC236}">
-                <a16:creationId xmlns:a16="http://schemas.microsoft.com/office/drawing/2014/main" id="{756B4528-0924-985F-780D-FDD89B8072D6}"/>
+                <a16:creationId xmlns:a16="http://schemas.microsoft.com/office/drawing/2014/main" id="{D76C7491-76EF-63B9-6914-7FC5FD91E252}"/>
               </a:ext>
             </a:extLst>
           </p:cNvPr>
@@ -17016,7 +17016,7 @@
           <p:cNvPr id="31" name="矩形 30">
             <a:extLst>
               <a:ext uri="{FF2B5EF4-FFF2-40B4-BE49-F238E27FC236}">
-                <a16:creationId xmlns:a16="http://schemas.microsoft.com/office/drawing/2014/main" id="{B5F85ABE-DB2E-B98E-F94D-833BEDD4B6AE}"/>
+                <a16:creationId xmlns:a16="http://schemas.microsoft.com/office/drawing/2014/main" id="{77659F17-301C-3BD1-CA4D-745E79F260AB}"/>
               </a:ext>
             </a:extLst>
           </p:cNvPr>
@@ -17070,7 +17070,7 @@
           <p:cNvPr id="32" name="文本框 31">
             <a:extLst>
               <a:ext uri="{FF2B5EF4-FFF2-40B4-BE49-F238E27FC236}">
-                <a16:creationId xmlns:a16="http://schemas.microsoft.com/office/drawing/2014/main" id="{4289E455-07B9-4BEC-BD67-1177ADCB2444}"/>
+                <a16:creationId xmlns:a16="http://schemas.microsoft.com/office/drawing/2014/main" id="{15ECEDC2-7001-7FBF-6EB2-886BD9343F9D}"/>
               </a:ext>
             </a:extLst>
           </p:cNvPr>
@@ -17116,7 +17116,7 @@
           <p:cNvPr id="33" name="矩形 32">
             <a:extLst>
               <a:ext uri="{FF2B5EF4-FFF2-40B4-BE49-F238E27FC236}">
-                <a16:creationId xmlns:a16="http://schemas.microsoft.com/office/drawing/2014/main" id="{372A21CE-FE5A-BF32-3EE4-7725E7F48D78}"/>
+                <a16:creationId xmlns:a16="http://schemas.microsoft.com/office/drawing/2014/main" id="{D9D7B113-3FCD-6B00-1B30-7A5FBB764F74}"/>
               </a:ext>
             </a:extLst>
           </p:cNvPr>
@@ -17170,7 +17170,7 @@
           <p:cNvPr id="34" name="文本框 33">
             <a:extLst>
               <a:ext uri="{FF2B5EF4-FFF2-40B4-BE49-F238E27FC236}">
-                <a16:creationId xmlns:a16="http://schemas.microsoft.com/office/drawing/2014/main" id="{6EF6B485-B9D0-568F-7328-979CE85FC448}"/>
+                <a16:creationId xmlns:a16="http://schemas.microsoft.com/office/drawing/2014/main" id="{05F48268-088B-50B6-69BA-E02E09B5FE36}"/>
               </a:ext>
             </a:extLst>
           </p:cNvPr>
@@ -17223,7 +17223,7 @@
           <p:cNvPr id="35" name="矩形 34">
             <a:extLst>
               <a:ext uri="{FF2B5EF4-FFF2-40B4-BE49-F238E27FC236}">
-                <a16:creationId xmlns:a16="http://schemas.microsoft.com/office/drawing/2014/main" id="{962DC28B-756A-5D6B-B9C3-563D55A16A33}"/>
+                <a16:creationId xmlns:a16="http://schemas.microsoft.com/office/drawing/2014/main" id="{63892196-5FE5-6F0C-B5FA-1AAD40C69AF5}"/>
               </a:ext>
             </a:extLst>
           </p:cNvPr>
@@ -17277,7 +17277,7 @@
           <p:cNvPr id="36" name="文本框 35">
             <a:extLst>
               <a:ext uri="{FF2B5EF4-FFF2-40B4-BE49-F238E27FC236}">
-                <a16:creationId xmlns:a16="http://schemas.microsoft.com/office/drawing/2014/main" id="{DF1DA6DF-F2CD-03DC-991C-0764D8DE0775}"/>
+                <a16:creationId xmlns:a16="http://schemas.microsoft.com/office/drawing/2014/main" id="{341FAE14-A068-9738-DB64-61A117C7ADD5}"/>
               </a:ext>
             </a:extLst>
           </p:cNvPr>
@@ -17323,7 +17323,7 @@
           <p:cNvPr id="37" name="矩形 36">
             <a:extLst>
               <a:ext uri="{FF2B5EF4-FFF2-40B4-BE49-F238E27FC236}">
-                <a16:creationId xmlns:a16="http://schemas.microsoft.com/office/drawing/2014/main" id="{A981A8A0-3286-022B-8F0D-6C30801778A7}"/>
+                <a16:creationId xmlns:a16="http://schemas.microsoft.com/office/drawing/2014/main" id="{BA3816E1-F1B6-184E-BFB6-886444950DA4}"/>
               </a:ext>
             </a:extLst>
           </p:cNvPr>
@@ -17377,7 +17377,7 @@
           <p:cNvPr id="38" name="文本框 37">
             <a:extLst>
               <a:ext uri="{FF2B5EF4-FFF2-40B4-BE49-F238E27FC236}">
-                <a16:creationId xmlns:a16="http://schemas.microsoft.com/office/drawing/2014/main" id="{78E2A028-E005-40D2-206F-9DCB2FFD1DE6}"/>
+                <a16:creationId xmlns:a16="http://schemas.microsoft.com/office/drawing/2014/main" id="{85622B4C-7A8F-C9A7-9359-76C129D6A366}"/>
               </a:ext>
             </a:extLst>
           </p:cNvPr>
@@ -17453,7 +17453,7 @@
           <p:cNvPr id="39" name="文本框 38">
             <a:extLst>
               <a:ext uri="{FF2B5EF4-FFF2-40B4-BE49-F238E27FC236}">
-                <a16:creationId xmlns:a16="http://schemas.microsoft.com/office/drawing/2014/main" id="{7C94662D-61EA-289C-3B37-42D52B958CFA}"/>
+                <a16:creationId xmlns:a16="http://schemas.microsoft.com/office/drawing/2014/main" id="{E3324B17-3800-B77C-AB38-B4DD5C98D798}"/>
               </a:ext>
             </a:extLst>
           </p:cNvPr>
@@ -17519,7 +17519,7 @@
           <p:cNvPr id="40" name="矩形: 圆角 39">
             <a:extLst>
               <a:ext uri="{FF2B5EF4-FFF2-40B4-BE49-F238E27FC236}">
-                <a16:creationId xmlns:a16="http://schemas.microsoft.com/office/drawing/2014/main" id="{1033C451-4626-B22E-494A-DEB2384A8CC2}"/>
+                <a16:creationId xmlns:a16="http://schemas.microsoft.com/office/drawing/2014/main" id="{5CD2EE37-DD51-2039-8EA2-E93506006ABA}"/>
               </a:ext>
             </a:extLst>
           </p:cNvPr>
@@ -17573,7 +17573,7 @@
           <p:cNvPr id="41" name="矩形 40">
             <a:extLst>
               <a:ext uri="{FF2B5EF4-FFF2-40B4-BE49-F238E27FC236}">
-                <a16:creationId xmlns:a16="http://schemas.microsoft.com/office/drawing/2014/main" id="{2E9FAFFB-FAB6-3701-DE9E-92CA8657C407}"/>
+                <a16:creationId xmlns:a16="http://schemas.microsoft.com/office/drawing/2014/main" id="{03F42B5A-84C8-57EE-7F81-C3DC18DB8BCB}"/>
               </a:ext>
             </a:extLst>
           </p:cNvPr>
@@ -17641,7 +17641,7 @@
           <p:cNvPr id="42" name="文本框 41">
             <a:extLst>
               <a:ext uri="{FF2B5EF4-FFF2-40B4-BE49-F238E27FC236}">
-                <a16:creationId xmlns:a16="http://schemas.microsoft.com/office/drawing/2014/main" id="{1ABE2586-47D5-3F8E-6250-DD0DBA4E6B73}"/>
+                <a16:creationId xmlns:a16="http://schemas.microsoft.com/office/drawing/2014/main" id="{A6678F9A-5641-8516-CE19-63EB2E4442F2}"/>
               </a:ext>
             </a:extLst>
           </p:cNvPr>
@@ -17694,7 +17694,7 @@
           <p:cNvPr id="43" name="文本框 42">
             <a:extLst>
               <a:ext uri="{FF2B5EF4-FFF2-40B4-BE49-F238E27FC236}">
-                <a16:creationId xmlns:a16="http://schemas.microsoft.com/office/drawing/2014/main" id="{BBBF35EE-1C4B-58D8-8652-088F19AED9FD}"/>
+                <a16:creationId xmlns:a16="http://schemas.microsoft.com/office/drawing/2014/main" id="{2F56AC90-3763-C228-4303-26EBE04ADA7F}"/>
               </a:ext>
             </a:extLst>
           </p:cNvPr>
@@ -17757,7 +17757,7 @@
           <p:cNvPr id="44" name="文本框 43">
             <a:extLst>
               <a:ext uri="{FF2B5EF4-FFF2-40B4-BE49-F238E27FC236}">
-                <a16:creationId xmlns:a16="http://schemas.microsoft.com/office/drawing/2014/main" id="{276A1253-E72F-2496-79BE-F57978C906E5}"/>
+                <a16:creationId xmlns:a16="http://schemas.microsoft.com/office/drawing/2014/main" id="{1E79A2D5-C062-EA09-17EA-F2FB6426FDF5}"/>
               </a:ext>
             </a:extLst>
           </p:cNvPr>
@@ -17818,7 +17818,7 @@
           <p:cNvPr id="45" name="矩形: 圆角 44">
             <a:extLst>
               <a:ext uri="{FF2B5EF4-FFF2-40B4-BE49-F238E27FC236}">
-                <a16:creationId xmlns:a16="http://schemas.microsoft.com/office/drawing/2014/main" id="{0BF03B28-BD5A-0CF0-B0EA-EB9CA3A8D8EA}"/>
+                <a16:creationId xmlns:a16="http://schemas.microsoft.com/office/drawing/2014/main" id="{1948DD32-0F87-DAA8-9879-03894F5DB9E9}"/>
               </a:ext>
             </a:extLst>
           </p:cNvPr>
@@ -17872,7 +17872,7 @@
           <p:cNvPr id="46" name="矩形 45">
             <a:extLst>
               <a:ext uri="{FF2B5EF4-FFF2-40B4-BE49-F238E27FC236}">
-                <a16:creationId xmlns:a16="http://schemas.microsoft.com/office/drawing/2014/main" id="{39DCE9F6-0F81-0C3D-3D19-490AE052B522}"/>
+                <a16:creationId xmlns:a16="http://schemas.microsoft.com/office/drawing/2014/main" id="{9B6429A5-9717-377A-4A6E-D02A2BCA7A43}"/>
               </a:ext>
             </a:extLst>
           </p:cNvPr>
@@ -17940,7 +17940,7 @@
           <p:cNvPr id="47" name="文本框 46">
             <a:extLst>
               <a:ext uri="{FF2B5EF4-FFF2-40B4-BE49-F238E27FC236}">
-                <a16:creationId xmlns:a16="http://schemas.microsoft.com/office/drawing/2014/main" id="{9D6B2898-3831-4E49-B490-1F53F0423D5A}"/>
+                <a16:creationId xmlns:a16="http://schemas.microsoft.com/office/drawing/2014/main" id="{EB229CD9-425D-DC25-60FD-D9BC245A68BE}"/>
               </a:ext>
             </a:extLst>
           </p:cNvPr>
@@ -17993,7 +17993,7 @@
           <p:cNvPr id="48" name="文本框 47">
             <a:extLst>
               <a:ext uri="{FF2B5EF4-FFF2-40B4-BE49-F238E27FC236}">
-                <a16:creationId xmlns:a16="http://schemas.microsoft.com/office/drawing/2014/main" id="{461EF8BD-67CB-8A2A-F2FC-83B3F31A4B55}"/>
+                <a16:creationId xmlns:a16="http://schemas.microsoft.com/office/drawing/2014/main" id="{2317D7DE-E892-F166-007C-B8FA6590F9F6}"/>
               </a:ext>
             </a:extLst>
           </p:cNvPr>
@@ -18039,7 +18039,7 @@
           <p:cNvPr id="49" name="文本框 48">
             <a:extLst>
               <a:ext uri="{FF2B5EF4-FFF2-40B4-BE49-F238E27FC236}">
-                <a16:creationId xmlns:a16="http://schemas.microsoft.com/office/drawing/2014/main" id="{A2C459D3-C837-0F36-C6F6-D716DCADF313}"/>
+                <a16:creationId xmlns:a16="http://schemas.microsoft.com/office/drawing/2014/main" id="{BD7E7940-7D1E-4BD9-DB6F-F7C3D632CF59}"/>
               </a:ext>
             </a:extLst>
           </p:cNvPr>
@@ -18117,7 +18117,7 @@
           <p:cNvPr id="50" name="矩形: 圆角 49">
             <a:extLst>
               <a:ext uri="{FF2B5EF4-FFF2-40B4-BE49-F238E27FC236}">
-                <a16:creationId xmlns:a16="http://schemas.microsoft.com/office/drawing/2014/main" id="{989B771A-9C0D-2C8B-7527-A8571EFCD233}"/>
+                <a16:creationId xmlns:a16="http://schemas.microsoft.com/office/drawing/2014/main" id="{BE18CE7B-22DA-F828-46BF-E15C42DAA820}"/>
               </a:ext>
             </a:extLst>
           </p:cNvPr>
@@ -18171,7 +18171,7 @@
           <p:cNvPr id="51" name="矩形 50">
             <a:extLst>
               <a:ext uri="{FF2B5EF4-FFF2-40B4-BE49-F238E27FC236}">
-                <a16:creationId xmlns:a16="http://schemas.microsoft.com/office/drawing/2014/main" id="{7B2F006E-37CB-683B-729F-F7590A9129D3}"/>
+                <a16:creationId xmlns:a16="http://schemas.microsoft.com/office/drawing/2014/main" id="{64F9AC2E-F98C-BE3B-8C2A-7F597B0F16AC}"/>
               </a:ext>
             </a:extLst>
           </p:cNvPr>
@@ -18239,7 +18239,7 @@
           <p:cNvPr id="52" name="文本框 51">
             <a:extLst>
               <a:ext uri="{FF2B5EF4-FFF2-40B4-BE49-F238E27FC236}">
-                <a16:creationId xmlns:a16="http://schemas.microsoft.com/office/drawing/2014/main" id="{3A128E0B-24D8-1E72-3A83-A4E850A5E011}"/>
+                <a16:creationId xmlns:a16="http://schemas.microsoft.com/office/drawing/2014/main" id="{CE905FEA-2F87-8584-34D3-DF07C495288E}"/>
               </a:ext>
             </a:extLst>
           </p:cNvPr>
@@ -18295,7 +18295,7 @@
           <p:cNvPr id="53" name="文本框 52">
             <a:extLst>
               <a:ext uri="{FF2B5EF4-FFF2-40B4-BE49-F238E27FC236}">
-                <a16:creationId xmlns:a16="http://schemas.microsoft.com/office/drawing/2014/main" id="{3CC37CEB-3E29-54A9-3FE7-6FBA62F0C147}"/>
+                <a16:creationId xmlns:a16="http://schemas.microsoft.com/office/drawing/2014/main" id="{868287F8-843C-90A9-3E08-162A27DF656E}"/>
               </a:ext>
             </a:extLst>
           </p:cNvPr>
@@ -18341,7 +18341,7 @@
           <p:cNvPr id="54" name="文本框 53">
             <a:extLst>
               <a:ext uri="{FF2B5EF4-FFF2-40B4-BE49-F238E27FC236}">
-                <a16:creationId xmlns:a16="http://schemas.microsoft.com/office/drawing/2014/main" id="{98B30180-9BFB-2D66-4529-635B7F8D852C}"/>
+                <a16:creationId xmlns:a16="http://schemas.microsoft.com/office/drawing/2014/main" id="{A3285079-1729-ADE8-8B49-4EE494F3D3DA}"/>
               </a:ext>
             </a:extLst>
           </p:cNvPr>
@@ -18402,7 +18402,7 @@
           <p:cNvPr id="55" name="矩形: 圆角 54">
             <a:extLst>
               <a:ext uri="{FF2B5EF4-FFF2-40B4-BE49-F238E27FC236}">
-                <a16:creationId xmlns:a16="http://schemas.microsoft.com/office/drawing/2014/main" id="{4B1B769A-CF5E-8A9E-B755-FCC37ACE2EA9}"/>
+                <a16:creationId xmlns:a16="http://schemas.microsoft.com/office/drawing/2014/main" id="{061780AE-851D-3C95-8474-F2AB22BDB70C}"/>
               </a:ext>
             </a:extLst>
           </p:cNvPr>
@@ -18456,7 +18456,7 @@
           <p:cNvPr id="56" name="矩形 55">
             <a:extLst>
               <a:ext uri="{FF2B5EF4-FFF2-40B4-BE49-F238E27FC236}">
-                <a16:creationId xmlns:a16="http://schemas.microsoft.com/office/drawing/2014/main" id="{38C1E5E1-1702-74A8-EE2A-D0B4BA063B15}"/>
+                <a16:creationId xmlns:a16="http://schemas.microsoft.com/office/drawing/2014/main" id="{1B24A7A9-12A2-95A1-10CD-15F79D81079C}"/>
               </a:ext>
             </a:extLst>
           </p:cNvPr>
@@ -18524,7 +18524,7 @@
           <p:cNvPr id="57" name="文本框 56">
             <a:extLst>
               <a:ext uri="{FF2B5EF4-FFF2-40B4-BE49-F238E27FC236}">
-                <a16:creationId xmlns:a16="http://schemas.microsoft.com/office/drawing/2014/main" id="{96864AFA-036D-1A06-5095-CC5BF701019B}"/>
+                <a16:creationId xmlns:a16="http://schemas.microsoft.com/office/drawing/2014/main" id="{F777E37E-A451-96FF-7AAD-48A5CA439C01}"/>
               </a:ext>
             </a:extLst>
           </p:cNvPr>
@@ -18577,7 +18577,7 @@
           <p:cNvPr id="58" name="文本框 57">
             <a:extLst>
               <a:ext uri="{FF2B5EF4-FFF2-40B4-BE49-F238E27FC236}">
-                <a16:creationId xmlns:a16="http://schemas.microsoft.com/office/drawing/2014/main" id="{F2C6659A-A151-FE80-78AB-0C199F3986F9}"/>
+                <a16:creationId xmlns:a16="http://schemas.microsoft.com/office/drawing/2014/main" id="{A9930B75-D5DC-7C06-875F-284C2BBAF059}"/>
               </a:ext>
             </a:extLst>
           </p:cNvPr>
@@ -18623,7 +18623,7 @@
           <p:cNvPr id="59" name="文本框 58">
             <a:extLst>
               <a:ext uri="{FF2B5EF4-FFF2-40B4-BE49-F238E27FC236}">
-                <a16:creationId xmlns:a16="http://schemas.microsoft.com/office/drawing/2014/main" id="{E8B7B287-C71F-5AF0-07EF-C0AB24B08018}"/>
+                <a16:creationId xmlns:a16="http://schemas.microsoft.com/office/drawing/2014/main" id="{7FDD8715-9174-560D-0AA0-CEC541C5372D}"/>
               </a:ext>
             </a:extLst>
           </p:cNvPr>
@@ -18684,7 +18684,7 @@
           <p:cNvPr id="60" name="文本框 59">
             <a:extLst>
               <a:ext uri="{FF2B5EF4-FFF2-40B4-BE49-F238E27FC236}">
-                <a16:creationId xmlns:a16="http://schemas.microsoft.com/office/drawing/2014/main" id="{D8FEA44B-F636-3472-DF66-39B532258934}"/>
+                <a16:creationId xmlns:a16="http://schemas.microsoft.com/office/drawing/2014/main" id="{9CF4FA68-AE79-3061-7B88-A4B5753DC78A}"/>
               </a:ext>
             </a:extLst>
           </p:cNvPr>
@@ -18770,7 +18770,7 @@
           <p:cNvPr id="61" name="矩形: 圆角 60">
             <a:extLst>
               <a:ext uri="{FF2B5EF4-FFF2-40B4-BE49-F238E27FC236}">
-                <a16:creationId xmlns:a16="http://schemas.microsoft.com/office/drawing/2014/main" id="{9A486559-9F30-E212-2CB1-D90857046681}"/>
+                <a16:creationId xmlns:a16="http://schemas.microsoft.com/office/drawing/2014/main" id="{6FEAE420-FAAB-876A-EF7A-48EFFDEC8D14}"/>
               </a:ext>
             </a:extLst>
           </p:cNvPr>
@@ -18838,7 +18838,7 @@
           <p:cNvPr id="62" name="文本框 61">
             <a:extLst>
               <a:ext uri="{FF2B5EF4-FFF2-40B4-BE49-F238E27FC236}">
-                <a16:creationId xmlns:a16="http://schemas.microsoft.com/office/drawing/2014/main" id="{B9D77A66-003D-AA05-B8CB-7F85D8514991}"/>
+                <a16:creationId xmlns:a16="http://schemas.microsoft.com/office/drawing/2014/main" id="{FFD1A3A6-A8C7-81DC-6F48-B699FAF58565}"/>
               </a:ext>
             </a:extLst>
           </p:cNvPr>
@@ -18884,7 +18884,7 @@
           <p:cNvPr id="63" name="矩形 62">
             <a:extLst>
               <a:ext uri="{FF2B5EF4-FFF2-40B4-BE49-F238E27FC236}">
-                <a16:creationId xmlns:a16="http://schemas.microsoft.com/office/drawing/2014/main" id="{D87A967A-A940-2FA2-52ED-68666260F7FF}"/>
+                <a16:creationId xmlns:a16="http://schemas.microsoft.com/office/drawing/2014/main" id="{CED0733E-17A1-58E6-9C3F-ED71D6749556}"/>
               </a:ext>
             </a:extLst>
           </p:cNvPr>
@@ -18952,7 +18952,7 @@
           <p:cNvPr id="64" name="文本框 63">
             <a:extLst>
               <a:ext uri="{FF2B5EF4-FFF2-40B4-BE49-F238E27FC236}">
-                <a16:creationId xmlns:a16="http://schemas.microsoft.com/office/drawing/2014/main" id="{26F9E097-AA1E-3F76-EDD7-0BA085009D6B}"/>
+                <a16:creationId xmlns:a16="http://schemas.microsoft.com/office/drawing/2014/main" id="{1DFDC872-1EEF-BA78-7BA0-7DC6F0A7BF0C}"/>
               </a:ext>
             </a:extLst>
           </p:cNvPr>
@@ -19098,7 +19098,7 @@
           <p:cNvPr id="65" name="文本框 64">
             <a:extLst>
               <a:ext uri="{FF2B5EF4-FFF2-40B4-BE49-F238E27FC236}">
-                <a16:creationId xmlns:a16="http://schemas.microsoft.com/office/drawing/2014/main" id="{A8E5A0CF-46F4-65DE-139C-DA2687E64D82}"/>
+                <a16:creationId xmlns:a16="http://schemas.microsoft.com/office/drawing/2014/main" id="{636996FF-9A35-F1E2-FD69-58A0C76F2506}"/>
               </a:ext>
             </a:extLst>
           </p:cNvPr>
@@ -19149,7 +19149,7 @@
     </p:spTree>
     <p:extLst>
       <p:ext uri="{BB962C8B-B14F-4D97-AF65-F5344CB8AC3E}">
-        <p14:creationId xmlns:p14="http://schemas.microsoft.com/office/powerpoint/2010/main" val="492572306"/>
+        <p14:creationId xmlns:p14="http://schemas.microsoft.com/office/powerpoint/2010/main" val="3765211832"/>
       </p:ext>
     </p:extLst>
   </p:cSld>
@@ -19189,7 +19189,7 @@
           <p:cNvPr id="2" name="矩形 1">
             <a:extLst>
               <a:ext uri="{FF2B5EF4-FFF2-40B4-BE49-F238E27FC236}">
-                <a16:creationId xmlns:a16="http://schemas.microsoft.com/office/drawing/2014/main" id="{0CA46112-89A3-86EF-84C8-C615A8F72674}"/>
+                <a16:creationId xmlns:a16="http://schemas.microsoft.com/office/drawing/2014/main" id="{04E93467-408A-01DB-86F8-9580EE7C1A31}"/>
               </a:ext>
             </a:extLst>
           </p:cNvPr>
@@ -19257,7 +19257,7 @@
           <p:cNvPr id="3" name="文本框 2">
             <a:extLst>
               <a:ext uri="{FF2B5EF4-FFF2-40B4-BE49-F238E27FC236}">
-                <a16:creationId xmlns:a16="http://schemas.microsoft.com/office/drawing/2014/main" id="{27F9DABA-D3F3-09DF-4087-7F4CFB4A9EA8}"/>
+                <a16:creationId xmlns:a16="http://schemas.microsoft.com/office/drawing/2014/main" id="{62B41985-13FA-583D-0D3D-B6C6E47E3858}"/>
               </a:ext>
             </a:extLst>
           </p:cNvPr>
@@ -19303,7 +19303,7 @@
           <p:cNvPr id="4" name="文本框 3">
             <a:extLst>
               <a:ext uri="{FF2B5EF4-FFF2-40B4-BE49-F238E27FC236}">
-                <a16:creationId xmlns:a16="http://schemas.microsoft.com/office/drawing/2014/main" id="{9A4E617A-08E1-131F-68D1-67FAD69E6530}"/>
+                <a16:creationId xmlns:a16="http://schemas.microsoft.com/office/drawing/2014/main" id="{D4A2F596-1432-7CB9-4963-A76C474223F7}"/>
               </a:ext>
             </a:extLst>
           </p:cNvPr>
@@ -19313,7 +19313,7 @@
         <p:spPr>
           <a:xfrm>
             <a:off x="711200" y="914400"/>
-            <a:ext cx="10922000" cy="161583"/>
+            <a:ext cx="10922000" cy="196849"/>
           </a:xfrm>
           <a:prstGeom prst="rect">
             <a:avLst/>
@@ -19328,11 +19328,11 @@
           <a:p>
             <a:pPr>
               <a:lnSpc>
-                <a:spcPct val="105000"/>
+                <a:spcPct val="110000"/>
               </a:lnSpc>
             </a:pPr>
             <a:r>
-              <a:rPr lang="zh-CN" altLang="en-US" sz="1050">
+              <a:rPr lang="zh-CN" altLang="en-US" sz="1250">
                 <a:solidFill>
                   <a:srgbClr val="7F8C8D"/>
                 </a:solidFill>
@@ -19342,7 +19342,7 @@
               <a:t>针对上面的问题，我把解决过程拆成四步；从原始 </a:t>
             </a:r>
             <a:r>
-              <a:rPr lang="en-US" altLang="zh-CN" sz="1050">
+              <a:rPr lang="en-US" altLang="zh-CN" sz="1250">
                 <a:solidFill>
                   <a:srgbClr val="7F8C8D"/>
                 </a:solidFill>
@@ -19352,7 +19352,7 @@
               <a:t>CSV </a:t>
             </a:r>
             <a:r>
-              <a:rPr lang="zh-CN" altLang="en-US" sz="1050">
+              <a:rPr lang="zh-CN" altLang="en-US" sz="1250">
                 <a:solidFill>
                   <a:srgbClr val="7F8C8D"/>
                 </a:solidFill>
@@ -19362,7 +19362,7 @@
               <a:t>到 </a:t>
             </a:r>
             <a:r>
-              <a:rPr lang="en-US" altLang="zh-CN" sz="1050">
+              <a:rPr lang="en-US" altLang="zh-CN" sz="1250">
                 <a:solidFill>
                   <a:srgbClr val="7F8C8D"/>
                 </a:solidFill>
@@ -19372,7 +19372,7 @@
               <a:t>140 </a:t>
             </a:r>
             <a:r>
-              <a:rPr lang="zh-CN" altLang="en-US" sz="1050">
+              <a:rPr lang="zh-CN" altLang="en-US" sz="1250">
                 <a:solidFill>
                   <a:srgbClr val="7F8C8D"/>
                 </a:solidFill>
@@ -19389,7 +19389,7 @@
           <p:cNvPr id="5" name="矩形: 圆角 4">
             <a:extLst>
               <a:ext uri="{FF2B5EF4-FFF2-40B4-BE49-F238E27FC236}">
-                <a16:creationId xmlns:a16="http://schemas.microsoft.com/office/drawing/2014/main" id="{C90FDD5F-103D-9A4B-9252-DD0A3C1CCACF}"/>
+                <a16:creationId xmlns:a16="http://schemas.microsoft.com/office/drawing/2014/main" id="{D11B0F45-D968-5A4C-AE0B-478C228A93DB}"/>
               </a:ext>
             </a:extLst>
           </p:cNvPr>
@@ -19443,7 +19443,7 @@
           <p:cNvPr id="6" name="矩形 5">
             <a:extLst>
               <a:ext uri="{FF2B5EF4-FFF2-40B4-BE49-F238E27FC236}">
-                <a16:creationId xmlns:a16="http://schemas.microsoft.com/office/drawing/2014/main" id="{640414C5-5E22-4702-7F38-AAA4FBA36BDB}"/>
+                <a16:creationId xmlns:a16="http://schemas.microsoft.com/office/drawing/2014/main" id="{DDBF8B56-CD35-FCE5-190B-0291EB0F36AE}"/>
               </a:ext>
             </a:extLst>
           </p:cNvPr>
@@ -19511,7 +19511,7 @@
           <p:cNvPr id="7" name="文本框 6">
             <a:extLst>
               <a:ext uri="{FF2B5EF4-FFF2-40B4-BE49-F238E27FC236}">
-                <a16:creationId xmlns:a16="http://schemas.microsoft.com/office/drawing/2014/main" id="{3CCBFB4B-F050-FDD7-FD9D-79A5727BFBD5}"/>
+                <a16:creationId xmlns:a16="http://schemas.microsoft.com/office/drawing/2014/main" id="{D67DABF1-607A-86DD-D4A3-BE785AF62C13}"/>
               </a:ext>
             </a:extLst>
           </p:cNvPr>
@@ -19557,7 +19557,7 @@
           <p:cNvPr id="8" name="文本框 7">
             <a:extLst>
               <a:ext uri="{FF2B5EF4-FFF2-40B4-BE49-F238E27FC236}">
-                <a16:creationId xmlns:a16="http://schemas.microsoft.com/office/drawing/2014/main" id="{A957D2C5-E069-2A41-D5F9-8ACA7CF6FA42}"/>
+                <a16:creationId xmlns:a16="http://schemas.microsoft.com/office/drawing/2014/main" id="{830210CB-194B-C05A-A516-A170C69A8F34}"/>
               </a:ext>
             </a:extLst>
           </p:cNvPr>
@@ -19676,7 +19676,7 @@
           <p:cNvPr id="9" name="矩形 8">
             <a:extLst>
               <a:ext uri="{FF2B5EF4-FFF2-40B4-BE49-F238E27FC236}">
-                <a16:creationId xmlns:a16="http://schemas.microsoft.com/office/drawing/2014/main" id="{4EF2200F-EA93-6EF7-112C-1B671FE5F59B}"/>
+                <a16:creationId xmlns:a16="http://schemas.microsoft.com/office/drawing/2014/main" id="{0591F1B4-A8A6-DC83-BB39-808E61BCEA41}"/>
               </a:ext>
             </a:extLst>
           </p:cNvPr>
@@ -19744,7 +19744,7 @@
           <p:cNvPr id="10" name="文本框 9">
             <a:extLst>
               <a:ext uri="{FF2B5EF4-FFF2-40B4-BE49-F238E27FC236}">
-                <a16:creationId xmlns:a16="http://schemas.microsoft.com/office/drawing/2014/main" id="{47E43C0A-8A30-56A3-7237-71EF29363BE4}"/>
+                <a16:creationId xmlns:a16="http://schemas.microsoft.com/office/drawing/2014/main" id="{6706A311-D161-E032-1C05-19D2FB0A687B}"/>
               </a:ext>
             </a:extLst>
           </p:cNvPr>
@@ -19797,7 +19797,7 @@
           <p:cNvPr id="11" name="矩形: 圆角 10">
             <a:extLst>
               <a:ext uri="{FF2B5EF4-FFF2-40B4-BE49-F238E27FC236}">
-                <a16:creationId xmlns:a16="http://schemas.microsoft.com/office/drawing/2014/main" id="{C96DBBEB-9DCB-A1FF-C382-24A4C7411910}"/>
+                <a16:creationId xmlns:a16="http://schemas.microsoft.com/office/drawing/2014/main" id="{F72D08B3-8FE5-2DEF-58F1-A9FDF60FB761}"/>
               </a:ext>
             </a:extLst>
           </p:cNvPr>
@@ -19851,7 +19851,7 @@
           <p:cNvPr id="12" name="矩形 11">
             <a:extLst>
               <a:ext uri="{FF2B5EF4-FFF2-40B4-BE49-F238E27FC236}">
-                <a16:creationId xmlns:a16="http://schemas.microsoft.com/office/drawing/2014/main" id="{A7125010-5A4F-4B0E-FEDB-BB4E89AAC233}"/>
+                <a16:creationId xmlns:a16="http://schemas.microsoft.com/office/drawing/2014/main" id="{68FFBE45-443D-817D-08C3-973EEA513717}"/>
               </a:ext>
             </a:extLst>
           </p:cNvPr>
@@ -19919,7 +19919,7 @@
           <p:cNvPr id="13" name="文本框 12">
             <a:extLst>
               <a:ext uri="{FF2B5EF4-FFF2-40B4-BE49-F238E27FC236}">
-                <a16:creationId xmlns:a16="http://schemas.microsoft.com/office/drawing/2014/main" id="{7B5B9E7F-B3C9-2C83-A61D-AD76CFA92A79}"/>
+                <a16:creationId xmlns:a16="http://schemas.microsoft.com/office/drawing/2014/main" id="{20766B6A-1D2E-C5D1-85CD-E149304435B3}"/>
               </a:ext>
             </a:extLst>
           </p:cNvPr>
@@ -19965,7 +19965,7 @@
           <p:cNvPr id="14" name="文本框 13">
             <a:extLst>
               <a:ext uri="{FF2B5EF4-FFF2-40B4-BE49-F238E27FC236}">
-                <a16:creationId xmlns:a16="http://schemas.microsoft.com/office/drawing/2014/main" id="{F3DFA4ED-30E6-44BF-7D14-F9ADC3748C5C}"/>
+                <a16:creationId xmlns:a16="http://schemas.microsoft.com/office/drawing/2014/main" id="{7B305C55-914B-BCA9-5B61-EDAB99295038}"/>
               </a:ext>
             </a:extLst>
           </p:cNvPr>
@@ -20101,7 +20101,7 @@
           <p:cNvPr id="15" name="矩形 14">
             <a:extLst>
               <a:ext uri="{FF2B5EF4-FFF2-40B4-BE49-F238E27FC236}">
-                <a16:creationId xmlns:a16="http://schemas.microsoft.com/office/drawing/2014/main" id="{D8497F3A-0DE1-7026-98C1-541234097F52}"/>
+                <a16:creationId xmlns:a16="http://schemas.microsoft.com/office/drawing/2014/main" id="{B24A80DB-AD64-059A-3CA2-C9EF63990CC0}"/>
               </a:ext>
             </a:extLst>
           </p:cNvPr>
@@ -20169,7 +20169,7 @@
           <p:cNvPr id="16" name="文本框 15">
             <a:extLst>
               <a:ext uri="{FF2B5EF4-FFF2-40B4-BE49-F238E27FC236}">
-                <a16:creationId xmlns:a16="http://schemas.microsoft.com/office/drawing/2014/main" id="{6FF821CA-983A-237B-D7C8-E8DFEA7AE633}"/>
+                <a16:creationId xmlns:a16="http://schemas.microsoft.com/office/drawing/2014/main" id="{16D578C6-16B7-281E-4319-69B60BAEC917}"/>
               </a:ext>
             </a:extLst>
           </p:cNvPr>
@@ -20222,7 +20222,7 @@
           <p:cNvPr id="17" name="矩形: 圆角 16">
             <a:extLst>
               <a:ext uri="{FF2B5EF4-FFF2-40B4-BE49-F238E27FC236}">
-                <a16:creationId xmlns:a16="http://schemas.microsoft.com/office/drawing/2014/main" id="{FF73DD55-4FA2-7CB9-F3F7-14B9891EB672}"/>
+                <a16:creationId xmlns:a16="http://schemas.microsoft.com/office/drawing/2014/main" id="{E1C4C661-93AB-F106-7522-BB7C0E9C02B0}"/>
               </a:ext>
             </a:extLst>
           </p:cNvPr>
@@ -20276,7 +20276,7 @@
           <p:cNvPr id="18" name="矩形 17">
             <a:extLst>
               <a:ext uri="{FF2B5EF4-FFF2-40B4-BE49-F238E27FC236}">
-                <a16:creationId xmlns:a16="http://schemas.microsoft.com/office/drawing/2014/main" id="{F467AE65-C48B-6915-2531-0FC6056C7135}"/>
+                <a16:creationId xmlns:a16="http://schemas.microsoft.com/office/drawing/2014/main" id="{347833D8-F4C5-8F89-945B-C28C3BE97340}"/>
               </a:ext>
             </a:extLst>
           </p:cNvPr>
@@ -20344,7 +20344,7 @@
           <p:cNvPr id="19" name="文本框 18">
             <a:extLst>
               <a:ext uri="{FF2B5EF4-FFF2-40B4-BE49-F238E27FC236}">
-                <a16:creationId xmlns:a16="http://schemas.microsoft.com/office/drawing/2014/main" id="{F387B7D9-DF3A-4071-FA68-3DAE21ED3252}"/>
+                <a16:creationId xmlns:a16="http://schemas.microsoft.com/office/drawing/2014/main" id="{53F4A926-1B04-630C-9F37-988C40524997}"/>
               </a:ext>
             </a:extLst>
           </p:cNvPr>
@@ -20390,7 +20390,7 @@
           <p:cNvPr id="20" name="文本框 19">
             <a:extLst>
               <a:ext uri="{FF2B5EF4-FFF2-40B4-BE49-F238E27FC236}">
-                <a16:creationId xmlns:a16="http://schemas.microsoft.com/office/drawing/2014/main" id="{26F48C54-7FA0-E9AF-E596-1973AD5A340D}"/>
+                <a16:creationId xmlns:a16="http://schemas.microsoft.com/office/drawing/2014/main" id="{2E6D4F45-F083-89BC-BAA4-A0384740E95B}"/>
               </a:ext>
             </a:extLst>
           </p:cNvPr>
@@ -20529,7 +20529,7 @@
           <p:cNvPr id="21" name="矩形 20">
             <a:extLst>
               <a:ext uri="{FF2B5EF4-FFF2-40B4-BE49-F238E27FC236}">
-                <a16:creationId xmlns:a16="http://schemas.microsoft.com/office/drawing/2014/main" id="{145F75DF-F171-FDE3-1DE3-E7C1634C1887}"/>
+                <a16:creationId xmlns:a16="http://schemas.microsoft.com/office/drawing/2014/main" id="{99E082E3-DFB5-B209-C4D5-49331B1EA867}"/>
               </a:ext>
             </a:extLst>
           </p:cNvPr>
@@ -20597,7 +20597,7 @@
           <p:cNvPr id="22" name="文本框 21">
             <a:extLst>
               <a:ext uri="{FF2B5EF4-FFF2-40B4-BE49-F238E27FC236}">
-                <a16:creationId xmlns:a16="http://schemas.microsoft.com/office/drawing/2014/main" id="{DDF6E250-06D1-A4D1-AADE-CE60A5FD6444}"/>
+                <a16:creationId xmlns:a16="http://schemas.microsoft.com/office/drawing/2014/main" id="{6754B958-F6B9-0971-01AF-6FFF68F3E38C}"/>
               </a:ext>
             </a:extLst>
           </p:cNvPr>
@@ -20653,7 +20653,7 @@
           <p:cNvPr id="23" name="矩形: 圆角 22">
             <a:extLst>
               <a:ext uri="{FF2B5EF4-FFF2-40B4-BE49-F238E27FC236}">
-                <a16:creationId xmlns:a16="http://schemas.microsoft.com/office/drawing/2014/main" id="{A645F99F-8D3B-C5CB-4E8D-2080D17CB040}"/>
+                <a16:creationId xmlns:a16="http://schemas.microsoft.com/office/drawing/2014/main" id="{7A92A9C9-EB6A-C096-454B-DDC0E75B4C2C}"/>
               </a:ext>
             </a:extLst>
           </p:cNvPr>
@@ -20707,7 +20707,7 @@
           <p:cNvPr id="24" name="矩形 23">
             <a:extLst>
               <a:ext uri="{FF2B5EF4-FFF2-40B4-BE49-F238E27FC236}">
-                <a16:creationId xmlns:a16="http://schemas.microsoft.com/office/drawing/2014/main" id="{25CF409B-C63F-035B-CCE4-18960C38CEA0}"/>
+                <a16:creationId xmlns:a16="http://schemas.microsoft.com/office/drawing/2014/main" id="{F907DF6D-D925-286F-DA2D-7B359E0008FE}"/>
               </a:ext>
             </a:extLst>
           </p:cNvPr>
@@ -20775,7 +20775,7 @@
           <p:cNvPr id="25" name="文本框 24">
             <a:extLst>
               <a:ext uri="{FF2B5EF4-FFF2-40B4-BE49-F238E27FC236}">
-                <a16:creationId xmlns:a16="http://schemas.microsoft.com/office/drawing/2014/main" id="{4F398AD5-10CD-4576-55B3-A8EA11B51F5A}"/>
+                <a16:creationId xmlns:a16="http://schemas.microsoft.com/office/drawing/2014/main" id="{DC18A332-3F44-D152-4016-3039A774974C}"/>
               </a:ext>
             </a:extLst>
           </p:cNvPr>
@@ -20821,7 +20821,7 @@
           <p:cNvPr id="26" name="文本框 25">
             <a:extLst>
               <a:ext uri="{FF2B5EF4-FFF2-40B4-BE49-F238E27FC236}">
-                <a16:creationId xmlns:a16="http://schemas.microsoft.com/office/drawing/2014/main" id="{12B776BB-AC77-BDD2-5FA8-8E28B8E1626F}"/>
+                <a16:creationId xmlns:a16="http://schemas.microsoft.com/office/drawing/2014/main" id="{377E6255-BB3B-EEB2-BE73-4C334C484706}"/>
               </a:ext>
             </a:extLst>
           </p:cNvPr>
@@ -20960,7 +20960,7 @@
           <p:cNvPr id="27" name="矩形 26">
             <a:extLst>
               <a:ext uri="{FF2B5EF4-FFF2-40B4-BE49-F238E27FC236}">
-                <a16:creationId xmlns:a16="http://schemas.microsoft.com/office/drawing/2014/main" id="{5022A2B1-A4C7-AB21-D0C2-F2A69B44F2CD}"/>
+                <a16:creationId xmlns:a16="http://schemas.microsoft.com/office/drawing/2014/main" id="{2C8156B0-8120-9DDA-F753-26953D16B317}"/>
               </a:ext>
             </a:extLst>
           </p:cNvPr>
@@ -21028,7 +21028,7 @@
           <p:cNvPr id="28" name="文本框 27">
             <a:extLst>
               <a:ext uri="{FF2B5EF4-FFF2-40B4-BE49-F238E27FC236}">
-                <a16:creationId xmlns:a16="http://schemas.microsoft.com/office/drawing/2014/main" id="{8B32812C-4EC6-E8FF-394E-5DC177FFC0CC}"/>
+                <a16:creationId xmlns:a16="http://schemas.microsoft.com/office/drawing/2014/main" id="{B2A25CA6-5289-5C88-EBFD-51F55979B5FF}"/>
               </a:ext>
             </a:extLst>
           </p:cNvPr>
@@ -21101,7 +21101,7 @@
           <p:cNvPr id="29" name="箭头: 右 28">
             <a:extLst>
               <a:ext uri="{FF2B5EF4-FFF2-40B4-BE49-F238E27FC236}">
-                <a16:creationId xmlns:a16="http://schemas.microsoft.com/office/drawing/2014/main" id="{4ED0004D-FE02-14BF-840F-B3935EDCA441}"/>
+                <a16:creationId xmlns:a16="http://schemas.microsoft.com/office/drawing/2014/main" id="{302500D2-246A-CC45-EBF7-1057F885722F}"/>
               </a:ext>
             </a:extLst>
           </p:cNvPr>
@@ -21169,7 +21169,7 @@
           <p:cNvPr id="30" name="箭头: 右 29">
             <a:extLst>
               <a:ext uri="{FF2B5EF4-FFF2-40B4-BE49-F238E27FC236}">
-                <a16:creationId xmlns:a16="http://schemas.microsoft.com/office/drawing/2014/main" id="{B2F821A8-0CC0-7B98-F9E7-18DB20D0B530}"/>
+                <a16:creationId xmlns:a16="http://schemas.microsoft.com/office/drawing/2014/main" id="{853703CD-F100-C95C-8C7C-81DA3FE268D4}"/>
               </a:ext>
             </a:extLst>
           </p:cNvPr>
@@ -21237,7 +21237,7 @@
           <p:cNvPr id="31" name="箭头: 右 30">
             <a:extLst>
               <a:ext uri="{FF2B5EF4-FFF2-40B4-BE49-F238E27FC236}">
-                <a16:creationId xmlns:a16="http://schemas.microsoft.com/office/drawing/2014/main" id="{44C34316-8E31-AB90-6942-73C409C6DDE2}"/>
+                <a16:creationId xmlns:a16="http://schemas.microsoft.com/office/drawing/2014/main" id="{9B4AEFAB-F3F2-020D-32E2-FA77BEC777B8}"/>
               </a:ext>
             </a:extLst>
           </p:cNvPr>
@@ -21305,7 +21305,7 @@
           <p:cNvPr id="32" name="矩形: 圆角 31">
             <a:extLst>
               <a:ext uri="{FF2B5EF4-FFF2-40B4-BE49-F238E27FC236}">
-                <a16:creationId xmlns:a16="http://schemas.microsoft.com/office/drawing/2014/main" id="{B8BC767C-0042-2AB1-244F-C3076F652136}"/>
+                <a16:creationId xmlns:a16="http://schemas.microsoft.com/office/drawing/2014/main" id="{1D01C3CC-B6CA-6499-E422-BE3795C7BFEC}"/>
               </a:ext>
             </a:extLst>
           </p:cNvPr>
@@ -21373,7 +21373,7 @@
           <p:cNvPr id="33" name="文本框 32">
             <a:extLst>
               <a:ext uri="{FF2B5EF4-FFF2-40B4-BE49-F238E27FC236}">
-                <a16:creationId xmlns:a16="http://schemas.microsoft.com/office/drawing/2014/main" id="{058EB5A8-7372-E5E3-257A-9A8E1DAF5801}"/>
+                <a16:creationId xmlns:a16="http://schemas.microsoft.com/office/drawing/2014/main" id="{5CC6ECA6-22C6-9119-8BCD-13C8B84EAC35}"/>
               </a:ext>
             </a:extLst>
           </p:cNvPr>
@@ -21499,7 +21499,7 @@
           <p:cNvPr id="34" name="文本框 33">
             <a:extLst>
               <a:ext uri="{FF2B5EF4-FFF2-40B4-BE49-F238E27FC236}">
-                <a16:creationId xmlns:a16="http://schemas.microsoft.com/office/drawing/2014/main" id="{16CF0BB7-6240-2503-7EEF-339187D65EB0}"/>
+                <a16:creationId xmlns:a16="http://schemas.microsoft.com/office/drawing/2014/main" id="{994BFDCD-48AB-C0FC-6E9D-13E0F71B393F}"/>
               </a:ext>
             </a:extLst>
           </p:cNvPr>
@@ -21583,7 +21583,7 @@
     </p:spTree>
     <p:extLst>
       <p:ext uri="{BB962C8B-B14F-4D97-AF65-F5344CB8AC3E}">
-        <p14:creationId xmlns:p14="http://schemas.microsoft.com/office/powerpoint/2010/main" val="2405188154"/>
+        <p14:creationId xmlns:p14="http://schemas.microsoft.com/office/powerpoint/2010/main" val="3564480449"/>
       </p:ext>
     </p:extLst>
   </p:cSld>
@@ -21623,7 +21623,7 @@
           <p:cNvPr id="2" name="矩形 1">
             <a:extLst>
               <a:ext uri="{FF2B5EF4-FFF2-40B4-BE49-F238E27FC236}">
-                <a16:creationId xmlns:a16="http://schemas.microsoft.com/office/drawing/2014/main" id="{081167F1-9ECF-D3A7-AECC-0C7B5CD1AD3C}"/>
+                <a16:creationId xmlns:a16="http://schemas.microsoft.com/office/drawing/2014/main" id="{5BA44D10-70FC-9059-9D38-9DDFCD462D66}"/>
               </a:ext>
             </a:extLst>
           </p:cNvPr>
@@ -21691,7 +21691,7 @@
           <p:cNvPr id="3" name="文本框 2">
             <a:extLst>
               <a:ext uri="{FF2B5EF4-FFF2-40B4-BE49-F238E27FC236}">
-                <a16:creationId xmlns:a16="http://schemas.microsoft.com/office/drawing/2014/main" id="{A4C7BD96-C370-26F8-66AC-5CCF9D51F6AD}"/>
+                <a16:creationId xmlns:a16="http://schemas.microsoft.com/office/drawing/2014/main" id="{BD9EF308-F2FC-0B59-0368-E0198574B43F}"/>
               </a:ext>
             </a:extLst>
           </p:cNvPr>
@@ -21737,7 +21737,7 @@
           <p:cNvPr id="4" name="文本框 3">
             <a:extLst>
               <a:ext uri="{FF2B5EF4-FFF2-40B4-BE49-F238E27FC236}">
-                <a16:creationId xmlns:a16="http://schemas.microsoft.com/office/drawing/2014/main" id="{033CC247-E27B-CDCE-56FA-13C45C411769}"/>
+                <a16:creationId xmlns:a16="http://schemas.microsoft.com/office/drawing/2014/main" id="{FAE3BC6E-4A88-2757-4552-8E586D50E52C}"/>
               </a:ext>
             </a:extLst>
           </p:cNvPr>
@@ -21746,8 +21746,8 @@
         </p:nvSpPr>
         <p:spPr>
           <a:xfrm>
-            <a:off x="711200" y="889000"/>
-            <a:ext cx="10922000" cy="161583"/>
+            <a:off x="711200" y="863600"/>
+            <a:ext cx="10922000" cy="192360"/>
           </a:xfrm>
           <a:prstGeom prst="rect">
             <a:avLst/>
@@ -21766,7 +21766,7 @@
               </a:lnSpc>
             </a:pPr>
             <a:r>
-              <a:rPr lang="zh-CN" altLang="en-US" sz="1050" b="1">
+              <a:rPr lang="zh-CN" altLang="en-US" sz="1250" b="1">
                 <a:solidFill>
                   <a:srgbClr val="34495E"/>
                 </a:solidFill>
@@ -21776,7 +21776,7 @@
               <a:t>审计现场：人力有限、异常稀少、规则只看单字段 → 需要无监督 </a:t>
             </a:r>
             <a:r>
-              <a:rPr lang="en-US" altLang="zh-CN" sz="1050" b="1">
+              <a:rPr lang="en-US" altLang="zh-CN" sz="1250" b="1">
                 <a:solidFill>
                   <a:srgbClr val="34495E"/>
                 </a:solidFill>
@@ -21786,7 +21786,7 @@
               <a:t>+ </a:t>
             </a:r>
             <a:r>
-              <a:rPr lang="zh-CN" altLang="en-US" sz="1050" b="1">
+              <a:rPr lang="zh-CN" altLang="en-US" sz="1250" b="1">
                 <a:solidFill>
                   <a:srgbClr val="34495E"/>
                 </a:solidFill>
@@ -21796,7 +21796,7 @@
               <a:t>可解释的 </a:t>
             </a:r>
             <a:r>
-              <a:rPr lang="en-US" altLang="zh-CN" sz="1050" b="1">
+              <a:rPr lang="en-US" altLang="zh-CN" sz="1250" b="1">
                 <a:solidFill>
                   <a:srgbClr val="34495E"/>
                 </a:solidFill>
@@ -21806,7 +21806,7 @@
               <a:t>Top-K </a:t>
             </a:r>
             <a:r>
-              <a:rPr lang="zh-CN" altLang="en-US" sz="1050" b="1">
+              <a:rPr lang="zh-CN" altLang="en-US" sz="1250" b="1">
                 <a:solidFill>
                   <a:srgbClr val="34495E"/>
                 </a:solidFill>
@@ -21823,7 +21823,7 @@
           <p:cNvPr id="5" name="文本框 4">
             <a:extLst>
               <a:ext uri="{FF2B5EF4-FFF2-40B4-BE49-F238E27FC236}">
-                <a16:creationId xmlns:a16="http://schemas.microsoft.com/office/drawing/2014/main" id="{263B06C1-A597-FD75-C649-5D03CB5F710D}"/>
+                <a16:creationId xmlns:a16="http://schemas.microsoft.com/office/drawing/2014/main" id="{70DD4E8C-21C7-F9CC-BACE-A59E02EB54B1}"/>
               </a:ext>
             </a:extLst>
           </p:cNvPr>
@@ -21832,8 +21832,8 @@
         </p:nvSpPr>
         <p:spPr>
           <a:xfrm>
-            <a:off x="711200" y="1143000"/>
-            <a:ext cx="10922000" cy="153888"/>
+            <a:off x="711200" y="1168400"/>
+            <a:ext cx="10922000" cy="184666"/>
           </a:xfrm>
           <a:prstGeom prst="rect">
             <a:avLst/>
@@ -21852,7 +21852,7 @@
               </a:lnSpc>
             </a:pPr>
             <a:r>
-              <a:rPr lang="zh-CN" altLang="en-US" sz="1000">
+              <a:rPr lang="zh-CN" altLang="en-US" sz="1200">
                 <a:solidFill>
                   <a:srgbClr val="7F8C8D"/>
                 </a:solidFill>
@@ -21869,7 +21869,7 @@
           <p:cNvPr id="6" name="矩形: 圆角 5">
             <a:extLst>
               <a:ext uri="{FF2B5EF4-FFF2-40B4-BE49-F238E27FC236}">
-                <a16:creationId xmlns:a16="http://schemas.microsoft.com/office/drawing/2014/main" id="{E9936780-609B-414E-6477-17AB587B0C53}"/>
+                <a16:creationId xmlns:a16="http://schemas.microsoft.com/office/drawing/2014/main" id="{39DE1162-7E35-2DF0-5714-553327B698A3}"/>
               </a:ext>
             </a:extLst>
           </p:cNvPr>
@@ -21923,7 +21923,7 @@
           <p:cNvPr id="7" name="矩形 6">
             <a:extLst>
               <a:ext uri="{FF2B5EF4-FFF2-40B4-BE49-F238E27FC236}">
-                <a16:creationId xmlns:a16="http://schemas.microsoft.com/office/drawing/2014/main" id="{2A924FD4-C360-B431-9ECC-E572D0D2A5A3}"/>
+                <a16:creationId xmlns:a16="http://schemas.microsoft.com/office/drawing/2014/main" id="{FE08908C-1DE7-B5AD-0AAB-6DCA84A7FCA9}"/>
               </a:ext>
             </a:extLst>
           </p:cNvPr>
@@ -21991,7 +21991,7 @@
           <p:cNvPr id="8" name="文本框 7">
             <a:extLst>
               <a:ext uri="{FF2B5EF4-FFF2-40B4-BE49-F238E27FC236}">
-                <a16:creationId xmlns:a16="http://schemas.microsoft.com/office/drawing/2014/main" id="{842E5B60-E8F8-8726-F6B7-E8D3C24B0BBB}"/>
+                <a16:creationId xmlns:a16="http://schemas.microsoft.com/office/drawing/2014/main" id="{3DDF867F-8CA3-C1D6-31A6-BF5EABFA2AA5}"/>
               </a:ext>
             </a:extLst>
           </p:cNvPr>
@@ -22044,7 +22044,7 @@
           <p:cNvPr id="9" name="文本框 8">
             <a:extLst>
               <a:ext uri="{FF2B5EF4-FFF2-40B4-BE49-F238E27FC236}">
-                <a16:creationId xmlns:a16="http://schemas.microsoft.com/office/drawing/2014/main" id="{BED479D8-C9F3-E383-F386-2D0FC23BF4E0}"/>
+                <a16:creationId xmlns:a16="http://schemas.microsoft.com/office/drawing/2014/main" id="{526EEA41-F49D-6F3B-F497-39976CB470D0}"/>
               </a:ext>
             </a:extLst>
           </p:cNvPr>
@@ -22090,7 +22090,7 @@
           <p:cNvPr id="10" name="文本框 9">
             <a:extLst>
               <a:ext uri="{FF2B5EF4-FFF2-40B4-BE49-F238E27FC236}">
-                <a16:creationId xmlns:a16="http://schemas.microsoft.com/office/drawing/2014/main" id="{B4319B15-88F5-A30B-1C92-F7B25ECAD074}"/>
+                <a16:creationId xmlns:a16="http://schemas.microsoft.com/office/drawing/2014/main" id="{E8B3E6B0-F3DE-8CB4-6A2D-96B80B64631C}"/>
               </a:ext>
             </a:extLst>
           </p:cNvPr>
@@ -22230,7 +22230,7 @@
           <p:cNvPr id="11" name="矩形 10">
             <a:extLst>
               <a:ext uri="{FF2B5EF4-FFF2-40B4-BE49-F238E27FC236}">
-                <a16:creationId xmlns:a16="http://schemas.microsoft.com/office/drawing/2014/main" id="{0B203DA4-7AE0-1DDF-7684-DA364DB62432}"/>
+                <a16:creationId xmlns:a16="http://schemas.microsoft.com/office/drawing/2014/main" id="{6E6E6C31-00F2-43E3-8617-B9A9FBF778F4}"/>
               </a:ext>
             </a:extLst>
           </p:cNvPr>
@@ -22298,7 +22298,7 @@
           <p:cNvPr id="12" name="文本框 11">
             <a:extLst>
               <a:ext uri="{FF2B5EF4-FFF2-40B4-BE49-F238E27FC236}">
-                <a16:creationId xmlns:a16="http://schemas.microsoft.com/office/drawing/2014/main" id="{74DAA8EA-CEC5-0EE6-AADA-8D931E24D041}"/>
+                <a16:creationId xmlns:a16="http://schemas.microsoft.com/office/drawing/2014/main" id="{57C17C8B-2124-2C21-6BB2-F175C155ABB1}"/>
               </a:ext>
             </a:extLst>
           </p:cNvPr>
@@ -22384,7 +22384,7 @@
           <p:cNvPr id="13" name="矩形: 圆角 12">
             <a:extLst>
               <a:ext uri="{FF2B5EF4-FFF2-40B4-BE49-F238E27FC236}">
-                <a16:creationId xmlns:a16="http://schemas.microsoft.com/office/drawing/2014/main" id="{F9DECEFE-526F-E04D-6EAD-66A676FC0ED0}"/>
+                <a16:creationId xmlns:a16="http://schemas.microsoft.com/office/drawing/2014/main" id="{3CF91104-334B-49AB-4514-382EF5372658}"/>
               </a:ext>
             </a:extLst>
           </p:cNvPr>
@@ -22438,7 +22438,7 @@
           <p:cNvPr id="14" name="矩形 13">
             <a:extLst>
               <a:ext uri="{FF2B5EF4-FFF2-40B4-BE49-F238E27FC236}">
-                <a16:creationId xmlns:a16="http://schemas.microsoft.com/office/drawing/2014/main" id="{43A6027F-E27F-815C-3157-DB6787070116}"/>
+                <a16:creationId xmlns:a16="http://schemas.microsoft.com/office/drawing/2014/main" id="{10BB8105-BF41-C592-042C-C06ABCAB47A1}"/>
               </a:ext>
             </a:extLst>
           </p:cNvPr>
@@ -22506,7 +22506,7 @@
           <p:cNvPr id="15" name="文本框 14">
             <a:extLst>
               <a:ext uri="{FF2B5EF4-FFF2-40B4-BE49-F238E27FC236}">
-                <a16:creationId xmlns:a16="http://schemas.microsoft.com/office/drawing/2014/main" id="{C7305F40-C5F3-A04B-77EF-536BD772CBDD}"/>
+                <a16:creationId xmlns:a16="http://schemas.microsoft.com/office/drawing/2014/main" id="{3ECCF963-0F53-B526-B8D1-E7F4F6827FE6}"/>
               </a:ext>
             </a:extLst>
           </p:cNvPr>
@@ -22559,7 +22559,7 @@
           <p:cNvPr id="16" name="文本框 15">
             <a:extLst>
               <a:ext uri="{FF2B5EF4-FFF2-40B4-BE49-F238E27FC236}">
-                <a16:creationId xmlns:a16="http://schemas.microsoft.com/office/drawing/2014/main" id="{E7A6026E-0AE2-35FD-E547-443EE9DE87DF}"/>
+                <a16:creationId xmlns:a16="http://schemas.microsoft.com/office/drawing/2014/main" id="{D0844C6D-FD02-0CDA-CAE0-B76FAE4CD081}"/>
               </a:ext>
             </a:extLst>
           </p:cNvPr>
@@ -22605,7 +22605,7 @@
           <p:cNvPr id="17" name="文本框 16">
             <a:extLst>
               <a:ext uri="{FF2B5EF4-FFF2-40B4-BE49-F238E27FC236}">
-                <a16:creationId xmlns:a16="http://schemas.microsoft.com/office/drawing/2014/main" id="{14A148B2-1DE5-15F4-71E3-DE8D80CCE5C9}"/>
+                <a16:creationId xmlns:a16="http://schemas.microsoft.com/office/drawing/2014/main" id="{CE38CBE6-7B93-49FC-CAB6-174DBBD21F93}"/>
               </a:ext>
             </a:extLst>
           </p:cNvPr>
@@ -22715,7 +22715,7 @@
           <p:cNvPr id="18" name="矩形 17">
             <a:extLst>
               <a:ext uri="{FF2B5EF4-FFF2-40B4-BE49-F238E27FC236}">
-                <a16:creationId xmlns:a16="http://schemas.microsoft.com/office/drawing/2014/main" id="{1E10AB2D-0BCD-281A-FA66-58FC38A8646B}"/>
+                <a16:creationId xmlns:a16="http://schemas.microsoft.com/office/drawing/2014/main" id="{203E7D7C-8039-532D-14A4-16D62D3DA203}"/>
               </a:ext>
             </a:extLst>
           </p:cNvPr>
@@ -22783,7 +22783,7 @@
           <p:cNvPr id="19" name="文本框 18">
             <a:extLst>
               <a:ext uri="{FF2B5EF4-FFF2-40B4-BE49-F238E27FC236}">
-                <a16:creationId xmlns:a16="http://schemas.microsoft.com/office/drawing/2014/main" id="{7532C36A-B035-7477-029E-13E7BDF222FE}"/>
+                <a16:creationId xmlns:a16="http://schemas.microsoft.com/office/drawing/2014/main" id="{3EAA9AA4-CFFE-BC57-3826-ABDEE03C0E52}"/>
               </a:ext>
             </a:extLst>
           </p:cNvPr>
@@ -22889,7 +22889,7 @@
           <p:cNvPr id="20" name="矩形: 圆角 19">
             <a:extLst>
               <a:ext uri="{FF2B5EF4-FFF2-40B4-BE49-F238E27FC236}">
-                <a16:creationId xmlns:a16="http://schemas.microsoft.com/office/drawing/2014/main" id="{850DC67B-EB29-E3C6-E011-3D95A5816E5A}"/>
+                <a16:creationId xmlns:a16="http://schemas.microsoft.com/office/drawing/2014/main" id="{E2677346-809A-7492-E887-49F0681CD951}"/>
               </a:ext>
             </a:extLst>
           </p:cNvPr>
@@ -22943,7 +22943,7 @@
           <p:cNvPr id="21" name="矩形 20">
             <a:extLst>
               <a:ext uri="{FF2B5EF4-FFF2-40B4-BE49-F238E27FC236}">
-                <a16:creationId xmlns:a16="http://schemas.microsoft.com/office/drawing/2014/main" id="{1FFD59CD-1AAA-8243-7AFA-24E36346C259}"/>
+                <a16:creationId xmlns:a16="http://schemas.microsoft.com/office/drawing/2014/main" id="{DA6DE946-9916-0E68-D1AE-479317B61633}"/>
               </a:ext>
             </a:extLst>
           </p:cNvPr>
@@ -23011,7 +23011,7 @@
           <p:cNvPr id="22" name="文本框 21">
             <a:extLst>
               <a:ext uri="{FF2B5EF4-FFF2-40B4-BE49-F238E27FC236}">
-                <a16:creationId xmlns:a16="http://schemas.microsoft.com/office/drawing/2014/main" id="{5099A26F-A18C-DA79-674A-5A40AB08EC98}"/>
+                <a16:creationId xmlns:a16="http://schemas.microsoft.com/office/drawing/2014/main" id="{4F609355-31A7-7D7E-59C6-29185E6303E5}"/>
               </a:ext>
             </a:extLst>
           </p:cNvPr>
@@ -23064,7 +23064,7 @@
           <p:cNvPr id="23" name="文本框 22">
             <a:extLst>
               <a:ext uri="{FF2B5EF4-FFF2-40B4-BE49-F238E27FC236}">
-                <a16:creationId xmlns:a16="http://schemas.microsoft.com/office/drawing/2014/main" id="{ECF50165-CFEF-4CE7-9860-C3E007C34600}"/>
+                <a16:creationId xmlns:a16="http://schemas.microsoft.com/office/drawing/2014/main" id="{2CDBA3E3-F846-5742-112A-27863AF38442}"/>
               </a:ext>
             </a:extLst>
           </p:cNvPr>
@@ -23110,7 +23110,7 @@
           <p:cNvPr id="24" name="文本框 23">
             <a:extLst>
               <a:ext uri="{FF2B5EF4-FFF2-40B4-BE49-F238E27FC236}">
-                <a16:creationId xmlns:a16="http://schemas.microsoft.com/office/drawing/2014/main" id="{2681B187-1D6C-02B9-D870-A3DFC6D1C552}"/>
+                <a16:creationId xmlns:a16="http://schemas.microsoft.com/office/drawing/2014/main" id="{D3F30740-34FD-249C-5D8C-9935EC9E2108}"/>
               </a:ext>
             </a:extLst>
           </p:cNvPr>
@@ -23287,7 +23287,7 @@
           <p:cNvPr id="25" name="矩形 24">
             <a:extLst>
               <a:ext uri="{FF2B5EF4-FFF2-40B4-BE49-F238E27FC236}">
-                <a16:creationId xmlns:a16="http://schemas.microsoft.com/office/drawing/2014/main" id="{A3675DE9-1838-7F9C-3974-FB54DF33F2AE}"/>
+                <a16:creationId xmlns:a16="http://schemas.microsoft.com/office/drawing/2014/main" id="{570FD2DB-5407-3E40-FD9B-46EEEF5B24FD}"/>
               </a:ext>
             </a:extLst>
           </p:cNvPr>
@@ -23355,7 +23355,7 @@
           <p:cNvPr id="26" name="文本框 25">
             <a:extLst>
               <a:ext uri="{FF2B5EF4-FFF2-40B4-BE49-F238E27FC236}">
-                <a16:creationId xmlns:a16="http://schemas.microsoft.com/office/drawing/2014/main" id="{16E5196F-3F8D-8623-C2DB-A9251C5FEC3F}"/>
+                <a16:creationId xmlns:a16="http://schemas.microsoft.com/office/drawing/2014/main" id="{EB3CFAA0-3049-EEAD-D3EC-F4D1050525EF}"/>
               </a:ext>
             </a:extLst>
           </p:cNvPr>
@@ -23441,7 +23441,7 @@
           <p:cNvPr id="27" name="矩形: 圆角 26">
             <a:extLst>
               <a:ext uri="{FF2B5EF4-FFF2-40B4-BE49-F238E27FC236}">
-                <a16:creationId xmlns:a16="http://schemas.microsoft.com/office/drawing/2014/main" id="{67D84245-5CF9-231A-21BC-4C0251095BB8}"/>
+                <a16:creationId xmlns:a16="http://schemas.microsoft.com/office/drawing/2014/main" id="{6470A7BB-D914-34A3-DE35-7F50196C9331}"/>
               </a:ext>
             </a:extLst>
           </p:cNvPr>
@@ -23509,7 +23509,7 @@
           <p:cNvPr id="28" name="文本框 27">
             <a:extLst>
               <a:ext uri="{FF2B5EF4-FFF2-40B4-BE49-F238E27FC236}">
-                <a16:creationId xmlns:a16="http://schemas.microsoft.com/office/drawing/2014/main" id="{849CA31D-1FFE-8F7C-618D-E6B2A7445B1B}"/>
+                <a16:creationId xmlns:a16="http://schemas.microsoft.com/office/drawing/2014/main" id="{15FBDABE-8CF2-E911-B243-59B76668EBCC}"/>
               </a:ext>
             </a:extLst>
           </p:cNvPr>
@@ -23575,7 +23575,7 @@
           <p:cNvPr id="29" name="文本框 28">
             <a:extLst>
               <a:ext uri="{FF2B5EF4-FFF2-40B4-BE49-F238E27FC236}">
-                <a16:creationId xmlns:a16="http://schemas.microsoft.com/office/drawing/2014/main" id="{A10BC862-5811-DCA2-E655-5AD7259D6540}"/>
+                <a16:creationId xmlns:a16="http://schemas.microsoft.com/office/drawing/2014/main" id="{9E75F946-647B-495D-6B0D-ACD752A96AB7}"/>
               </a:ext>
             </a:extLst>
           </p:cNvPr>
@@ -23639,7 +23639,7 @@
     </p:spTree>
     <p:extLst>
       <p:ext uri="{BB962C8B-B14F-4D97-AF65-F5344CB8AC3E}">
-        <p14:creationId xmlns:p14="http://schemas.microsoft.com/office/powerpoint/2010/main" val="68639641"/>
+        <p14:creationId xmlns:p14="http://schemas.microsoft.com/office/powerpoint/2010/main" val="945038689"/>
       </p:ext>
     </p:extLst>
   </p:cSld>
@@ -23679,7 +23679,7 @@
           <p:cNvPr id="2" name="矩形 1">
             <a:extLst>
               <a:ext uri="{FF2B5EF4-FFF2-40B4-BE49-F238E27FC236}">
-                <a16:creationId xmlns:a16="http://schemas.microsoft.com/office/drawing/2014/main" id="{58E4D891-FCE3-8D93-705A-303C7D9AB544}"/>
+                <a16:creationId xmlns:a16="http://schemas.microsoft.com/office/drawing/2014/main" id="{36A0E10F-631B-2561-08F5-AD618431FA81}"/>
               </a:ext>
             </a:extLst>
           </p:cNvPr>
@@ -23747,7 +23747,7 @@
           <p:cNvPr id="3" name="文本框 2">
             <a:extLst>
               <a:ext uri="{FF2B5EF4-FFF2-40B4-BE49-F238E27FC236}">
-                <a16:creationId xmlns:a16="http://schemas.microsoft.com/office/drawing/2014/main" id="{7B72161F-CABE-79C8-6051-3CDE110174B1}"/>
+                <a16:creationId xmlns:a16="http://schemas.microsoft.com/office/drawing/2014/main" id="{AFA4DD96-A345-C8D9-3AF2-7D16EF4BC4CB}"/>
               </a:ext>
             </a:extLst>
           </p:cNvPr>
@@ -23793,7 +23793,7 @@
           <p:cNvPr id="4" name="文本框 3">
             <a:extLst>
               <a:ext uri="{FF2B5EF4-FFF2-40B4-BE49-F238E27FC236}">
-                <a16:creationId xmlns:a16="http://schemas.microsoft.com/office/drawing/2014/main" id="{7C5B68BC-F814-D54C-3859-14F16E136B24}"/>
+                <a16:creationId xmlns:a16="http://schemas.microsoft.com/office/drawing/2014/main" id="{428712E1-E11F-72A0-3F2C-DC7A29BF676B}"/>
               </a:ext>
             </a:extLst>
           </p:cNvPr>
@@ -23803,7 +23803,7 @@
         <p:spPr>
           <a:xfrm>
             <a:off x="711200" y="914400"/>
-            <a:ext cx="10922000" cy="161583"/>
+            <a:ext cx="10922000" cy="196849"/>
           </a:xfrm>
           <a:prstGeom prst="rect">
             <a:avLst/>
@@ -23818,11 +23818,11 @@
           <a:p>
             <a:pPr>
               <a:lnSpc>
-                <a:spcPct val="105000"/>
+                <a:spcPct val="110000"/>
               </a:lnSpc>
             </a:pPr>
             <a:r>
-              <a:rPr lang="zh-CN" altLang="en-US" sz="1050">
+              <a:rPr lang="zh-CN" altLang="en-US" sz="1250">
                 <a:solidFill>
                   <a:srgbClr val="7F8C8D"/>
                 </a:solidFill>
@@ -23832,7 +23832,7 @@
               <a:t>探查后修正：数据零缺失，无需填充；</a:t>
             </a:r>
             <a:r>
-              <a:rPr lang="en-US" altLang="zh-CN" sz="1050">
+              <a:rPr lang="en-US" altLang="zh-CN" sz="1250">
                 <a:solidFill>
                   <a:srgbClr val="7F8C8D"/>
                 </a:solidFill>
@@ -23842,7 +23842,7 @@
               <a:t>Abnormal_Type / Risk_Class </a:t>
             </a:r>
             <a:r>
-              <a:rPr lang="zh-CN" altLang="en-US" sz="1050">
+              <a:rPr lang="zh-CN" altLang="en-US" sz="1250">
                 <a:solidFill>
                   <a:srgbClr val="7F8C8D"/>
                 </a:solidFill>
@@ -23852,7 +23852,7 @@
               <a:t>是标签</a:t>
             </a:r>
             <a:r>
-              <a:rPr lang="en-US" altLang="zh-CN" sz="1050">
+              <a:rPr lang="en-US" altLang="zh-CN" sz="1250">
                 <a:solidFill>
                   <a:srgbClr val="7F8C8D"/>
                 </a:solidFill>
@@ -23862,7 +23862,7 @@
               <a:t>/</a:t>
             </a:r>
             <a:r>
-              <a:rPr lang="zh-CN" altLang="en-US" sz="1050">
+              <a:rPr lang="zh-CN" altLang="en-US" sz="1250">
                 <a:solidFill>
                   <a:srgbClr val="7F8C8D"/>
                 </a:solidFill>
@@ -23879,7 +23879,7 @@
           <p:cNvPr id="5" name="矩形: 圆角 4">
             <a:extLst>
               <a:ext uri="{FF2B5EF4-FFF2-40B4-BE49-F238E27FC236}">
-                <a16:creationId xmlns:a16="http://schemas.microsoft.com/office/drawing/2014/main" id="{7CAF39C4-07F8-1F2F-BF1A-EB9754F6BEA4}"/>
+                <a16:creationId xmlns:a16="http://schemas.microsoft.com/office/drawing/2014/main" id="{F36EE9AF-F163-EBC8-8314-97D2AAD60DF6}"/>
               </a:ext>
             </a:extLst>
           </p:cNvPr>
@@ -23947,7 +23947,7 @@
           <p:cNvPr id="6" name="文本框 5">
             <a:extLst>
               <a:ext uri="{FF2B5EF4-FFF2-40B4-BE49-F238E27FC236}">
-                <a16:creationId xmlns:a16="http://schemas.microsoft.com/office/drawing/2014/main" id="{75F2F169-DA30-BB79-56F6-F44E4820EF6A}"/>
+                <a16:creationId xmlns:a16="http://schemas.microsoft.com/office/drawing/2014/main" id="{730FA037-A279-7F66-FCB6-DC27BFDCA19A}"/>
               </a:ext>
             </a:extLst>
           </p:cNvPr>
@@ -24103,7 +24103,7 @@
           <p:cNvPr id="8" name="图片 7">
             <a:extLst>
               <a:ext uri="{FF2B5EF4-FFF2-40B4-BE49-F238E27FC236}">
-                <a16:creationId xmlns:a16="http://schemas.microsoft.com/office/drawing/2014/main" id="{2AC4C706-F407-254E-8E7D-A116E215D044}"/>
+                <a16:creationId xmlns:a16="http://schemas.microsoft.com/office/drawing/2014/main" id="{684A00F7-1B43-1558-A35B-FD7F0E79DF26}"/>
               </a:ext>
             </a:extLst>
           </p:cNvPr>
@@ -24139,7 +24139,7 @@
           <p:cNvPr id="9" name="矩形 8">
             <a:extLst>
               <a:ext uri="{FF2B5EF4-FFF2-40B4-BE49-F238E27FC236}">
-                <a16:creationId xmlns:a16="http://schemas.microsoft.com/office/drawing/2014/main" id="{B58D5F1F-1C01-F476-A589-A43F55165315}"/>
+                <a16:creationId xmlns:a16="http://schemas.microsoft.com/office/drawing/2014/main" id="{6BFDF4A6-6095-FB4A-DA49-5B5F5C4BCF3E}"/>
               </a:ext>
             </a:extLst>
           </p:cNvPr>
@@ -24207,7 +24207,7 @@
           <p:cNvPr id="10" name="文本框 9">
             <a:extLst>
               <a:ext uri="{FF2B5EF4-FFF2-40B4-BE49-F238E27FC236}">
-                <a16:creationId xmlns:a16="http://schemas.microsoft.com/office/drawing/2014/main" id="{FADAB4B8-239D-597D-87ED-4F1098FD6B92}"/>
+                <a16:creationId xmlns:a16="http://schemas.microsoft.com/office/drawing/2014/main" id="{99F87680-E740-1D59-0664-62FBC8D48976}"/>
               </a:ext>
             </a:extLst>
           </p:cNvPr>
@@ -24293,7 +24293,7 @@
           <p:cNvPr id="11" name="文本框 10">
             <a:extLst>
               <a:ext uri="{FF2B5EF4-FFF2-40B4-BE49-F238E27FC236}">
-                <a16:creationId xmlns:a16="http://schemas.microsoft.com/office/drawing/2014/main" id="{7A8A0ABD-2ED9-A1C0-B8F9-B8222C941F4B}"/>
+                <a16:creationId xmlns:a16="http://schemas.microsoft.com/office/drawing/2014/main" id="{08A82549-66C8-ADA7-3B07-690C66F230D7}"/>
               </a:ext>
             </a:extLst>
           </p:cNvPr>
@@ -24344,7 +24344,7 @@
     </p:spTree>
     <p:extLst>
       <p:ext uri="{BB962C8B-B14F-4D97-AF65-F5344CB8AC3E}">
-        <p14:creationId xmlns:p14="http://schemas.microsoft.com/office/powerpoint/2010/main" val="1312085662"/>
+        <p14:creationId xmlns:p14="http://schemas.microsoft.com/office/powerpoint/2010/main" val="3685410020"/>
       </p:ext>
     </p:extLst>
   </p:cSld>
@@ -24384,7 +24384,7 @@
           <p:cNvPr id="2" name="矩形 1">
             <a:extLst>
               <a:ext uri="{FF2B5EF4-FFF2-40B4-BE49-F238E27FC236}">
-                <a16:creationId xmlns:a16="http://schemas.microsoft.com/office/drawing/2014/main" id="{2F8D8BF2-9CF7-896B-8A3F-FB1DAD497457}"/>
+                <a16:creationId xmlns:a16="http://schemas.microsoft.com/office/drawing/2014/main" id="{75732DE0-9B1E-E3E3-79C6-3E4389D7365D}"/>
               </a:ext>
             </a:extLst>
           </p:cNvPr>
@@ -24452,7 +24452,7 @@
           <p:cNvPr id="3" name="文本框 2">
             <a:extLst>
               <a:ext uri="{FF2B5EF4-FFF2-40B4-BE49-F238E27FC236}">
-                <a16:creationId xmlns:a16="http://schemas.microsoft.com/office/drawing/2014/main" id="{212F62F2-DCEC-C094-D455-B32AAB9E3604}"/>
+                <a16:creationId xmlns:a16="http://schemas.microsoft.com/office/drawing/2014/main" id="{F8B35AE4-372B-631D-052E-293DB0887D39}"/>
               </a:ext>
             </a:extLst>
           </p:cNvPr>
@@ -24538,7 +24538,7 @@
           <p:cNvPr id="4" name="文本框 3">
             <a:extLst>
               <a:ext uri="{FF2B5EF4-FFF2-40B4-BE49-F238E27FC236}">
-                <a16:creationId xmlns:a16="http://schemas.microsoft.com/office/drawing/2014/main" id="{B8CABE8B-1969-9708-3E85-F960D6A89346}"/>
+                <a16:creationId xmlns:a16="http://schemas.microsoft.com/office/drawing/2014/main" id="{DE5DFDF1-2FB0-AEC4-5DB7-6E0004EFAB34}"/>
               </a:ext>
             </a:extLst>
           </p:cNvPr>
@@ -24548,7 +24548,7 @@
         <p:spPr>
           <a:xfrm>
             <a:off x="711200" y="914400"/>
-            <a:ext cx="10922000" cy="161583"/>
+            <a:ext cx="10922000" cy="196849"/>
           </a:xfrm>
           <a:prstGeom prst="rect">
             <a:avLst/>
@@ -24563,11 +24563,11 @@
           <a:p>
             <a:pPr>
               <a:lnSpc>
-                <a:spcPct val="105000"/>
+                <a:spcPct val="110000"/>
               </a:lnSpc>
             </a:pPr>
             <a:r>
-              <a:rPr lang="zh-CN" altLang="en-US" sz="1050">
+              <a:rPr lang="zh-CN" altLang="en-US" sz="1250">
                 <a:solidFill>
                   <a:srgbClr val="7F8C8D"/>
                 </a:solidFill>
@@ -24577,7 +24577,7 @@
               <a:t>常量列、泄漏列、</a:t>
             </a:r>
             <a:r>
-              <a:rPr lang="en-US" altLang="zh-CN" sz="1050">
+              <a:rPr lang="en-US" altLang="zh-CN" sz="1250">
                 <a:solidFill>
                   <a:srgbClr val="7F8C8D"/>
                 </a:solidFill>
@@ -24587,7 +24587,7 @@
               <a:t>ID/</a:t>
             </a:r>
             <a:r>
-              <a:rPr lang="zh-CN" altLang="en-US" sz="1050">
+              <a:rPr lang="zh-CN" altLang="en-US" sz="1250">
                 <a:solidFill>
                   <a:srgbClr val="7F8C8D"/>
                 </a:solidFill>
@@ -24597,7 +24597,7 @@
               <a:t>名称列剔除；低</a:t>
             </a:r>
             <a:r>
-              <a:rPr lang="en-US" altLang="zh-CN" sz="1050">
+              <a:rPr lang="en-US" altLang="zh-CN" sz="1250">
                 <a:solidFill>
                   <a:srgbClr val="7F8C8D"/>
                 </a:solidFill>
@@ -24607,7 +24607,7 @@
               <a:t>/</a:t>
             </a:r>
             <a:r>
-              <a:rPr lang="zh-CN" altLang="en-US" sz="1050">
+              <a:rPr lang="zh-CN" altLang="en-US" sz="1250">
                 <a:solidFill>
                   <a:srgbClr val="7F8C8D"/>
                 </a:solidFill>
@@ -24617,7 +24617,7 @@
               <a:t>中基数类别 </a:t>
             </a:r>
             <a:r>
-              <a:rPr lang="en-US" altLang="zh-CN" sz="1050">
+              <a:rPr lang="en-US" altLang="zh-CN" sz="1250">
                 <a:solidFill>
                   <a:srgbClr val="7F8C8D"/>
                 </a:solidFill>
@@ -24627,7 +24627,7 @@
               <a:t>One-Hot</a:t>
             </a:r>
             <a:r>
-              <a:rPr lang="zh-CN" altLang="en-US" sz="1050">
+              <a:rPr lang="zh-CN" altLang="en-US" sz="1250">
                 <a:solidFill>
                   <a:srgbClr val="7F8C8D"/>
                 </a:solidFill>
@@ -24644,7 +24644,7 @@
           <p:cNvPr id="5" name="矩形: 圆角 4">
             <a:extLst>
               <a:ext uri="{FF2B5EF4-FFF2-40B4-BE49-F238E27FC236}">
-                <a16:creationId xmlns:a16="http://schemas.microsoft.com/office/drawing/2014/main" id="{44974BDA-212A-3220-3335-851A16BF7104}"/>
+                <a16:creationId xmlns:a16="http://schemas.microsoft.com/office/drawing/2014/main" id="{BDACE3AC-1533-50D9-D1CB-A55640CE7CF9}"/>
               </a:ext>
             </a:extLst>
           </p:cNvPr>
@@ -24712,7 +24712,7 @@
           <p:cNvPr id="6" name="文本框 5">
             <a:extLst>
               <a:ext uri="{FF2B5EF4-FFF2-40B4-BE49-F238E27FC236}">
-                <a16:creationId xmlns:a16="http://schemas.microsoft.com/office/drawing/2014/main" id="{F9C1F3D8-5DE9-CC1C-DFB0-933E143B7070}"/>
+                <a16:creationId xmlns:a16="http://schemas.microsoft.com/office/drawing/2014/main" id="{C7AC7B1A-5770-B6B7-1B7D-DC3BD96FAF10}"/>
               </a:ext>
             </a:extLst>
           </p:cNvPr>
@@ -24888,7 +24888,7 @@
           <p:cNvPr id="8" name="图片 7">
             <a:extLst>
               <a:ext uri="{FF2B5EF4-FFF2-40B4-BE49-F238E27FC236}">
-                <a16:creationId xmlns:a16="http://schemas.microsoft.com/office/drawing/2014/main" id="{40C575EF-AB6D-410B-2A80-E5F07B1F0B0E}"/>
+                <a16:creationId xmlns:a16="http://schemas.microsoft.com/office/drawing/2014/main" id="{50A83BB2-C3AA-5F7B-0E41-7B493AABD73E}"/>
               </a:ext>
             </a:extLst>
           </p:cNvPr>
@@ -24924,7 +24924,7 @@
           <p:cNvPr id="9" name="矩形 8">
             <a:extLst>
               <a:ext uri="{FF2B5EF4-FFF2-40B4-BE49-F238E27FC236}">
-                <a16:creationId xmlns:a16="http://schemas.microsoft.com/office/drawing/2014/main" id="{7CEEF19C-2B2B-00B9-826F-55E216B2429E}"/>
+                <a16:creationId xmlns:a16="http://schemas.microsoft.com/office/drawing/2014/main" id="{4E35E616-A97F-00D7-26EE-5405CC2C2D16}"/>
               </a:ext>
             </a:extLst>
           </p:cNvPr>
@@ -24992,7 +24992,7 @@
           <p:cNvPr id="10" name="文本框 9">
             <a:extLst>
               <a:ext uri="{FF2B5EF4-FFF2-40B4-BE49-F238E27FC236}">
-                <a16:creationId xmlns:a16="http://schemas.microsoft.com/office/drawing/2014/main" id="{AE1E7531-9EDA-8D77-8264-A4D57146B9B4}"/>
+                <a16:creationId xmlns:a16="http://schemas.microsoft.com/office/drawing/2014/main" id="{2DA01172-0AE5-B820-BD22-0525169D933A}"/>
               </a:ext>
             </a:extLst>
           </p:cNvPr>
@@ -25078,7 +25078,7 @@
           <p:cNvPr id="11" name="文本框 10">
             <a:extLst>
               <a:ext uri="{FF2B5EF4-FFF2-40B4-BE49-F238E27FC236}">
-                <a16:creationId xmlns:a16="http://schemas.microsoft.com/office/drawing/2014/main" id="{9F5EB496-B1E3-1638-F5B2-60B496C3F844}"/>
+                <a16:creationId xmlns:a16="http://schemas.microsoft.com/office/drawing/2014/main" id="{B0E22FCE-6D93-277C-9AC9-A0B43961B413}"/>
               </a:ext>
             </a:extLst>
           </p:cNvPr>
@@ -25129,7 +25129,7 @@
     </p:spTree>
     <p:extLst>
       <p:ext uri="{BB962C8B-B14F-4D97-AF65-F5344CB8AC3E}">
-        <p14:creationId xmlns:p14="http://schemas.microsoft.com/office/powerpoint/2010/main" val="1310925843"/>
+        <p14:creationId xmlns:p14="http://schemas.microsoft.com/office/powerpoint/2010/main" val="3825251049"/>
       </p:ext>
     </p:extLst>
   </p:cSld>
@@ -25169,7 +25169,7 @@
           <p:cNvPr id="2" name="矩形 1">
             <a:extLst>
               <a:ext uri="{FF2B5EF4-FFF2-40B4-BE49-F238E27FC236}">
-                <a16:creationId xmlns:a16="http://schemas.microsoft.com/office/drawing/2014/main" id="{434CC859-B798-2314-A940-9D6180415F63}"/>
+                <a16:creationId xmlns:a16="http://schemas.microsoft.com/office/drawing/2014/main" id="{DF55C701-E074-97C8-D3A4-FB2126955C4C}"/>
               </a:ext>
             </a:extLst>
           </p:cNvPr>
@@ -25237,7 +25237,7 @@
           <p:cNvPr id="3" name="文本框 2">
             <a:extLst>
               <a:ext uri="{FF2B5EF4-FFF2-40B4-BE49-F238E27FC236}">
-                <a16:creationId xmlns:a16="http://schemas.microsoft.com/office/drawing/2014/main" id="{88C353C8-94F9-4D1C-4E9F-58769C54670D}"/>
+                <a16:creationId xmlns:a16="http://schemas.microsoft.com/office/drawing/2014/main" id="{0F66F9B8-4FB8-5598-0008-5AFAF28CDE58}"/>
               </a:ext>
             </a:extLst>
           </p:cNvPr>
@@ -25283,7 +25283,7 @@
           <p:cNvPr id="4" name="文本框 3">
             <a:extLst>
               <a:ext uri="{FF2B5EF4-FFF2-40B4-BE49-F238E27FC236}">
-                <a16:creationId xmlns:a16="http://schemas.microsoft.com/office/drawing/2014/main" id="{72496D5B-37AE-86F9-979C-9C703BB7B116}"/>
+                <a16:creationId xmlns:a16="http://schemas.microsoft.com/office/drawing/2014/main" id="{AFA98AA0-F884-F464-5C4A-293DFCE7CE23}"/>
               </a:ext>
             </a:extLst>
           </p:cNvPr>
@@ -25292,8 +25292,8 @@
         </p:nvSpPr>
         <p:spPr>
           <a:xfrm>
-            <a:off x="711200" y="863600"/>
-            <a:ext cx="10922000" cy="153888"/>
+            <a:off x="711200" y="838200"/>
+            <a:ext cx="10922000" cy="184666"/>
           </a:xfrm>
           <a:prstGeom prst="rect">
             <a:avLst/>
@@ -25312,7 +25312,7 @@
               </a:lnSpc>
             </a:pPr>
             <a:r>
-              <a:rPr lang="zh-CN" altLang="en-US" sz="1000">
+              <a:rPr lang="zh-CN" altLang="en-US" sz="1200">
                 <a:solidFill>
                   <a:srgbClr val="7F8C8D"/>
                 </a:solidFill>
@@ -25322,7 +25322,7 @@
               <a:t>先 </a:t>
             </a:r>
             <a:r>
-              <a:rPr lang="en-US" altLang="zh-CN" sz="1000">
+              <a:rPr lang="en-US" altLang="zh-CN" sz="1200">
                 <a:solidFill>
                   <a:srgbClr val="7F8C8D"/>
                 </a:solidFill>
@@ -25332,7 +25332,7 @@
               <a:t>log1p </a:t>
             </a:r>
             <a:r>
-              <a:rPr lang="zh-CN" altLang="en-US" sz="1000">
+              <a:rPr lang="zh-CN" altLang="en-US" sz="1200">
                 <a:solidFill>
                   <a:srgbClr val="7F8C8D"/>
                 </a:solidFill>
@@ -25342,7 +25342,7 @@
               <a:t>压缩量级，再 </a:t>
             </a:r>
             <a:r>
-              <a:rPr lang="en-US" altLang="zh-CN" sz="1000">
+              <a:rPr lang="en-US" altLang="zh-CN" sz="1200">
                 <a:solidFill>
                   <a:srgbClr val="7F8C8D"/>
                 </a:solidFill>
@@ -25352,7 +25352,7 @@
               <a:t>z-score </a:t>
             </a:r>
             <a:r>
-              <a:rPr lang="zh-CN" altLang="en-US" sz="1000">
+              <a:rPr lang="zh-CN" altLang="en-US" sz="1200">
                 <a:solidFill>
                   <a:srgbClr val="7F8C8D"/>
                 </a:solidFill>
@@ -25362,7 +25362,7 @@
               <a:t>标准化；</a:t>
             </a:r>
             <a:r>
-              <a:rPr lang="en-US" altLang="zh-CN" sz="1000">
+              <a:rPr lang="en-US" altLang="zh-CN" sz="1200">
                 <a:solidFill>
                   <a:srgbClr val="7F8C8D"/>
                 </a:solidFill>
@@ -25372,7 +25372,7 @@
               <a:t>4 </a:t>
             </a:r>
             <a:r>
-              <a:rPr lang="zh-CN" altLang="en-US" sz="1000">
+              <a:rPr lang="zh-CN" altLang="en-US" sz="1200">
                 <a:solidFill>
                   <a:srgbClr val="7F8C8D"/>
                 </a:solidFill>
@@ -25382,7 +25382,7 @@
               <a:t>个金额</a:t>
             </a:r>
             <a:r>
-              <a:rPr lang="en-US" altLang="zh-CN" sz="1000">
+              <a:rPr lang="en-US" altLang="zh-CN" sz="1200">
                 <a:solidFill>
                   <a:srgbClr val="7F8C8D"/>
                 </a:solidFill>
@@ -25392,7 +25392,7 @@
               <a:t>/</a:t>
             </a:r>
             <a:r>
-              <a:rPr lang="zh-CN" altLang="en-US" sz="1000">
+              <a:rPr lang="zh-CN" altLang="en-US" sz="1200">
                 <a:solidFill>
                   <a:srgbClr val="7F8C8D"/>
                 </a:solidFill>
@@ -25409,7 +25409,7 @@
           <p:cNvPr id="5" name="文本框 4">
             <a:extLst>
               <a:ext uri="{FF2B5EF4-FFF2-40B4-BE49-F238E27FC236}">
-                <a16:creationId xmlns:a16="http://schemas.microsoft.com/office/drawing/2014/main" id="{047C3A68-F9AC-7B7B-53C2-89AA75D69B85}"/>
+                <a16:creationId xmlns:a16="http://schemas.microsoft.com/office/drawing/2014/main" id="{AC2FE780-31E9-73EE-B3AF-9814B9249295}"/>
               </a:ext>
             </a:extLst>
           </p:cNvPr>
@@ -25418,8 +25418,8 @@
         </p:nvSpPr>
         <p:spPr>
           <a:xfrm>
-            <a:off x="711200" y="1092200"/>
-            <a:ext cx="10922000" cy="153888"/>
+            <a:off x="711200" y="1143000"/>
+            <a:ext cx="10922000" cy="184666"/>
           </a:xfrm>
           <a:prstGeom prst="rect">
             <a:avLst/>
@@ -25438,7 +25438,7 @@
               </a:lnSpc>
             </a:pPr>
             <a:r>
-              <a:rPr lang="zh-CN" altLang="en-US" sz="1000" b="1">
+              <a:rPr lang="zh-CN" altLang="en-US" sz="1200" b="1">
                 <a:solidFill>
                   <a:srgbClr val="E67E22"/>
                 </a:solidFill>
@@ -25448,7 +25448,7 @@
               <a:t>关键发现：</a:t>
             </a:r>
             <a:r>
-              <a:rPr lang="en-US" altLang="zh-CN" sz="1000" b="1">
+              <a:rPr lang="en-US" altLang="zh-CN" sz="1200" b="1">
                 <a:solidFill>
                   <a:srgbClr val="E67E22"/>
                 </a:solidFill>
@@ -25458,7 +25458,7 @@
               <a:t>131 </a:t>
             </a:r>
             <a:r>
-              <a:rPr lang="zh-CN" altLang="en-US" sz="1000" b="1">
+              <a:rPr lang="zh-CN" altLang="en-US" sz="1200" b="1">
                 <a:solidFill>
                   <a:srgbClr val="E67E22"/>
                 </a:solidFill>
@@ -25468,7 +25468,7 @@
               <a:t>笔金额恰好 </a:t>
             </a:r>
             <a:r>
-              <a:rPr lang="en-US" altLang="zh-CN" sz="1000" b="1">
+              <a:rPr lang="en-US" altLang="zh-CN" sz="1200" b="1">
                 <a:solidFill>
                   <a:srgbClr val="E67E22"/>
                 </a:solidFill>
@@ -25478,7 +25478,7 @@
               <a:t>500,000 </a:t>
             </a:r>
             <a:r>
-              <a:rPr lang="zh-CN" altLang="en-US" sz="1000" b="1">
+              <a:rPr lang="zh-CN" altLang="en-US" sz="1200" b="1">
                 <a:solidFill>
                   <a:srgbClr val="E67E22"/>
                 </a:solidFill>
@@ -25488,7 +25488,7 @@
               <a:t>元，全部为金额突增异常</a:t>
             </a:r>
             <a:r>
-              <a:rPr lang="en-US" altLang="zh-CN" sz="1000" b="1">
+              <a:rPr lang="en-US" altLang="zh-CN" sz="1200" b="1">
                 <a:solidFill>
                   <a:srgbClr val="E67E22"/>
                 </a:solidFill>
@@ -25498,7 +25498,7 @@
               <a:t>——log1p </a:t>
             </a:r>
             <a:r>
-              <a:rPr lang="zh-CN" altLang="en-US" sz="1000" b="1">
+              <a:rPr lang="zh-CN" altLang="en-US" sz="1200" b="1">
                 <a:solidFill>
                   <a:srgbClr val="E67E22"/>
                 </a:solidFill>
@@ -25508,7 +25508,7 @@
               <a:t>后形成 </a:t>
             </a:r>
             <a:r>
-              <a:rPr lang="en-US" altLang="zh-CN" sz="1000" b="1">
+              <a:rPr lang="en-US" altLang="zh-CN" sz="1200" b="1">
                 <a:solidFill>
                   <a:srgbClr val="E67E22"/>
                 </a:solidFill>
@@ -25518,7 +25518,7 @@
               <a:t>13.1 </a:t>
             </a:r>
             <a:r>
-              <a:rPr lang="zh-CN" altLang="en-US" sz="1000" b="1">
+              <a:rPr lang="zh-CN" altLang="en-US" sz="1200" b="1">
                 <a:solidFill>
                   <a:srgbClr val="E67E22"/>
                 </a:solidFill>
@@ -25535,7 +25535,7 @@
           <p:cNvPr id="6" name="矩形: 圆角 5">
             <a:extLst>
               <a:ext uri="{FF2B5EF4-FFF2-40B4-BE49-F238E27FC236}">
-                <a16:creationId xmlns:a16="http://schemas.microsoft.com/office/drawing/2014/main" id="{8B3BC2CA-DC54-E1E0-B4CA-DDA8D47132C4}"/>
+                <a16:creationId xmlns:a16="http://schemas.microsoft.com/office/drawing/2014/main" id="{95FEE4D7-218B-1DFA-326C-2AEAB7D2306F}"/>
               </a:ext>
             </a:extLst>
           </p:cNvPr>
@@ -25603,7 +25603,7 @@
           <p:cNvPr id="7" name="文本框 6">
             <a:extLst>
               <a:ext uri="{FF2B5EF4-FFF2-40B4-BE49-F238E27FC236}">
-                <a16:creationId xmlns:a16="http://schemas.microsoft.com/office/drawing/2014/main" id="{8B30245C-3CE9-DE5E-F0E9-1D5EA4889792}"/>
+                <a16:creationId xmlns:a16="http://schemas.microsoft.com/office/drawing/2014/main" id="{E08469B3-CBA0-3799-D92B-44D451B3AA71}"/>
               </a:ext>
             </a:extLst>
           </p:cNvPr>
@@ -25709,7 +25709,7 @@
           <p:cNvPr id="9" name="图片 8">
             <a:extLst>
               <a:ext uri="{FF2B5EF4-FFF2-40B4-BE49-F238E27FC236}">
-                <a16:creationId xmlns:a16="http://schemas.microsoft.com/office/drawing/2014/main" id="{386081C4-748D-98A3-16F2-D092CBC74985}"/>
+                <a16:creationId xmlns:a16="http://schemas.microsoft.com/office/drawing/2014/main" id="{4ABFD9F2-839A-2D02-C762-4CE5FEF53255}"/>
               </a:ext>
             </a:extLst>
           </p:cNvPr>
@@ -25745,7 +25745,7 @@
           <p:cNvPr id="10" name="矩形 9">
             <a:extLst>
               <a:ext uri="{FF2B5EF4-FFF2-40B4-BE49-F238E27FC236}">
-                <a16:creationId xmlns:a16="http://schemas.microsoft.com/office/drawing/2014/main" id="{210077C7-A5F1-0094-C8E9-AE2433D10187}"/>
+                <a16:creationId xmlns:a16="http://schemas.microsoft.com/office/drawing/2014/main" id="{CC41AAD7-E913-D2E2-C3DF-15CF0EF990B5}"/>
               </a:ext>
             </a:extLst>
           </p:cNvPr>
@@ -25813,7 +25813,7 @@
           <p:cNvPr id="11" name="文本框 10">
             <a:extLst>
               <a:ext uri="{FF2B5EF4-FFF2-40B4-BE49-F238E27FC236}">
-                <a16:creationId xmlns:a16="http://schemas.microsoft.com/office/drawing/2014/main" id="{1487D9D1-AB77-F415-4765-C7CC7E9256F5}"/>
+                <a16:creationId xmlns:a16="http://schemas.microsoft.com/office/drawing/2014/main" id="{E83ED611-29B6-4643-D7B6-DEBF7D222BCC}"/>
               </a:ext>
             </a:extLst>
           </p:cNvPr>
@@ -25899,7 +25899,7 @@
           <p:cNvPr id="12" name="文本框 11">
             <a:extLst>
               <a:ext uri="{FF2B5EF4-FFF2-40B4-BE49-F238E27FC236}">
-                <a16:creationId xmlns:a16="http://schemas.microsoft.com/office/drawing/2014/main" id="{0305335A-A4A4-E048-9643-344542914868}"/>
+                <a16:creationId xmlns:a16="http://schemas.microsoft.com/office/drawing/2014/main" id="{7E6574DB-7FC0-8562-16A4-7AEC01F410D6}"/>
               </a:ext>
             </a:extLst>
           </p:cNvPr>
@@ -25950,7 +25950,7 @@
     </p:spTree>
     <p:extLst>
       <p:ext uri="{BB962C8B-B14F-4D97-AF65-F5344CB8AC3E}">
-        <p14:creationId xmlns:p14="http://schemas.microsoft.com/office/powerpoint/2010/main" val="1468437574"/>
+        <p14:creationId xmlns:p14="http://schemas.microsoft.com/office/powerpoint/2010/main" val="3161255727"/>
       </p:ext>
     </p:extLst>
   </p:cSld>
@@ -25990,7 +25990,7 @@
           <p:cNvPr id="2" name="矩形 1">
             <a:extLst>
               <a:ext uri="{FF2B5EF4-FFF2-40B4-BE49-F238E27FC236}">
-                <a16:creationId xmlns:a16="http://schemas.microsoft.com/office/drawing/2014/main" id="{A1B561C7-7E7C-C57E-2CDD-77BDBA1A0C4F}"/>
+                <a16:creationId xmlns:a16="http://schemas.microsoft.com/office/drawing/2014/main" id="{4DFBC20E-6306-7727-D71F-23DD1DC53DA0}"/>
               </a:ext>
             </a:extLst>
           </p:cNvPr>
@@ -26058,7 +26058,7 @@
           <p:cNvPr id="3" name="文本框 2">
             <a:extLst>
               <a:ext uri="{FF2B5EF4-FFF2-40B4-BE49-F238E27FC236}">
-                <a16:creationId xmlns:a16="http://schemas.microsoft.com/office/drawing/2014/main" id="{5346CBBD-6FE6-2B32-BD83-E697652B4A9A}"/>
+                <a16:creationId xmlns:a16="http://schemas.microsoft.com/office/drawing/2014/main" id="{769232B6-FE3F-A00D-1C2C-4C1589058A66}"/>
               </a:ext>
             </a:extLst>
           </p:cNvPr>
@@ -26144,7 +26144,7 @@
           <p:cNvPr id="4" name="文本框 3">
             <a:extLst>
               <a:ext uri="{FF2B5EF4-FFF2-40B4-BE49-F238E27FC236}">
-                <a16:creationId xmlns:a16="http://schemas.microsoft.com/office/drawing/2014/main" id="{0BA349A8-A749-59D5-B486-686A0DD69C42}"/>
+                <a16:creationId xmlns:a16="http://schemas.microsoft.com/office/drawing/2014/main" id="{9825199D-62D7-5838-492B-E8E99190D73D}"/>
               </a:ext>
             </a:extLst>
           </p:cNvPr>
@@ -26154,7 +26154,7 @@
         <p:spPr>
           <a:xfrm>
             <a:off x="711200" y="914400"/>
-            <a:ext cx="10922000" cy="161583"/>
+            <a:ext cx="10922000" cy="196849"/>
           </a:xfrm>
           <a:prstGeom prst="rect">
             <a:avLst/>
@@ -26169,11 +26169,11 @@
           <a:p>
             <a:pPr>
               <a:lnSpc>
-                <a:spcPct val="105000"/>
+                <a:spcPct val="110000"/>
               </a:lnSpc>
             </a:pPr>
             <a:r>
-              <a:rPr lang="zh-CN" altLang="en-US" sz="1050">
+              <a:rPr lang="zh-CN" altLang="en-US" sz="1250">
                 <a:solidFill>
                   <a:srgbClr val="7F8C8D"/>
                 </a:solidFill>
@@ -26183,7 +26183,7 @@
               <a:t>整体 </a:t>
             </a:r>
             <a:r>
-              <a:rPr lang="en-US" altLang="zh-CN" sz="1050">
+              <a:rPr lang="en-US" altLang="zh-CN" sz="1250">
                 <a:solidFill>
                   <a:srgbClr val="7F8C8D"/>
                 </a:solidFill>
@@ -26193,7 +26193,7 @@
               <a:t>MAD 0.00405</a:t>
             </a:r>
             <a:r>
-              <a:rPr lang="zh-CN" altLang="en-US" sz="1050">
+              <a:rPr lang="zh-CN" altLang="en-US" sz="1250">
                 <a:solidFill>
                   <a:srgbClr val="7F8C8D"/>
                 </a:solidFill>
@@ -26203,7 +26203,7 @@
               <a:t>（高度符合）；正常组 </a:t>
             </a:r>
             <a:r>
-              <a:rPr lang="en-US" altLang="zh-CN" sz="1050">
+              <a:rPr lang="en-US" altLang="zh-CN" sz="1250">
                 <a:solidFill>
                   <a:srgbClr val="7F8C8D"/>
                 </a:solidFill>
@@ -26213,7 +26213,7 @@
               <a:t>0.00325</a:t>
             </a:r>
             <a:r>
-              <a:rPr lang="zh-CN" altLang="en-US" sz="1050">
+              <a:rPr lang="zh-CN" altLang="en-US" sz="1250">
                 <a:solidFill>
                   <a:srgbClr val="7F8C8D"/>
                 </a:solidFill>
@@ -26223,7 +26223,7 @@
               <a:t>；异常组 </a:t>
             </a:r>
             <a:r>
-              <a:rPr lang="en-US" altLang="zh-CN" sz="1050">
+              <a:rPr lang="en-US" altLang="zh-CN" sz="1250">
                 <a:solidFill>
                   <a:srgbClr val="7F8C8D"/>
                 </a:solidFill>
@@ -26233,7 +26233,7 @@
               <a:t>0.03633</a:t>
             </a:r>
             <a:r>
-              <a:rPr lang="zh-CN" altLang="en-US" sz="1050">
+              <a:rPr lang="zh-CN" altLang="en-US" sz="1250">
                 <a:solidFill>
                   <a:srgbClr val="7F8C8D"/>
                 </a:solidFill>
@@ -26250,7 +26250,7 @@
           <p:cNvPr id="6" name="图片 5">
             <a:extLst>
               <a:ext uri="{FF2B5EF4-FFF2-40B4-BE49-F238E27FC236}">
-                <a16:creationId xmlns:a16="http://schemas.microsoft.com/office/drawing/2014/main" id="{B86361C0-0A65-C455-41DB-67439DB60179}"/>
+                <a16:creationId xmlns:a16="http://schemas.microsoft.com/office/drawing/2014/main" id="{FA0221B9-EFFA-EEF8-5B03-C957F09A96DA}"/>
               </a:ext>
             </a:extLst>
           </p:cNvPr>
@@ -26286,7 +26286,7 @@
           <p:cNvPr id="7" name="矩形 6">
             <a:extLst>
               <a:ext uri="{FF2B5EF4-FFF2-40B4-BE49-F238E27FC236}">
-                <a16:creationId xmlns:a16="http://schemas.microsoft.com/office/drawing/2014/main" id="{9943C0E1-C21C-7526-3302-A039431433CE}"/>
+                <a16:creationId xmlns:a16="http://schemas.microsoft.com/office/drawing/2014/main" id="{89363431-AAF9-E6DF-32BE-548BB2C58299}"/>
               </a:ext>
             </a:extLst>
           </p:cNvPr>
@@ -26354,7 +26354,7 @@
           <p:cNvPr id="8" name="文本框 7">
             <a:extLst>
               <a:ext uri="{FF2B5EF4-FFF2-40B4-BE49-F238E27FC236}">
-                <a16:creationId xmlns:a16="http://schemas.microsoft.com/office/drawing/2014/main" id="{3F4D31D6-1978-DA7D-909C-ED74E673211F}"/>
+                <a16:creationId xmlns:a16="http://schemas.microsoft.com/office/drawing/2014/main" id="{5B73C7E5-54EC-4090-8729-AD1C3A3DE0D2}"/>
               </a:ext>
             </a:extLst>
           </p:cNvPr>
@@ -26440,7 +26440,7 @@
           <p:cNvPr id="9" name="文本框 8">
             <a:extLst>
               <a:ext uri="{FF2B5EF4-FFF2-40B4-BE49-F238E27FC236}">
-                <a16:creationId xmlns:a16="http://schemas.microsoft.com/office/drawing/2014/main" id="{D4AA9C02-8ECB-2BF7-9BD6-C5697E88A0E2}"/>
+                <a16:creationId xmlns:a16="http://schemas.microsoft.com/office/drawing/2014/main" id="{7D627CD5-4523-EB3B-7605-4B3F2B8B8B3B}"/>
               </a:ext>
             </a:extLst>
           </p:cNvPr>
@@ -26491,7 +26491,7 @@
     </p:spTree>
     <p:extLst>
       <p:ext uri="{BB962C8B-B14F-4D97-AF65-F5344CB8AC3E}">
-        <p14:creationId xmlns:p14="http://schemas.microsoft.com/office/powerpoint/2010/main" val="3823791517"/>
+        <p14:creationId xmlns:p14="http://schemas.microsoft.com/office/powerpoint/2010/main" val="1546032911"/>
       </p:ext>
     </p:extLst>
   </p:cSld>
@@ -26531,7 +26531,7 @@
           <p:cNvPr id="2" name="矩形 1">
             <a:extLst>
               <a:ext uri="{FF2B5EF4-FFF2-40B4-BE49-F238E27FC236}">
-                <a16:creationId xmlns:a16="http://schemas.microsoft.com/office/drawing/2014/main" id="{A0182E1A-8280-99CF-2B44-460C2CA7B643}"/>
+                <a16:creationId xmlns:a16="http://schemas.microsoft.com/office/drawing/2014/main" id="{BC761D2A-7EC3-F17A-C056-6172480C01D9}"/>
               </a:ext>
             </a:extLst>
           </p:cNvPr>
@@ -26599,7 +26599,7 @@
           <p:cNvPr id="3" name="文本框 2">
             <a:extLst>
               <a:ext uri="{FF2B5EF4-FFF2-40B4-BE49-F238E27FC236}">
-                <a16:creationId xmlns:a16="http://schemas.microsoft.com/office/drawing/2014/main" id="{EEE0CECF-05FA-F1C8-CB9A-CDC3218D6C38}"/>
+                <a16:creationId xmlns:a16="http://schemas.microsoft.com/office/drawing/2014/main" id="{D145718E-D20E-2746-D2CE-D96DD633E30F}"/>
               </a:ext>
             </a:extLst>
           </p:cNvPr>
@@ -26665,7 +26665,7 @@
           <p:cNvPr id="4" name="文本框 3">
             <a:extLst>
               <a:ext uri="{FF2B5EF4-FFF2-40B4-BE49-F238E27FC236}">
-                <a16:creationId xmlns:a16="http://schemas.microsoft.com/office/drawing/2014/main" id="{81DE28D3-6A87-9D5D-CD2F-A573C0068355}"/>
+                <a16:creationId xmlns:a16="http://schemas.microsoft.com/office/drawing/2014/main" id="{B32631DF-985A-F119-05E7-DE46114D16DF}"/>
               </a:ext>
             </a:extLst>
           </p:cNvPr>
@@ -26675,7 +26675,7 @@
         <p:spPr>
           <a:xfrm>
             <a:off x="711200" y="914400"/>
-            <a:ext cx="10922000" cy="161583"/>
+            <a:ext cx="10922000" cy="196849"/>
           </a:xfrm>
           <a:prstGeom prst="rect">
             <a:avLst/>
@@ -26690,11 +26690,11 @@
           <a:p>
             <a:pPr>
               <a:lnSpc>
-                <a:spcPct val="105000"/>
+                <a:spcPct val="110000"/>
               </a:lnSpc>
             </a:pPr>
             <a:r>
-              <a:rPr lang="en-US" altLang="zh-CN" sz="1050">
+              <a:rPr lang="en-US" altLang="zh-CN" sz="1250">
                 <a:solidFill>
                   <a:srgbClr val="7F8C8D"/>
                 </a:solidFill>
@@ -26704,7 +26704,7 @@
               <a:t>contamination=0.02 </a:t>
             </a:r>
             <a:r>
-              <a:rPr lang="zh-CN" altLang="en-US" sz="1050">
+              <a:rPr lang="zh-CN" altLang="en-US" sz="1250">
                 <a:solidFill>
                   <a:srgbClr val="7F8C8D"/>
                 </a:solidFill>
@@ -26714,7 +26714,7 @@
               <a:t>对应 </a:t>
             </a:r>
             <a:r>
-              <a:rPr lang="en-US" altLang="zh-CN" sz="1050">
+              <a:rPr lang="en-US" altLang="zh-CN" sz="1250">
                 <a:solidFill>
                   <a:srgbClr val="7F8C8D"/>
                 </a:solidFill>
@@ -26724,7 +26724,7 @@
               <a:t>140 </a:t>
             </a:r>
             <a:r>
-              <a:rPr lang="zh-CN" altLang="en-US" sz="1050">
+              <a:rPr lang="zh-CN" altLang="en-US" sz="1250">
                 <a:solidFill>
                   <a:srgbClr val="7F8C8D"/>
                 </a:solidFill>
@@ -26734,7 +26734,7 @@
               <a:t>条审计容量；分数排序不变，</a:t>
             </a:r>
             <a:r>
-              <a:rPr lang="en-US" altLang="zh-CN" sz="1050">
+              <a:rPr lang="en-US" altLang="zh-CN" sz="1250">
                 <a:solidFill>
                   <a:srgbClr val="7F8C8D"/>
                 </a:solidFill>
@@ -26744,7 +26744,7 @@
               <a:t>K </a:t>
             </a:r>
             <a:r>
-              <a:rPr lang="zh-CN" altLang="en-US" sz="1050">
+              <a:rPr lang="zh-CN" altLang="en-US" sz="1250">
                 <a:solidFill>
                   <a:srgbClr val="7F8C8D"/>
                 </a:solidFill>
@@ -26761,7 +26761,7 @@
           <p:cNvPr id="6" name="图片 5">
             <a:extLst>
               <a:ext uri="{FF2B5EF4-FFF2-40B4-BE49-F238E27FC236}">
-                <a16:creationId xmlns:a16="http://schemas.microsoft.com/office/drawing/2014/main" id="{055B2368-3D35-16B4-27B0-383F5F9E5B01}"/>
+                <a16:creationId xmlns:a16="http://schemas.microsoft.com/office/drawing/2014/main" id="{5569DB5A-05C1-163A-99D7-61CFE96A6B89}"/>
               </a:ext>
             </a:extLst>
           </p:cNvPr>
@@ -26797,7 +26797,7 @@
           <p:cNvPr id="7" name="矩形 6">
             <a:extLst>
               <a:ext uri="{FF2B5EF4-FFF2-40B4-BE49-F238E27FC236}">
-                <a16:creationId xmlns:a16="http://schemas.microsoft.com/office/drawing/2014/main" id="{E9E7A71D-C882-FDC6-2C72-76CCB2798856}"/>
+                <a16:creationId xmlns:a16="http://schemas.microsoft.com/office/drawing/2014/main" id="{8AF2C7D7-2270-0FF9-EB3C-C9D889FD1ADF}"/>
               </a:ext>
             </a:extLst>
           </p:cNvPr>
@@ -26865,7 +26865,7 @@
           <p:cNvPr id="8" name="文本框 7">
             <a:extLst>
               <a:ext uri="{FF2B5EF4-FFF2-40B4-BE49-F238E27FC236}">
-                <a16:creationId xmlns:a16="http://schemas.microsoft.com/office/drawing/2014/main" id="{5509018A-95AE-C30B-A0D0-8FD72E8D66DF}"/>
+                <a16:creationId xmlns:a16="http://schemas.microsoft.com/office/drawing/2014/main" id="{8FFB2ED6-3C02-23DF-2C5A-1B8A9CA941A9}"/>
               </a:ext>
             </a:extLst>
           </p:cNvPr>
@@ -26951,7 +26951,7 @@
           <p:cNvPr id="9" name="文本框 8">
             <a:extLst>
               <a:ext uri="{FF2B5EF4-FFF2-40B4-BE49-F238E27FC236}">
-                <a16:creationId xmlns:a16="http://schemas.microsoft.com/office/drawing/2014/main" id="{260649FF-C2C4-1E49-E169-5987FAE6FB0F}"/>
+                <a16:creationId xmlns:a16="http://schemas.microsoft.com/office/drawing/2014/main" id="{FF210181-1F51-D846-0BB4-CF63B688266A}"/>
               </a:ext>
             </a:extLst>
           </p:cNvPr>
@@ -27002,7 +27002,7 @@
     </p:spTree>
     <p:extLst>
       <p:ext uri="{BB962C8B-B14F-4D97-AF65-F5344CB8AC3E}">
-        <p14:creationId xmlns:p14="http://schemas.microsoft.com/office/powerpoint/2010/main" val="177079924"/>
+        <p14:creationId xmlns:p14="http://schemas.microsoft.com/office/powerpoint/2010/main" val="4160560969"/>
       </p:ext>
     </p:extLst>
   </p:cSld>
@@ -27042,7 +27042,7 @@
           <p:cNvPr id="2" name="矩形 1">
             <a:extLst>
               <a:ext uri="{FF2B5EF4-FFF2-40B4-BE49-F238E27FC236}">
-                <a16:creationId xmlns:a16="http://schemas.microsoft.com/office/drawing/2014/main" id="{D01098C6-F7AF-1BF3-8967-44C83A3BD8B9}"/>
+                <a16:creationId xmlns:a16="http://schemas.microsoft.com/office/drawing/2014/main" id="{8D9E57AE-0A84-2479-D3C2-A6B3EDEBE912}"/>
               </a:ext>
             </a:extLst>
           </p:cNvPr>
@@ -27110,7 +27110,7 @@
           <p:cNvPr id="3" name="文本框 2">
             <a:extLst>
               <a:ext uri="{FF2B5EF4-FFF2-40B4-BE49-F238E27FC236}">
-                <a16:creationId xmlns:a16="http://schemas.microsoft.com/office/drawing/2014/main" id="{38842B14-6D59-9C97-63C6-276559C6ED5C}"/>
+                <a16:creationId xmlns:a16="http://schemas.microsoft.com/office/drawing/2014/main" id="{D7F3BF7E-040B-B5BC-7400-564363F66577}"/>
               </a:ext>
             </a:extLst>
           </p:cNvPr>
@@ -27156,7 +27156,7 @@
           <p:cNvPr id="4" name="文本框 3">
             <a:extLst>
               <a:ext uri="{FF2B5EF4-FFF2-40B4-BE49-F238E27FC236}">
-                <a16:creationId xmlns:a16="http://schemas.microsoft.com/office/drawing/2014/main" id="{10517D60-8782-EF3B-D84A-7097C3A06525}"/>
+                <a16:creationId xmlns:a16="http://schemas.microsoft.com/office/drawing/2014/main" id="{7C5D4695-BB45-AA9D-3018-E66C9791A523}"/>
               </a:ext>
             </a:extLst>
           </p:cNvPr>
@@ -27166,7 +27166,7 @@
         <p:spPr>
           <a:xfrm>
             <a:off x="711200" y="914400"/>
-            <a:ext cx="10922000" cy="329001"/>
+            <a:ext cx="10922000" cy="408445"/>
           </a:xfrm>
           <a:prstGeom prst="rect">
             <a:avLst/>
@@ -27181,11 +27181,11 @@
           <a:p>
             <a:pPr>
               <a:lnSpc>
-                <a:spcPct val="105000"/>
+                <a:spcPct val="110000"/>
               </a:lnSpc>
             </a:pPr>
             <a:r>
-              <a:rPr lang="zh-CN" altLang="en-US" sz="1050">
+              <a:rPr lang="zh-CN" altLang="en-US" sz="1250">
                 <a:solidFill>
                   <a:srgbClr val="7F8C8D"/>
                 </a:solidFill>
@@ -27195,7 +27195,7 @@
               <a:t>仅模型 </a:t>
             </a:r>
             <a:r>
-              <a:rPr lang="en-US" altLang="zh-CN" sz="1050">
+              <a:rPr lang="en-US" altLang="zh-CN" sz="1250">
                 <a:solidFill>
                   <a:srgbClr val="7F8C8D"/>
                 </a:solidFill>
@@ -27205,7 +27205,7 @@
               <a:t>122 </a:t>
             </a:r>
             <a:r>
-              <a:rPr lang="zh-CN" altLang="en-US" sz="1050">
+              <a:rPr lang="zh-CN" altLang="en-US" sz="1250">
                 <a:solidFill>
                   <a:srgbClr val="7F8C8D"/>
                 </a:solidFill>
@@ -27215,7 +27215,7 @@
               <a:t>条（异常率 </a:t>
             </a:r>
             <a:r>
-              <a:rPr lang="en-US" altLang="zh-CN" sz="1050">
+              <a:rPr lang="en-US" altLang="zh-CN" sz="1250">
                 <a:solidFill>
                   <a:srgbClr val="7F8C8D"/>
                 </a:solidFill>
@@ -27225,7 +27225,7 @@
               <a:t>91.8%</a:t>
             </a:r>
             <a:r>
-              <a:rPr lang="zh-CN" altLang="en-US" sz="1050">
+              <a:rPr lang="zh-CN" altLang="en-US" sz="1250">
                 <a:solidFill>
                   <a:srgbClr val="7F8C8D"/>
                 </a:solidFill>
@@ -27235,7 +27235,7 @@
               <a:t>）；同时命中 </a:t>
             </a:r>
             <a:r>
-              <a:rPr lang="en-US" altLang="zh-CN" sz="1050">
+              <a:rPr lang="en-US" altLang="zh-CN" sz="1250">
                 <a:solidFill>
                   <a:srgbClr val="7F8C8D"/>
                 </a:solidFill>
@@ -27245,7 +27245,7 @@
               <a:t>18 </a:t>
             </a:r>
             <a:r>
-              <a:rPr lang="zh-CN" altLang="en-US" sz="1050">
+              <a:rPr lang="zh-CN" altLang="en-US" sz="1250">
                 <a:solidFill>
                   <a:srgbClr val="7F8C8D"/>
                 </a:solidFill>
@@ -27255,7 +27255,7 @@
               <a:t>条（</a:t>
             </a:r>
             <a:r>
-              <a:rPr lang="en-US" altLang="zh-CN" sz="1050">
+              <a:rPr lang="en-US" altLang="zh-CN" sz="1250">
                 <a:solidFill>
                   <a:srgbClr val="7F8C8D"/>
                 </a:solidFill>
@@ -27265,7 +27265,7 @@
               <a:t>94.4%</a:t>
             </a:r>
             <a:r>
-              <a:rPr lang="zh-CN" altLang="en-US" sz="1050">
+              <a:rPr lang="zh-CN" altLang="en-US" sz="1250">
                 <a:solidFill>
                   <a:srgbClr val="7F8C8D"/>
                 </a:solidFill>
@@ -27278,11 +27278,11 @@
           <a:p>
             <a:pPr>
               <a:lnSpc>
-                <a:spcPct val="105000"/>
+                <a:spcPct val="110000"/>
               </a:lnSpc>
             </a:pPr>
             <a:r>
-              <a:rPr lang="zh-CN" altLang="en-US" sz="1050">
+              <a:rPr lang="zh-CN" altLang="en-US" sz="1250">
                 <a:solidFill>
                   <a:srgbClr val="7F8C8D"/>
                 </a:solidFill>
@@ -27292,7 +27292,7 @@
               <a:t>案例信号：审批延迟 </a:t>
             </a:r>
             <a:r>
-              <a:rPr lang="en-US" altLang="zh-CN" sz="1050">
+              <a:rPr lang="en-US" altLang="zh-CN" sz="1250">
                 <a:solidFill>
                   <a:srgbClr val="7F8C8D"/>
                 </a:solidFill>
@@ -27302,7 +27302,7 @@
               <a:t>339 min + </a:t>
             </a:r>
             <a:r>
-              <a:rPr lang="zh-CN" altLang="en-US" sz="1050">
+              <a:rPr lang="zh-CN" altLang="en-US" sz="1250">
                 <a:solidFill>
                   <a:srgbClr val="7F8C8D"/>
                 </a:solidFill>
@@ -27312,7 +27312,7 @@
               <a:t>发票匹配 </a:t>
             </a:r>
             <a:r>
-              <a:rPr lang="en-US" altLang="zh-CN" sz="1050">
+              <a:rPr lang="en-US" altLang="zh-CN" sz="1250">
                 <a:solidFill>
                   <a:srgbClr val="7F8C8D"/>
                 </a:solidFill>
@@ -27322,7 +27322,7 @@
               <a:t>0.44  ·  </a:t>
             </a:r>
             <a:r>
-              <a:rPr lang="zh-CN" altLang="en-US" sz="1050">
+              <a:rPr lang="zh-CN" altLang="en-US" sz="1250">
                 <a:solidFill>
                   <a:srgbClr val="7F8C8D"/>
                 </a:solidFill>
@@ -27332,7 +27332,7 @@
               <a:t>供应商风险 </a:t>
             </a:r>
             <a:r>
-              <a:rPr lang="en-US" altLang="zh-CN" sz="1050">
+              <a:rPr lang="en-US" altLang="zh-CN" sz="1250">
                 <a:solidFill>
                   <a:srgbClr val="7F8C8D"/>
                 </a:solidFill>
@@ -27342,7 +27342,7 @@
               <a:t>0.86  ·  </a:t>
             </a:r>
             <a:r>
-              <a:rPr lang="zh-CN" altLang="en-US" sz="1050">
+              <a:rPr lang="zh-CN" altLang="en-US" sz="1250">
                 <a:solidFill>
                   <a:srgbClr val="7F8C8D"/>
                 </a:solidFill>
@@ -27352,7 +27352,7 @@
               <a:t>金额</a:t>
             </a:r>
             <a:r>
-              <a:rPr lang="en-US" altLang="zh-CN" sz="1050">
+              <a:rPr lang="en-US" altLang="zh-CN" sz="1250">
                 <a:solidFill>
                   <a:srgbClr val="7F8C8D"/>
                 </a:solidFill>
@@ -27362,7 +27362,7 @@
               <a:t>/</a:t>
             </a:r>
             <a:r>
-              <a:rPr lang="zh-CN" altLang="en-US" sz="1050">
+              <a:rPr lang="zh-CN" altLang="en-US" sz="1250">
                 <a:solidFill>
                   <a:srgbClr val="7F8C8D"/>
                 </a:solidFill>
@@ -27372,7 +27372,7 @@
               <a:t>阈值 </a:t>
             </a:r>
             <a:r>
-              <a:rPr lang="en-US" altLang="zh-CN" sz="1050">
+              <a:rPr lang="en-US" altLang="zh-CN" sz="1250">
                 <a:solidFill>
                   <a:srgbClr val="7F8C8D"/>
                 </a:solidFill>
@@ -27381,7 +27381,7 @@
               </a:rPr>
               <a:t>97.4%</a:t>
             </a:r>
-            <a:endParaRPr lang="zh-CN" altLang="en-US" sz="1050">
+            <a:endParaRPr lang="zh-CN" altLang="en-US" sz="1250">
               <a:solidFill>
                 <a:srgbClr val="7F8C8D"/>
               </a:solidFill>
@@ -27396,7 +27396,7 @@
           <p:cNvPr id="6" name="图片 5">
             <a:extLst>
               <a:ext uri="{FF2B5EF4-FFF2-40B4-BE49-F238E27FC236}">
-                <a16:creationId xmlns:a16="http://schemas.microsoft.com/office/drawing/2014/main" id="{66DFA440-09E0-31E9-87AC-16A3345B27D5}"/>
+                <a16:creationId xmlns:a16="http://schemas.microsoft.com/office/drawing/2014/main" id="{F061FFC3-3651-2D0F-AA23-0B6699A9A852}"/>
               </a:ext>
             </a:extLst>
           </p:cNvPr>
@@ -27432,7 +27432,7 @@
           <p:cNvPr id="7" name="矩形: 圆角 6">
             <a:extLst>
               <a:ext uri="{FF2B5EF4-FFF2-40B4-BE49-F238E27FC236}">
-                <a16:creationId xmlns:a16="http://schemas.microsoft.com/office/drawing/2014/main" id="{C6CEB59D-9AA9-8C23-7059-265ACCEB29B2}"/>
+                <a16:creationId xmlns:a16="http://schemas.microsoft.com/office/drawing/2014/main" id="{E1DB1048-B164-751E-CCDD-1330FA90D21C}"/>
               </a:ext>
             </a:extLst>
           </p:cNvPr>
@@ -27500,7 +27500,7 @@
           <p:cNvPr id="8" name="文本框 7">
             <a:extLst>
               <a:ext uri="{FF2B5EF4-FFF2-40B4-BE49-F238E27FC236}">
-                <a16:creationId xmlns:a16="http://schemas.microsoft.com/office/drawing/2014/main" id="{FE9D3AC5-B09B-BAEA-013D-7DCE159820D8}"/>
+                <a16:creationId xmlns:a16="http://schemas.microsoft.com/office/drawing/2014/main" id="{E9BE93EF-3441-81B8-0F98-78EDEA65A19B}"/>
               </a:ext>
             </a:extLst>
           </p:cNvPr>
@@ -27586,7 +27586,7 @@
           <p:cNvPr id="9" name="矩形 8">
             <a:extLst>
               <a:ext uri="{FF2B5EF4-FFF2-40B4-BE49-F238E27FC236}">
-                <a16:creationId xmlns:a16="http://schemas.microsoft.com/office/drawing/2014/main" id="{3E0294D1-A8D1-3096-F9EA-0D0E667C4519}"/>
+                <a16:creationId xmlns:a16="http://schemas.microsoft.com/office/drawing/2014/main" id="{EAFF80CC-1470-765C-39F1-3A504EEBB103}"/>
               </a:ext>
             </a:extLst>
           </p:cNvPr>
@@ -27654,7 +27654,7 @@
           <p:cNvPr id="10" name="文本框 9">
             <a:extLst>
               <a:ext uri="{FF2B5EF4-FFF2-40B4-BE49-F238E27FC236}">
-                <a16:creationId xmlns:a16="http://schemas.microsoft.com/office/drawing/2014/main" id="{4BD527EA-1D7D-E2A1-A8FB-B0300A265FD9}"/>
+                <a16:creationId xmlns:a16="http://schemas.microsoft.com/office/drawing/2014/main" id="{BB5EF6A5-F193-85E7-E10F-2FCDFB721238}"/>
               </a:ext>
             </a:extLst>
           </p:cNvPr>
@@ -27740,7 +27740,7 @@
           <p:cNvPr id="11" name="文本框 10">
             <a:extLst>
               <a:ext uri="{FF2B5EF4-FFF2-40B4-BE49-F238E27FC236}">
-                <a16:creationId xmlns:a16="http://schemas.microsoft.com/office/drawing/2014/main" id="{564C7EAF-6913-C000-F9FD-8ABD10B18A45}"/>
+                <a16:creationId xmlns:a16="http://schemas.microsoft.com/office/drawing/2014/main" id="{3CBD5331-E6FC-1370-AA41-C4DF2ECE39A7}"/>
               </a:ext>
             </a:extLst>
           </p:cNvPr>
@@ -27791,7 +27791,7 @@
     </p:spTree>
     <p:extLst>
       <p:ext uri="{BB962C8B-B14F-4D97-AF65-F5344CB8AC3E}">
-        <p14:creationId xmlns:p14="http://schemas.microsoft.com/office/powerpoint/2010/main" val="2943020861"/>
+        <p14:creationId xmlns:p14="http://schemas.microsoft.com/office/powerpoint/2010/main" val="2672116009"/>
       </p:ext>
     </p:extLst>
   </p:cSld>
